--- a/presentation_loyers.pptx
+++ b/presentation_loyers.pptx
@@ -5,7 +5,7 @@
     <p:sldMasterId id="2147483648" r:id="rId1"/>
   </p:sldMasterIdLst>
   <p:notesMasterIdLst>
-    <p:notesMasterId r:id="rId11"/>
+    <p:notesMasterId r:id="rId12"/>
   </p:notesMasterIdLst>
   <p:sldIdLst>
     <p:sldId id="256" r:id="rId2"/>
@@ -17,6 +17,7 @@
     <p:sldId id="262" r:id="rId8"/>
     <p:sldId id="263" r:id="rId9"/>
     <p:sldId id="264" r:id="rId10"/>
+    <p:sldId id="265" r:id="rId11"/>
   </p:sldIdLst>
   <p:sldSz cx="12192000" cy="6858000"/>
   <p:notesSz cx="6858000" cy="12192000"/>
@@ -115,6 +116,9 @@
   <p:extLst>
     <p:ext uri="{EFAFB233-063F-42B5-8137-9DF3F51BA10A}">
       <p15:sldGuideLst xmlns:p15="http://schemas.microsoft.com/office/powerpoint/2012/main"/>
+    </p:ext>
+    <p:ext uri="{2D200454-40CA-4A62-9FC3-DE9A4176ACB9}">
+      <p15:notesGuideLst xmlns:p15="http://schemas.microsoft.com/office/powerpoint/2012/main"/>
     </p:ext>
   </p:extLst>
 </p:presentation>
@@ -1091,6 +1095,22 @@
   <p:clrMapOvr>
     <a:masterClrMapping/>
   </p:clrMapOvr>
+  <p:extLst>
+    <p:ext uri="{DCECCB84-F9BA-43D5-87BE-67443E8EF086}">
+      <p15:sldGuideLst xmlns:p15="http://schemas.microsoft.com/office/powerpoint/2012/main">
+        <p15:guide id="1" orient="horz" pos="2160" userDrawn="1">
+          <p15:clr>
+            <a:srgbClr val="FBAE40"/>
+          </p15:clr>
+        </p15:guide>
+        <p15:guide id="2" pos="3840" userDrawn="1">
+          <p15:clr>
+            <a:srgbClr val="FBAE40"/>
+          </p15:clr>
+        </p15:guide>
+      </p15:sldGuideLst>
+    </p:ext>
+  </p:extLst>
 </p:sldLayout>
 </file>
 
@@ -1373,6 +1393,22 @@
       </a:lvl9pPr>
     </p:otherStyle>
   </p:txStyles>
+  <p:extLst>
+    <p:ext uri="{27BBF7A9-308A-43DC-89C8-2F10F3537804}">
+      <p15:sldGuideLst xmlns:p15="http://schemas.microsoft.com/office/powerpoint/2012/main">
+        <p15:guide id="1" orient="horz" pos="2160" userDrawn="1">
+          <p15:clr>
+            <a:srgbClr val="F26B43"/>
+          </p15:clr>
+        </p15:guide>
+        <p15:guide id="2" pos="3840" userDrawn="1">
+          <p15:clr>
+            <a:srgbClr val="F26B43"/>
+          </p15:clr>
+        </p15:guide>
+      </p15:sldGuideLst>
+    </p:ext>
+  </p:extLst>
 </p:sldMaster>
 </file>
 
@@ -1507,13 +1543,16 @@
                 <a:solidFill>
                   <a:srgbClr val="4F8EF7"/>
                 </a:solidFill>
-                <a:latin typeface="Calibri" pitchFamily="34" charset="0"/>
+                <a:latin typeface="Times New Roman" panose="02020603050405020304" pitchFamily="18" charset="0"/>
                 <a:ea typeface="Calibri" pitchFamily="34" charset="-122"/>
-                <a:cs typeface="Calibri" pitchFamily="34" charset="-120"/>
+                <a:cs typeface="Times New Roman" panose="02020603050405020304" pitchFamily="18" charset="0"/>
               </a:rPr>
               <a:t>PROJET 4 — Python</a:t>
             </a:r>
-            <a:endParaRPr lang="en-US" sz="1100" dirty="0"/>
+            <a:endParaRPr lang="en-US" sz="1100" dirty="0">
+              <a:latin typeface="Times New Roman" panose="02020603050405020304" pitchFamily="18" charset="0"/>
+              <a:cs typeface="Times New Roman" panose="02020603050405020304" pitchFamily="18" charset="0"/>
+            </a:endParaRPr>
           </a:p>
         </p:txBody>
       </p:sp>
@@ -1542,17 +1581,53 @@
               <a:buNone/>
             </a:pPr>
             <a:r>
-              <a:rPr lang="en-US" sz="5200" b="1" dirty="0">
-                <a:solidFill>
-                  <a:srgbClr val="FFFFFF"/>
-                </a:solidFill>
-                <a:latin typeface="Trebuchet MS" pitchFamily="34" charset="0"/>
+              <a:rPr lang="en-US" sz="5200" b="1" spc="50" dirty="0">
+                <a:ln w="9525" cmpd="sng">
+                  <a:solidFill>
+                    <a:schemeClr val="accent1"/>
+                  </a:solidFill>
+                  <a:prstDash val="solid"/>
+                </a:ln>
+                <a:solidFill>
+                  <a:srgbClr val="70AD47">
+                    <a:tint val="1000"/>
+                  </a:srgbClr>
+                </a:solidFill>
+                <a:effectLst>
+                  <a:glow rad="38100">
+                    <a:schemeClr val="accent1">
+                      <a:alpha val="40000"/>
+                    </a:schemeClr>
+                  </a:glow>
+                </a:effectLst>
+                <a:latin typeface="Times New Roman" panose="02020603050405020304" pitchFamily="18" charset="0"/>
                 <a:ea typeface="Trebuchet MS" pitchFamily="34" charset="-122"/>
-                <a:cs typeface="Trebuchet MS" pitchFamily="34" charset="-120"/>
+                <a:cs typeface="Times New Roman" panose="02020603050405020304" pitchFamily="18" charset="0"/>
               </a:rPr>
               <a:t>Prediction des Loyers</a:t>
             </a:r>
-            <a:endParaRPr lang="en-US" sz="5200" dirty="0"/>
+            <a:endParaRPr lang="en-US" sz="5200" b="1" spc="50" dirty="0">
+              <a:ln w="9525" cmpd="sng">
+                <a:solidFill>
+                  <a:schemeClr val="accent1"/>
+                </a:solidFill>
+                <a:prstDash val="solid"/>
+              </a:ln>
+              <a:solidFill>
+                <a:srgbClr val="70AD47">
+                  <a:tint val="1000"/>
+                </a:srgbClr>
+              </a:solidFill>
+              <a:effectLst>
+                <a:glow rad="38100">
+                  <a:schemeClr val="accent1">
+                    <a:alpha val="40000"/>
+                  </a:schemeClr>
+                </a:glow>
+              </a:effectLst>
+              <a:latin typeface="Times New Roman" panose="02020603050405020304" pitchFamily="18" charset="0"/>
+              <a:cs typeface="Times New Roman" panose="02020603050405020304" pitchFamily="18" charset="0"/>
+            </a:endParaRPr>
           </a:p>
         </p:txBody>
       </p:sp>
@@ -1581,56 +1656,63 @@
               <a:buNone/>
             </a:pPr>
             <a:r>
-              <a:rPr lang="en-US" sz="4200" b="1" dirty="0">
-                <a:solidFill>
-                  <a:srgbClr val="4F8EF7"/>
-                </a:solidFill>
-                <a:latin typeface="Trebuchet MS" pitchFamily="34" charset="0"/>
+              <a:rPr lang="en-US" sz="4200" dirty="0">
+                <a:ln w="0"/>
+                <a:gradFill>
+                  <a:gsLst>
+                    <a:gs pos="0">
+                      <a:schemeClr val="accent5">
+                        <a:lumMod val="50000"/>
+                      </a:schemeClr>
+                    </a:gs>
+                    <a:gs pos="50000">
+                      <a:schemeClr val="accent5"/>
+                    </a:gs>
+                    <a:gs pos="100000">
+                      <a:schemeClr val="accent5">
+                        <a:lumMod val="60000"/>
+                        <a:lumOff val="40000"/>
+                      </a:schemeClr>
+                    </a:gs>
+                  </a:gsLst>
+                  <a:lin ang="5400000"/>
+                </a:gradFill>
+                <a:effectLst>
+                  <a:reflection blurRad="6350" stA="53000" endA="300" endPos="35500" dir="5400000" sy="-90000" algn="bl" rotWithShape="0"/>
+                </a:effectLst>
+                <a:latin typeface="Times New Roman" panose="02020603050405020304" pitchFamily="18" charset="0"/>
                 <a:ea typeface="Trebuchet MS" pitchFamily="34" charset="-122"/>
-                <a:cs typeface="Trebuchet MS" pitchFamily="34" charset="-120"/>
+                <a:cs typeface="Times New Roman" panose="02020603050405020304" pitchFamily="18" charset="0"/>
               </a:rPr>
               <a:t>Immobiliers en Inde</a:t>
             </a:r>
-            <a:endParaRPr lang="en-US" sz="4200" dirty="0"/>
-          </a:p>
-        </p:txBody>
-      </p:sp>
-      <p:sp>
-        <p:nvSpPr>
-          <p:cNvPr id="8" name="Text 6"/>
-          <p:cNvSpPr/>
-          <p:nvPr/>
-        </p:nvSpPr>
-        <p:spPr>
-          <a:xfrm>
-            <a:off x="2572149" y="4156258"/>
-            <a:ext cx="6366682" cy="749601"/>
-          </a:xfrm>
-          <a:prstGeom prst="rect">
-            <a:avLst/>
-          </a:prstGeom>
-          <a:noFill/>
-          <a:ln/>
-        </p:spPr>
-        <p:txBody>
-          <a:bodyPr wrap="square" rtlCol="0" anchor="ctr"/>
-          <a:lstStyle/>
-          <a:p>
-            <a:pPr marL="0" indent="0" algn="ctr">
-              <a:buNone/>
-            </a:pPr>
-            <a:r>
-              <a:rPr lang="en-US" sz="1400" dirty="0">
-                <a:solidFill>
-                  <a:srgbClr val="94A3B8"/>
-                </a:solidFill>
-                <a:latin typeface="Calibri" pitchFamily="34" charset="0"/>
-                <a:ea typeface="Calibri" pitchFamily="34" charset="-122"/>
-                <a:cs typeface="Calibri" pitchFamily="34" charset="-120"/>
-              </a:rPr>
-              <a:t>House Rent Prediction Dataset • 4 746 proprietes • 6 villes</a:t>
-            </a:r>
-            <a:endParaRPr lang="en-US" sz="1400" dirty="0"/>
+            <a:endParaRPr lang="en-US" sz="4200" dirty="0">
+              <a:ln w="0"/>
+              <a:gradFill>
+                <a:gsLst>
+                  <a:gs pos="0">
+                    <a:schemeClr val="accent5">
+                      <a:lumMod val="50000"/>
+                    </a:schemeClr>
+                  </a:gs>
+                  <a:gs pos="50000">
+                    <a:schemeClr val="accent5"/>
+                  </a:gs>
+                  <a:gs pos="100000">
+                    <a:schemeClr val="accent5">
+                      <a:lumMod val="60000"/>
+                      <a:lumOff val="40000"/>
+                    </a:schemeClr>
+                  </a:gs>
+                </a:gsLst>
+                <a:lin ang="5400000"/>
+              </a:gradFill>
+              <a:effectLst>
+                <a:reflection blurRad="6350" stA="53000" endA="300" endPos="35500" dir="5400000" sy="-90000" algn="bl" rotWithShape="0"/>
+              </a:effectLst>
+              <a:latin typeface="Times New Roman" panose="02020603050405020304" pitchFamily="18" charset="0"/>
+              <a:cs typeface="Times New Roman" panose="02020603050405020304" pitchFamily="18" charset="0"/>
+            </a:endParaRPr>
           </a:p>
         </p:txBody>
       </p:sp>
@@ -1672,8 +1754,8 @@
         </p:nvSpPr>
         <p:spPr>
           <a:xfrm>
-            <a:off x="457200" y="5733085"/>
-            <a:ext cx="10972800" cy="695351"/>
+            <a:off x="599137" y="5978688"/>
+            <a:ext cx="10972800" cy="807274"/>
           </a:xfrm>
           <a:prstGeom prst="rect">
             <a:avLst/>
@@ -1689,15 +1771,15 @@
               <a:buNone/>
             </a:pPr>
             <a:r>
-              <a:rPr lang="en-US" sz="1100" dirty="0">
-                <a:solidFill>
-                  <a:srgbClr val="94A3B8"/>
-                </a:solidFill>
-                <a:latin typeface="Calibri" pitchFamily="34" charset="0"/>
+              <a:rPr lang="en-US" sz="1200" dirty="0">
+                <a:solidFill>
+                  <a:schemeClr val="bg1"/>
+                </a:solidFill>
+                <a:latin typeface="Times New Roman" panose="02020603050405020304" pitchFamily="18" charset="0"/>
                 <a:ea typeface="Calibri" pitchFamily="34" charset="-122"/>
-                <a:cs typeface="Calibri" pitchFamily="34" charset="-120"/>
-              </a:rPr>
-              <a:t>Zekerya Ethmane Sow  •  C34636                                                                                                                                                                                                                                                 •  Dr. Ezyn Segnane</a:t>
+                <a:cs typeface="Times New Roman" panose="02020603050405020304" pitchFamily="18" charset="0"/>
+              </a:rPr>
+              <a:t>Zekerya Ethmane Sow  •  C34636                                                                                                                                                                                              Dr. Ezyn Segnane</a:t>
             </a:r>
           </a:p>
           <a:p>
@@ -1720,7 +1802,7 @@
             <a:r>
               <a:rPr lang="en-US" sz="1100" dirty="0">
                 <a:solidFill>
-                  <a:srgbClr val="94A3B8"/>
+                  <a:schemeClr val="bg1"/>
                 </a:solidFill>
                 <a:latin typeface="Calibri" pitchFamily="34" charset="0"/>
                 <a:ea typeface="Calibri" pitchFamily="34" charset="-122"/>
@@ -1734,17 +1816,23 @@
               <a:buNone/>
             </a:pPr>
             <a:r>
-              <a:rPr lang="en-US" sz="1100" dirty="0">
-                <a:solidFill>
-                  <a:srgbClr val="94A3B8"/>
-                </a:solidFill>
-                <a:latin typeface="Calibri" pitchFamily="34" charset="0"/>
+              <a:rPr lang="en-US" sz="1200" dirty="0">
+                <a:solidFill>
+                  <a:schemeClr val="bg1"/>
+                </a:solidFill>
+                <a:latin typeface="Times New Roman" panose="02020603050405020304" pitchFamily="18" charset="0"/>
                 <a:ea typeface="Calibri" pitchFamily="34" charset="-122"/>
-                <a:cs typeface="Calibri" pitchFamily="34" charset="-120"/>
+                <a:cs typeface="Times New Roman" panose="02020603050405020304" pitchFamily="18" charset="0"/>
               </a:rPr>
               <a:t>•  Juin 2026</a:t>
             </a:r>
-            <a:endParaRPr lang="en-US" sz="1100" dirty="0"/>
+            <a:endParaRPr lang="en-US" sz="1200" dirty="0">
+              <a:solidFill>
+                <a:schemeClr val="bg1"/>
+              </a:solidFill>
+              <a:latin typeface="Times New Roman" panose="02020603050405020304" pitchFamily="18" charset="0"/>
+              <a:cs typeface="Times New Roman" panose="02020603050405020304" pitchFamily="18" charset="0"/>
+            </a:endParaRPr>
           </a:p>
         </p:txBody>
       </p:sp>
@@ -1798,7 +1886,7 @@
         </p:nvSpPr>
         <p:spPr>
           <a:xfrm>
-            <a:off x="2838734" y="22007"/>
+            <a:off x="2821518" y="72038"/>
             <a:ext cx="5653358" cy="841739"/>
           </a:xfrm>
           <a:prstGeom prst="rect">
@@ -1907,22 +1995,25 @@
               <a:buNone/>
             </a:pPr>
             <a:r>
-              <a:rPr lang="fr-FR" sz="1200" dirty="0">
+              <a:rPr lang="fr-FR" sz="1400" dirty="0">
                 <a:solidFill>
                   <a:schemeClr val="bg1"/>
                 </a:solidFill>
                 <a:effectLst/>
                 <a:latin typeface="Times New Roman" panose="02020603050405020304" pitchFamily="18" charset="0"/>
                 <a:ea typeface="Calibri" panose="020F0502020204030204" pitchFamily="34" charset="0"/>
+                <a:cs typeface="Times New Roman" panose="02020603050405020304" pitchFamily="18" charset="0"/>
               </a:rPr>
               <a:t>Université de Nouakchott </a:t>
             </a:r>
-            <a:endParaRPr lang="fr-FR" sz="1100" dirty="0">
+            <a:endParaRPr lang="fr-FR" sz="1200" dirty="0">
               <a:solidFill>
                 <a:schemeClr val="bg1"/>
               </a:solidFill>
               <a:effectLst/>
+              <a:latin typeface="Times New Roman" panose="02020603050405020304" pitchFamily="18" charset="0"/>
               <a:ea typeface="Calibri" panose="020F0502020204030204" pitchFamily="34" charset="0"/>
+              <a:cs typeface="Times New Roman" panose="02020603050405020304" pitchFamily="18" charset="0"/>
             </a:endParaRPr>
           </a:p>
           <a:p>
@@ -1936,22 +2027,25 @@
               <a:buNone/>
             </a:pPr>
             <a:r>
-              <a:rPr lang="fr-FR" sz="1200" dirty="0">
+              <a:rPr lang="fr-FR" sz="1400" dirty="0">
                 <a:solidFill>
                   <a:schemeClr val="bg1"/>
                 </a:solidFill>
                 <a:effectLst/>
                 <a:latin typeface="Times New Roman" panose="02020603050405020304" pitchFamily="18" charset="0"/>
                 <a:ea typeface="Calibri" panose="020F0502020204030204" pitchFamily="34" charset="0"/>
+                <a:cs typeface="Times New Roman" panose="02020603050405020304" pitchFamily="18" charset="0"/>
               </a:rPr>
               <a:t>Faculté des Sciences et Techniques – Département Informatique</a:t>
             </a:r>
-            <a:endParaRPr lang="fr-FR" sz="1100" dirty="0">
+            <a:endParaRPr lang="fr-FR" sz="1200" dirty="0">
               <a:solidFill>
                 <a:schemeClr val="bg1"/>
               </a:solidFill>
               <a:effectLst/>
+              <a:latin typeface="Times New Roman" panose="02020603050405020304" pitchFamily="18" charset="0"/>
               <a:ea typeface="Calibri" panose="020F0502020204030204" pitchFamily="34" charset="0"/>
+              <a:cs typeface="Times New Roman" panose="02020603050405020304" pitchFamily="18" charset="0"/>
             </a:endParaRPr>
           </a:p>
           <a:p>
@@ -2032,7 +2126,7 @@
         </p:nvSpPr>
         <p:spPr>
           <a:xfrm>
-            <a:off x="3668988" y="891376"/>
+            <a:off x="3869595" y="1043261"/>
             <a:ext cx="3670935" cy="572770"/>
           </a:xfrm>
           <a:prstGeom prst="rect">
@@ -2098,22 +2192,25 @@
               <a:buNone/>
             </a:pPr>
             <a:r>
-              <a:rPr lang="fr-FR" sz="1200" dirty="0">
+              <a:rPr lang="fr-FR" sz="1400" dirty="0">
                 <a:solidFill>
                   <a:schemeClr val="bg1"/>
                 </a:solidFill>
                 <a:effectLst/>
                 <a:latin typeface="Times New Roman" panose="02020603050405020304" pitchFamily="18" charset="0"/>
                 <a:ea typeface="Calibri" panose="020F0502020204030204" pitchFamily="34" charset="0"/>
+                <a:cs typeface="Times New Roman" panose="02020603050405020304" pitchFamily="18" charset="0"/>
               </a:rPr>
               <a:t>Master 1 / Statistique et Sciences des Données </a:t>
             </a:r>
-            <a:endParaRPr lang="fr-FR" sz="1100" dirty="0">
+            <a:endParaRPr lang="fr-FR" sz="1200" dirty="0">
               <a:solidFill>
                 <a:schemeClr val="bg1"/>
               </a:solidFill>
               <a:effectLst/>
+              <a:latin typeface="Times New Roman" panose="02020603050405020304" pitchFamily="18" charset="0"/>
               <a:ea typeface="Calibri" panose="020F0502020204030204" pitchFamily="34" charset="0"/>
+              <a:cs typeface="Times New Roman" panose="02020603050405020304" pitchFamily="18" charset="0"/>
             </a:endParaRPr>
           </a:p>
           <a:p>
@@ -2212,6 +2309,409 @@
 </p:sld>
 </file>
 
+<file path=ppt/slides/slide10.xml><?xml version="1.0" encoding="utf-8"?>
+<p:sld xmlns:a="http://schemas.openxmlformats.org/drawingml/2006/main" xmlns:r="http://schemas.openxmlformats.org/officeDocument/2006/relationships" xmlns:p="http://schemas.openxmlformats.org/presentationml/2006/main">
+  <p:cSld>
+    <p:spTree>
+      <p:nvGrpSpPr>
+        <p:cNvPr id="1" name=""/>
+        <p:cNvGrpSpPr/>
+        <p:nvPr/>
+      </p:nvGrpSpPr>
+      <p:grpSpPr>
+        <a:xfrm>
+          <a:off x="0" y="0"/>
+          <a:ext cx="0" cy="0"/>
+          <a:chOff x="0" y="0"/>
+          <a:chExt cx="0" cy="0"/>
+        </a:xfrm>
+      </p:grpSpPr>
+      <p:sp>
+        <p:nvSpPr>
+          <p:cNvPr id="2" name="Shape 0">
+            <a:extLst>
+              <a:ext uri="{FF2B5EF4-FFF2-40B4-BE49-F238E27FC236}">
+                <a16:creationId xmlns:a16="http://schemas.microsoft.com/office/drawing/2014/main" id="{C667331C-B97F-A5A3-2CE0-81F2F1F743C3}"/>
+              </a:ext>
+            </a:extLst>
+          </p:cNvPr>
+          <p:cNvSpPr/>
+          <p:nvPr/>
+        </p:nvSpPr>
+        <p:spPr>
+          <a:xfrm>
+            <a:off x="47801" y="0"/>
+            <a:ext cx="12192000" cy="6858000"/>
+          </a:xfrm>
+          <a:prstGeom prst="rect">
+            <a:avLst/>
+          </a:prstGeom>
+          <a:solidFill>
+            <a:srgbClr val="0A0E1A"/>
+          </a:solidFill>
+          <a:ln/>
+        </p:spPr>
+        <p:txBody>
+          <a:bodyPr/>
+          <a:lstStyle/>
+          <a:p>
+            <a:endParaRPr lang="fr-FR"/>
+          </a:p>
+        </p:txBody>
+      </p:sp>
+      <p:sp>
+        <p:nvSpPr>
+          <p:cNvPr id="4" name="Shape 2">
+            <a:extLst>
+              <a:ext uri="{FF2B5EF4-FFF2-40B4-BE49-F238E27FC236}">
+                <a16:creationId xmlns:a16="http://schemas.microsoft.com/office/drawing/2014/main" id="{1615097A-DF81-859B-512A-45681F8011EB}"/>
+              </a:ext>
+            </a:extLst>
+          </p:cNvPr>
+          <p:cNvSpPr/>
+          <p:nvPr/>
+        </p:nvSpPr>
+        <p:spPr>
+          <a:xfrm>
+            <a:off x="-1221474" y="3815914"/>
+            <a:ext cx="4114800" cy="4114800"/>
+          </a:xfrm>
+          <a:prstGeom prst="ellipse">
+            <a:avLst/>
+          </a:prstGeom>
+          <a:solidFill>
+            <a:srgbClr val="1A1A35"/>
+          </a:solidFill>
+          <a:ln w="12700">
+            <a:solidFill>
+              <a:srgbClr val="1A1A35"/>
+            </a:solidFill>
+            <a:prstDash val="solid"/>
+          </a:ln>
+        </p:spPr>
+        <p:txBody>
+          <a:bodyPr/>
+          <a:lstStyle/>
+          <a:p>
+            <a:endParaRPr lang="fr-FR"/>
+          </a:p>
+        </p:txBody>
+      </p:sp>
+      <p:sp>
+        <p:nvSpPr>
+          <p:cNvPr id="5" name="Shape 2">
+            <a:extLst>
+              <a:ext uri="{FF2B5EF4-FFF2-40B4-BE49-F238E27FC236}">
+                <a16:creationId xmlns:a16="http://schemas.microsoft.com/office/drawing/2014/main" id="{ED95F28E-2977-5324-5F09-E2F982DEFD92}"/>
+              </a:ext>
+            </a:extLst>
+          </p:cNvPr>
+          <p:cNvSpPr/>
+          <p:nvPr/>
+        </p:nvSpPr>
+        <p:spPr>
+          <a:xfrm>
+            <a:off x="9696735" y="-1072714"/>
+            <a:ext cx="4114800" cy="4114800"/>
+          </a:xfrm>
+          <a:prstGeom prst="ellipse">
+            <a:avLst/>
+          </a:prstGeom>
+          <a:solidFill>
+            <a:srgbClr val="1A1A35"/>
+          </a:solidFill>
+          <a:ln w="12700">
+            <a:solidFill>
+              <a:srgbClr val="1A1A35"/>
+            </a:solidFill>
+            <a:prstDash val="solid"/>
+          </a:ln>
+        </p:spPr>
+        <p:txBody>
+          <a:bodyPr/>
+          <a:lstStyle/>
+          <a:p>
+            <a:endParaRPr lang="fr-FR"/>
+          </a:p>
+        </p:txBody>
+      </p:sp>
+      <p:sp>
+        <p:nvSpPr>
+          <p:cNvPr id="6" name="Text 4">
+            <a:extLst>
+              <a:ext uri="{FF2B5EF4-FFF2-40B4-BE49-F238E27FC236}">
+                <a16:creationId xmlns:a16="http://schemas.microsoft.com/office/drawing/2014/main" id="{3F516818-3955-7B35-101C-5975B363BE05}"/>
+              </a:ext>
+            </a:extLst>
+          </p:cNvPr>
+          <p:cNvSpPr/>
+          <p:nvPr/>
+        </p:nvSpPr>
+        <p:spPr>
+          <a:xfrm>
+            <a:off x="121693" y="2005538"/>
+            <a:ext cx="11655188" cy="1475323"/>
+          </a:xfrm>
+          <a:prstGeom prst="rect">
+            <a:avLst/>
+          </a:prstGeom>
+          <a:noFill/>
+          <a:ln/>
+        </p:spPr>
+        <p:txBody>
+          <a:bodyPr wrap="square" lIns="0" tIns="0" rIns="0" bIns="0" rtlCol="0" anchor="ctr"/>
+          <a:lstStyle/>
+          <a:p>
+            <a:pPr marL="0" indent="0" algn="ctr">
+              <a:buNone/>
+            </a:pPr>
+            <a:r>
+              <a:rPr lang="en-US" sz="4000" b="1" dirty="0">
+                <a:ln w="6600">
+                  <a:solidFill>
+                    <a:schemeClr val="accent2"/>
+                  </a:solidFill>
+                  <a:prstDash val="solid"/>
+                </a:ln>
+                <a:solidFill>
+                  <a:srgbClr val="FFFFFF"/>
+                </a:solidFill>
+                <a:effectLst>
+                  <a:outerShdw dist="38100" dir="2700000" algn="tl" rotWithShape="0">
+                    <a:schemeClr val="accent2"/>
+                  </a:outerShdw>
+                </a:effectLst>
+                <a:latin typeface="Algerian" panose="04020705040A02060702" pitchFamily="82" charset="0"/>
+                <a:ea typeface="Arial Black" pitchFamily="34" charset="-122"/>
+                <a:cs typeface="Times New Roman" panose="02020603050405020304" pitchFamily="18" charset="0"/>
+              </a:rPr>
+              <a:t>Merci pour</a:t>
+            </a:r>
+            <a:r>
+              <a:rPr lang="en-US" sz="4000" b="1" dirty="0">
+                <a:ln w="6600">
+                  <a:solidFill>
+                    <a:schemeClr val="accent2"/>
+                  </a:solidFill>
+                  <a:prstDash val="solid"/>
+                </a:ln>
+                <a:solidFill>
+                  <a:srgbClr val="FFFFFF"/>
+                </a:solidFill>
+                <a:effectLst>
+                  <a:outerShdw dist="38100" dir="2700000" algn="tl" rotWithShape="0">
+                    <a:schemeClr val="accent2"/>
+                  </a:outerShdw>
+                </a:effectLst>
+                <a:latin typeface="Algerian" panose="04020705040A02060702" pitchFamily="82" charset="0"/>
+                <a:cs typeface="Times New Roman" panose="02020603050405020304" pitchFamily="18" charset="0"/>
+              </a:rPr>
+              <a:t>  </a:t>
+            </a:r>
+            <a:r>
+              <a:rPr lang="en-US" sz="4000" b="1" dirty="0">
+                <a:ln w="6600">
+                  <a:solidFill>
+                    <a:schemeClr val="accent2"/>
+                  </a:solidFill>
+                  <a:prstDash val="solid"/>
+                </a:ln>
+                <a:solidFill>
+                  <a:srgbClr val="FFFFFF"/>
+                </a:solidFill>
+                <a:effectLst>
+                  <a:outerShdw dist="38100" dir="2700000" algn="tl" rotWithShape="0">
+                    <a:schemeClr val="accent2"/>
+                  </a:outerShdw>
+                </a:effectLst>
+                <a:latin typeface="Algerian" panose="04020705040A02060702" pitchFamily="82" charset="0"/>
+                <a:ea typeface="Arial Black" pitchFamily="34" charset="-122"/>
+                <a:cs typeface="Times New Roman" panose="02020603050405020304" pitchFamily="18" charset="0"/>
+              </a:rPr>
+              <a:t>votre attention</a:t>
+            </a:r>
+            <a:endParaRPr lang="en-US" sz="4000" b="1" dirty="0">
+              <a:ln w="6600">
+                <a:solidFill>
+                  <a:schemeClr val="accent2"/>
+                </a:solidFill>
+                <a:prstDash val="solid"/>
+              </a:ln>
+              <a:solidFill>
+                <a:srgbClr val="FFFFFF"/>
+              </a:solidFill>
+              <a:effectLst>
+                <a:outerShdw dist="38100" dir="2700000" algn="tl" rotWithShape="0">
+                  <a:schemeClr val="accent2"/>
+                </a:outerShdw>
+              </a:effectLst>
+              <a:latin typeface="Algerian" panose="04020705040A02060702" pitchFamily="82" charset="0"/>
+              <a:cs typeface="Times New Roman" panose="02020603050405020304" pitchFamily="18" charset="0"/>
+            </a:endParaRPr>
+          </a:p>
+        </p:txBody>
+      </p:sp>
+      <p:sp>
+        <p:nvSpPr>
+          <p:cNvPr id="7" name="Shape 5">
+            <a:extLst>
+              <a:ext uri="{FF2B5EF4-FFF2-40B4-BE49-F238E27FC236}">
+                <a16:creationId xmlns:a16="http://schemas.microsoft.com/office/drawing/2014/main" id="{870F77E7-4D39-D6C3-2E39-7517A6487D9D}"/>
+              </a:ext>
+            </a:extLst>
+          </p:cNvPr>
+          <p:cNvSpPr/>
+          <p:nvPr/>
+        </p:nvSpPr>
+        <p:spPr>
+          <a:xfrm>
+            <a:off x="2173405" y="3391058"/>
+            <a:ext cx="7523329" cy="45719"/>
+          </a:xfrm>
+          <a:prstGeom prst="rect">
+            <a:avLst/>
+          </a:prstGeom>
+          <a:solidFill>
+            <a:srgbClr val="FFCC00"/>
+          </a:solidFill>
+          <a:ln w="12700">
+            <a:solidFill>
+              <a:srgbClr val="FFCC00"/>
+            </a:solidFill>
+            <a:prstDash val="solid"/>
+          </a:ln>
+        </p:spPr>
+        <p:txBody>
+          <a:bodyPr/>
+          <a:lstStyle/>
+          <a:p>
+            <a:endParaRPr lang="fr-FR"/>
+          </a:p>
+        </p:txBody>
+      </p:sp>
+      <p:sp>
+        <p:nvSpPr>
+          <p:cNvPr id="8" name="Shape 5">
+            <a:extLst>
+              <a:ext uri="{FF2B5EF4-FFF2-40B4-BE49-F238E27FC236}">
+                <a16:creationId xmlns:a16="http://schemas.microsoft.com/office/drawing/2014/main" id="{8EDBB346-898E-9F77-8B07-7B61C89852AC}"/>
+              </a:ext>
+            </a:extLst>
+          </p:cNvPr>
+          <p:cNvSpPr/>
+          <p:nvPr/>
+        </p:nvSpPr>
+        <p:spPr>
+          <a:xfrm flipV="1">
+            <a:off x="2380397" y="2078164"/>
+            <a:ext cx="7316338" cy="45719"/>
+          </a:xfrm>
+          <a:prstGeom prst="rect">
+            <a:avLst/>
+          </a:prstGeom>
+          <a:solidFill>
+            <a:srgbClr val="FFCC00"/>
+          </a:solidFill>
+          <a:ln w="12700">
+            <a:solidFill>
+              <a:srgbClr val="FFCC00"/>
+            </a:solidFill>
+            <a:prstDash val="solid"/>
+          </a:ln>
+        </p:spPr>
+        <p:txBody>
+          <a:bodyPr/>
+          <a:lstStyle/>
+          <a:p>
+            <a:endParaRPr lang="fr-FR"/>
+          </a:p>
+        </p:txBody>
+      </p:sp>
+      <p:cxnSp>
+        <p:nvCxnSpPr>
+          <p:cNvPr id="10" name="Connecteur droit 9">
+            <a:extLst>
+              <a:ext uri="{FF2B5EF4-FFF2-40B4-BE49-F238E27FC236}">
+                <a16:creationId xmlns:a16="http://schemas.microsoft.com/office/drawing/2014/main" id="{FFB29081-7CB3-F9FF-DD93-4157EF443D06}"/>
+              </a:ext>
+            </a:extLst>
+          </p:cNvPr>
+          <p:cNvCxnSpPr/>
+          <p:nvPr/>
+        </p:nvCxnSpPr>
+        <p:spPr>
+          <a:xfrm>
+            <a:off x="2173405" y="3671248"/>
+            <a:ext cx="7523330" cy="0"/>
+          </a:xfrm>
+          <a:prstGeom prst="line">
+            <a:avLst/>
+          </a:prstGeom>
+        </p:spPr>
+        <p:style>
+          <a:lnRef idx="1">
+            <a:schemeClr val="accent1"/>
+          </a:lnRef>
+          <a:fillRef idx="0">
+            <a:schemeClr val="accent1"/>
+          </a:fillRef>
+          <a:effectRef idx="0">
+            <a:schemeClr val="accent1"/>
+          </a:effectRef>
+          <a:fontRef idx="minor">
+            <a:schemeClr val="tx1"/>
+          </a:fontRef>
+        </p:style>
+      </p:cxnSp>
+      <p:cxnSp>
+        <p:nvCxnSpPr>
+          <p:cNvPr id="11" name="Connecteur droit 10">
+            <a:extLst>
+              <a:ext uri="{FF2B5EF4-FFF2-40B4-BE49-F238E27FC236}">
+                <a16:creationId xmlns:a16="http://schemas.microsoft.com/office/drawing/2014/main" id="{CF0B5F5D-73BD-22B8-B56D-D0F4882E82D3}"/>
+              </a:ext>
+            </a:extLst>
+          </p:cNvPr>
+          <p:cNvCxnSpPr/>
+          <p:nvPr/>
+        </p:nvCxnSpPr>
+        <p:spPr>
+          <a:xfrm>
+            <a:off x="2173404" y="2322394"/>
+            <a:ext cx="7523330" cy="0"/>
+          </a:xfrm>
+          <a:prstGeom prst="line">
+            <a:avLst/>
+          </a:prstGeom>
+        </p:spPr>
+        <p:style>
+          <a:lnRef idx="1">
+            <a:schemeClr val="accent1"/>
+          </a:lnRef>
+          <a:fillRef idx="0">
+            <a:schemeClr val="accent1"/>
+          </a:fillRef>
+          <a:effectRef idx="0">
+            <a:schemeClr val="accent1"/>
+          </a:effectRef>
+          <a:fontRef idx="minor">
+            <a:schemeClr val="tx1"/>
+          </a:fontRef>
+        </p:style>
+      </p:cxnSp>
+    </p:spTree>
+    <p:extLst>
+      <p:ext uri="{BB962C8B-B14F-4D97-AF65-F5344CB8AC3E}">
+        <p14:creationId xmlns:p14="http://schemas.microsoft.com/office/powerpoint/2010/main" val="1871874594"/>
+      </p:ext>
+    </p:extLst>
+  </p:cSld>
+  <p:clrMapOvr>
+    <a:masterClrMapping/>
+  </p:clrMapOvr>
+</p:sld>
+</file>
+
 <file path=ppt/slides/slide2.xml><?xml version="1.0" encoding="utf-8"?>
 <p:sld xmlns:a="http://schemas.openxmlformats.org/drawingml/2006/main" xmlns:r="http://schemas.openxmlformats.org/officeDocument/2006/relationships" xmlns:p="http://schemas.openxmlformats.org/presentationml/2006/main">
   <p:cSld name="Slide 2">
@@ -2252,7 +2752,8 @@
           <a:bodyPr/>
           <a:lstStyle/>
           <a:p>
-            <a:endParaRPr lang="fr-FR"/>
+            <a:pPr algn="ctr"/>
+            <a:endParaRPr lang="fr-FR" dirty="0"/>
           </a:p>
         </p:txBody>
       </p:sp>
@@ -2285,13 +2786,16 @@
                 <a:solidFill>
                   <a:srgbClr val="4F8EF7"/>
                 </a:solidFill>
-                <a:latin typeface="Trebuchet MS" pitchFamily="34" charset="0"/>
+                <a:latin typeface="Times New Roman" panose="02020603050405020304" pitchFamily="18" charset="0"/>
                 <a:ea typeface="Trebuchet MS" pitchFamily="34" charset="-122"/>
-                <a:cs typeface="Trebuchet MS" pitchFamily="34" charset="-120"/>
+                <a:cs typeface="Times New Roman" panose="02020603050405020304" pitchFamily="18" charset="0"/>
               </a:rPr>
               <a:t>Plan de la Presentation</a:t>
             </a:r>
-            <a:endParaRPr lang="en-US" sz="2200" dirty="0"/>
+            <a:endParaRPr lang="en-US" sz="2200" dirty="0">
+              <a:latin typeface="Times New Roman" panose="02020603050405020304" pitchFamily="18" charset="0"/>
+              <a:cs typeface="Times New Roman" panose="02020603050405020304" pitchFamily="18" charset="0"/>
+            </a:endParaRPr>
           </a:p>
         </p:txBody>
       </p:sp>
@@ -2435,7 +2939,7 @@
         </p:nvSpPr>
         <p:spPr>
           <a:xfrm>
-            <a:off x="1005840" y="1234440"/>
+            <a:off x="1188720" y="1286984"/>
             <a:ext cx="9601200" cy="457200"/>
           </a:xfrm>
           <a:prstGeom prst="rect">
@@ -2460,9 +2964,23 @@
                 <a:ea typeface="Calibri" pitchFamily="34" charset="-122"/>
                 <a:cs typeface="Calibri" pitchFamily="34" charset="-120"/>
               </a:rPr>
-              <a:t>  Contexte &amp; Dataset</a:t>
-            </a:r>
-            <a:endParaRPr lang="en-US" sz="1600" dirty="0"/>
+              <a:t>  </a:t>
+            </a:r>
+            <a:r>
+              <a:rPr lang="en-US" sz="1600" b="1" dirty="0">
+                <a:solidFill>
+                  <a:srgbClr val="F1F5F9"/>
+                </a:solidFill>
+                <a:latin typeface="Times New Roman" panose="02020603050405020304" pitchFamily="18" charset="0"/>
+                <a:ea typeface="Calibri" pitchFamily="34" charset="-122"/>
+                <a:cs typeface="Times New Roman" panose="02020603050405020304" pitchFamily="18" charset="0"/>
+              </a:rPr>
+              <a:t>Contexte &amp; Dataset</a:t>
+            </a:r>
+            <a:endParaRPr lang="en-US" sz="1600" dirty="0">
+              <a:latin typeface="Times New Roman" panose="02020603050405020304" pitchFamily="18" charset="0"/>
+              <a:cs typeface="Times New Roman" panose="02020603050405020304" pitchFamily="18" charset="0"/>
+            </a:endParaRPr>
           </a:p>
         </p:txBody>
       </p:sp>
@@ -2576,7 +3094,7 @@
         </p:nvSpPr>
         <p:spPr>
           <a:xfrm>
-            <a:off x="1005840" y="2286000"/>
+            <a:off x="1143000" y="2391088"/>
             <a:ext cx="9601200" cy="457200"/>
           </a:xfrm>
           <a:prstGeom prst="rect">
@@ -2601,9 +3119,23 @@
                 <a:ea typeface="Calibri" pitchFamily="34" charset="-122"/>
                 <a:cs typeface="Calibri" pitchFamily="34" charset="-120"/>
               </a:rPr>
-              <a:t>  Pipeline &amp; Preprocessing</a:t>
-            </a:r>
-            <a:endParaRPr lang="en-US" sz="1600" dirty="0"/>
+              <a:t>  </a:t>
+            </a:r>
+            <a:r>
+              <a:rPr lang="en-US" sz="1600" b="1" dirty="0">
+                <a:solidFill>
+                  <a:srgbClr val="F1F5F9"/>
+                </a:solidFill>
+                <a:latin typeface="Times New Roman" panose="02020603050405020304" pitchFamily="18" charset="0"/>
+                <a:ea typeface="Calibri" pitchFamily="34" charset="-122"/>
+                <a:cs typeface="Times New Roman" panose="02020603050405020304" pitchFamily="18" charset="0"/>
+              </a:rPr>
+              <a:t>Pipeline &amp; Preprocessing</a:t>
+            </a:r>
+            <a:endParaRPr lang="en-US" sz="1600" dirty="0">
+              <a:latin typeface="Times New Roman" panose="02020603050405020304" pitchFamily="18" charset="0"/>
+              <a:cs typeface="Times New Roman" panose="02020603050405020304" pitchFamily="18" charset="0"/>
+            </a:endParaRPr>
           </a:p>
         </p:txBody>
       </p:sp>
@@ -2717,7 +3249,7 @@
         </p:nvSpPr>
         <p:spPr>
           <a:xfrm>
-            <a:off x="1005840" y="3337560"/>
+            <a:off x="1188720" y="3277168"/>
             <a:ext cx="9601200" cy="457200"/>
           </a:xfrm>
           <a:prstGeom prst="rect">
@@ -2742,9 +3274,23 @@
                 <a:ea typeface="Calibri" pitchFamily="34" charset="-122"/>
                 <a:cs typeface="Calibri" pitchFamily="34" charset="-120"/>
               </a:rPr>
-              <a:t>  Algorithmes testes</a:t>
-            </a:r>
-            <a:endParaRPr lang="en-US" sz="1600" dirty="0"/>
+              <a:t>  </a:t>
+            </a:r>
+            <a:r>
+              <a:rPr lang="en-US" sz="1600" b="1" dirty="0">
+                <a:solidFill>
+                  <a:srgbClr val="F1F5F9"/>
+                </a:solidFill>
+                <a:latin typeface="Times New Roman" panose="02020603050405020304" pitchFamily="18" charset="0"/>
+                <a:ea typeface="Calibri" pitchFamily="34" charset="-122"/>
+                <a:cs typeface="Times New Roman" panose="02020603050405020304" pitchFamily="18" charset="0"/>
+              </a:rPr>
+              <a:t>Algorithmes testes</a:t>
+            </a:r>
+            <a:endParaRPr lang="en-US" sz="1600" dirty="0">
+              <a:latin typeface="Times New Roman" panose="02020603050405020304" pitchFamily="18" charset="0"/>
+              <a:cs typeface="Times New Roman" panose="02020603050405020304" pitchFamily="18" charset="0"/>
+            </a:endParaRPr>
           </a:p>
         </p:txBody>
       </p:sp>
@@ -2871,9 +3417,6 @@
           <a:bodyPr wrap="square" rtlCol="0" anchor="ctr"/>
           <a:lstStyle/>
           <a:p>
-            <a:pPr marL="0" indent="0">
-              <a:buNone/>
-            </a:pPr>
             <a:r>
               <a:rPr lang="en-US" sz="1600" b="1" dirty="0">
                 <a:solidFill>
@@ -2883,22 +3426,64 @@
                 <a:ea typeface="Calibri" pitchFamily="34" charset="-122"/>
                 <a:cs typeface="Calibri" pitchFamily="34" charset="-120"/>
               </a:rPr>
-              <a:t>  Resultats &amp; Metriques</a:t>
-            </a:r>
-            <a:endParaRPr lang="en-US" sz="1600" dirty="0"/>
-          </a:p>
-        </p:txBody>
-      </p:sp>
-      <p:sp>
-        <p:nvSpPr>
-          <p:cNvPr id="21" name="Shape 19"/>
-          <p:cNvSpPr/>
-          <p:nvPr/>
-        </p:nvSpPr>
-        <p:spPr>
-          <a:xfrm>
-            <a:off x="457200" y="5120640"/>
-            <a:ext cx="3566160" cy="777240"/>
+              <a:t>  </a:t>
+            </a:r>
+            <a:r>
+              <a:rPr lang="en-US" sz="1600" b="1" dirty="0">
+                <a:solidFill>
+                  <a:srgbClr val="F1F5F9"/>
+                </a:solidFill>
+                <a:latin typeface="Times New Roman" panose="02020603050405020304" pitchFamily="18" charset="0"/>
+                <a:ea typeface="Calibri" pitchFamily="34" charset="-122"/>
+                <a:cs typeface="Times New Roman" panose="02020603050405020304" pitchFamily="18" charset="0"/>
+              </a:rPr>
+              <a:t>Resultats &amp;  Analyses des variables</a:t>
+            </a:r>
+            <a:endParaRPr lang="en-US" sz="1600" dirty="0">
+              <a:latin typeface="Times New Roman" panose="02020603050405020304" pitchFamily="18" charset="0"/>
+              <a:cs typeface="Times New Roman" panose="02020603050405020304" pitchFamily="18" charset="0"/>
+            </a:endParaRPr>
+          </a:p>
+        </p:txBody>
+      </p:sp>
+      <p:sp>
+        <p:nvSpPr>
+          <p:cNvPr id="23" name="Text 21"/>
+          <p:cNvSpPr/>
+          <p:nvPr/>
+        </p:nvSpPr>
+        <p:spPr>
+          <a:xfrm>
+            <a:off x="1188720" y="5212080"/>
+            <a:ext cx="2743200" cy="594360"/>
+          </a:xfrm>
+          <a:prstGeom prst="rect">
+            <a:avLst/>
+          </a:prstGeom>
+          <a:noFill/>
+          <a:ln/>
+        </p:spPr>
+        <p:txBody>
+          <a:bodyPr wrap="square" rtlCol="0" anchor="ctr"/>
+          <a:lstStyle/>
+          <a:p>
+            <a:pPr marL="0" indent="0">
+              <a:buNone/>
+            </a:pPr>
+            <a:endParaRPr lang="en-US" sz="1200" dirty="0"/>
+          </a:p>
+        </p:txBody>
+      </p:sp>
+      <p:sp>
+        <p:nvSpPr>
+          <p:cNvPr id="24" name="Shape 22"/>
+          <p:cNvSpPr/>
+          <p:nvPr/>
+        </p:nvSpPr>
+        <p:spPr>
+          <a:xfrm>
+            <a:off x="502920" y="5166360"/>
+            <a:ext cx="10927080" cy="777240"/>
           </a:xfrm>
           <a:prstGeom prst="roundRect">
             <a:avLst>
@@ -2925,53 +3510,14 @@
       </p:sp>
       <p:sp>
         <p:nvSpPr>
-          <p:cNvPr id="22" name="Text 20"/>
-          <p:cNvSpPr/>
-          <p:nvPr/>
-        </p:nvSpPr>
-        <p:spPr>
-          <a:xfrm>
-            <a:off x="594360" y="5166360"/>
-            <a:ext cx="548640" cy="640080"/>
-          </a:xfrm>
-          <a:prstGeom prst="rect">
-            <a:avLst/>
-          </a:prstGeom>
-          <a:noFill/>
-          <a:ln/>
-        </p:spPr>
-        <p:txBody>
-          <a:bodyPr wrap="square" rtlCol="0" anchor="ctr"/>
-          <a:lstStyle/>
-          <a:p>
-            <a:pPr marL="0" indent="0" algn="ctr">
-              <a:buNone/>
-            </a:pPr>
-            <a:r>
-              <a:rPr lang="en-US" sz="1800" b="1" dirty="0">
-                <a:solidFill>
-                  <a:srgbClr val="4F8EF7"/>
-                </a:solidFill>
-                <a:latin typeface="Trebuchet MS" pitchFamily="34" charset="0"/>
-                <a:ea typeface="Trebuchet MS" pitchFamily="34" charset="-122"/>
-                <a:cs typeface="Trebuchet MS" pitchFamily="34" charset="-120"/>
-              </a:rPr>
-              <a:t>05</a:t>
-            </a:r>
-            <a:endParaRPr lang="en-US" sz="1800" dirty="0"/>
-          </a:p>
-        </p:txBody>
-      </p:sp>
-      <p:sp>
-        <p:nvSpPr>
-          <p:cNvPr id="23" name="Text 21"/>
-          <p:cNvSpPr/>
-          <p:nvPr/>
-        </p:nvSpPr>
-        <p:spPr>
-          <a:xfrm>
-            <a:off x="1188720" y="5212080"/>
-            <a:ext cx="2743200" cy="594360"/>
+          <p:cNvPr id="26" name="Text 24"/>
+          <p:cNvSpPr/>
+          <p:nvPr/>
+        </p:nvSpPr>
+        <p:spPr>
+          <a:xfrm>
+            <a:off x="1347034" y="5234939"/>
+            <a:ext cx="3087806" cy="602549"/>
           </a:xfrm>
           <a:prstGeom prst="rect">
             <a:avLst/>
@@ -2987,30 +3533,33 @@
               <a:buNone/>
             </a:pPr>
             <a:r>
-              <a:rPr lang="en-US" sz="1200" b="1" dirty="0">
+              <a:rPr lang="en-US" sz="1600" b="1" dirty="0">
                 <a:solidFill>
                   <a:srgbClr val="F1F5F9"/>
                 </a:solidFill>
-                <a:latin typeface="Calibri" pitchFamily="34" charset="0"/>
+                <a:latin typeface="Times New Roman" panose="02020603050405020304" pitchFamily="18" charset="0"/>
                 <a:ea typeface="Calibri" pitchFamily="34" charset="-122"/>
-                <a:cs typeface="Calibri" pitchFamily="34" charset="-120"/>
-              </a:rPr>
-              <a:t>  Analyse des variables</a:t>
-            </a:r>
-            <a:endParaRPr lang="en-US" sz="1200" dirty="0"/>
-          </a:p>
-        </p:txBody>
-      </p:sp>
-      <p:sp>
-        <p:nvSpPr>
-          <p:cNvPr id="24" name="Shape 22"/>
-          <p:cNvSpPr/>
-          <p:nvPr/>
-        </p:nvSpPr>
-        <p:spPr>
-          <a:xfrm>
-            <a:off x="4297680" y="5120640"/>
-            <a:ext cx="3566160" cy="777240"/>
+                <a:cs typeface="Times New Roman" panose="02020603050405020304" pitchFamily="18" charset="0"/>
+              </a:rPr>
+              <a:t>🌐  Dashboard &amp; Deploiement</a:t>
+            </a:r>
+            <a:endParaRPr lang="en-US" sz="1600" dirty="0">
+              <a:latin typeface="Times New Roman" panose="02020603050405020304" pitchFamily="18" charset="0"/>
+              <a:cs typeface="Times New Roman" panose="02020603050405020304" pitchFamily="18" charset="0"/>
+            </a:endParaRPr>
+          </a:p>
+        </p:txBody>
+      </p:sp>
+      <p:sp>
+        <p:nvSpPr>
+          <p:cNvPr id="27" name="Shape 25"/>
+          <p:cNvSpPr/>
+          <p:nvPr/>
+        </p:nvSpPr>
+        <p:spPr>
+          <a:xfrm>
+            <a:off x="524074" y="6111808"/>
+            <a:ext cx="10905926" cy="654752"/>
           </a:xfrm>
           <a:prstGeom prst="roundRect">
             <a:avLst>
@@ -3037,14 +3586,108 @@
       </p:sp>
       <p:sp>
         <p:nvSpPr>
-          <p:cNvPr id="25" name="Text 23"/>
-          <p:cNvSpPr/>
-          <p:nvPr/>
-        </p:nvSpPr>
-        <p:spPr>
-          <a:xfrm>
-            <a:off x="4434840" y="5166360"/>
-            <a:ext cx="548640" cy="640080"/>
+          <p:cNvPr id="29" name="Text 27"/>
+          <p:cNvSpPr/>
+          <p:nvPr/>
+        </p:nvSpPr>
+        <p:spPr>
+          <a:xfrm>
+            <a:off x="1347034" y="6142857"/>
+            <a:ext cx="2743200" cy="594360"/>
+          </a:xfrm>
+          <a:prstGeom prst="rect">
+            <a:avLst/>
+          </a:prstGeom>
+          <a:noFill/>
+          <a:ln/>
+        </p:spPr>
+        <p:txBody>
+          <a:bodyPr wrap="square" rtlCol="0" anchor="ctr"/>
+          <a:lstStyle/>
+          <a:p>
+            <a:pPr marL="0" indent="0">
+              <a:buNone/>
+            </a:pPr>
+            <a:r>
+              <a:rPr lang="en-US" sz="1200" b="1" dirty="0">
+                <a:solidFill>
+                  <a:srgbClr val="F1F5F9"/>
+                </a:solidFill>
+                <a:latin typeface="Calibri" pitchFamily="34" charset="0"/>
+                <a:ea typeface="Calibri" pitchFamily="34" charset="-122"/>
+                <a:cs typeface="Calibri" pitchFamily="34" charset="-120"/>
+              </a:rPr>
+              <a:t>  </a:t>
+            </a:r>
+            <a:r>
+              <a:rPr lang="en-US" b="1" dirty="0">
+                <a:solidFill>
+                  <a:srgbClr val="F1F5F9"/>
+                </a:solidFill>
+                <a:latin typeface="Times New Roman" panose="02020603050405020304" pitchFamily="18" charset="0"/>
+                <a:ea typeface="Calibri" pitchFamily="34" charset="-122"/>
+                <a:cs typeface="Times New Roman" panose="02020603050405020304" pitchFamily="18" charset="0"/>
+              </a:rPr>
+              <a:t>Discussion &amp; Conclusion</a:t>
+            </a:r>
+            <a:endParaRPr lang="en-US" sz="1200" dirty="0">
+              <a:latin typeface="Times New Roman" panose="02020603050405020304" pitchFamily="18" charset="0"/>
+              <a:cs typeface="Times New Roman" panose="02020603050405020304" pitchFamily="18" charset="0"/>
+            </a:endParaRPr>
+          </a:p>
+        </p:txBody>
+      </p:sp>
+      <p:sp>
+        <p:nvSpPr>
+          <p:cNvPr id="30" name="Shape 16">
+            <a:extLst>
+              <a:ext uri="{FF2B5EF4-FFF2-40B4-BE49-F238E27FC236}">
+                <a16:creationId xmlns:a16="http://schemas.microsoft.com/office/drawing/2014/main" id="{E83206E1-06CB-2BBB-6272-0596C72E1F23}"/>
+              </a:ext>
+            </a:extLst>
+          </p:cNvPr>
+          <p:cNvSpPr/>
+          <p:nvPr/>
+        </p:nvSpPr>
+        <p:spPr>
+          <a:xfrm>
+            <a:off x="524074" y="5151688"/>
+            <a:ext cx="731520" cy="914400"/>
+          </a:xfrm>
+          <a:prstGeom prst="roundRect">
+            <a:avLst>
+              <a:gd name="adj" fmla="val 15000"/>
+            </a:avLst>
+          </a:prstGeom>
+          <a:solidFill>
+            <a:srgbClr val="4F8EF7"/>
+          </a:solidFill>
+          <a:ln/>
+        </p:spPr>
+        <p:txBody>
+          <a:bodyPr/>
+          <a:lstStyle/>
+          <a:p>
+            <a:endParaRPr lang="fr-FR"/>
+          </a:p>
+        </p:txBody>
+      </p:sp>
+      <p:sp>
+        <p:nvSpPr>
+          <p:cNvPr id="31" name="Text 17">
+            <a:extLst>
+              <a:ext uri="{FF2B5EF4-FFF2-40B4-BE49-F238E27FC236}">
+                <a16:creationId xmlns:a16="http://schemas.microsoft.com/office/drawing/2014/main" id="{CC798741-FE57-1A7B-E4E0-4B11CF8A8A63}"/>
+              </a:ext>
+            </a:extLst>
+          </p:cNvPr>
+          <p:cNvSpPr/>
+          <p:nvPr/>
+        </p:nvSpPr>
+        <p:spPr>
+          <a:xfrm>
+            <a:off x="524074" y="5372100"/>
+            <a:ext cx="731520" cy="457200"/>
           </a:xfrm>
           <a:prstGeom prst="rect">
             <a:avLst/>
@@ -3060,168 +3703,17 @@
               <a:buNone/>
             </a:pPr>
             <a:r>
-              <a:rPr lang="en-US" sz="1800" b="1" dirty="0">
-                <a:solidFill>
-                  <a:srgbClr val="4F8EF7"/>
+              <a:rPr lang="en-US" sz="1600" b="1" dirty="0">
+                <a:solidFill>
+                  <a:srgbClr val="FFFFFF"/>
                 </a:solidFill>
                 <a:latin typeface="Trebuchet MS" pitchFamily="34" charset="0"/>
                 <a:ea typeface="Trebuchet MS" pitchFamily="34" charset="-122"/>
                 <a:cs typeface="Trebuchet MS" pitchFamily="34" charset="-120"/>
               </a:rPr>
-              <a:t>06</a:t>
-            </a:r>
-            <a:endParaRPr lang="en-US" sz="1800" dirty="0"/>
-          </a:p>
-        </p:txBody>
-      </p:sp>
-      <p:sp>
-        <p:nvSpPr>
-          <p:cNvPr id="26" name="Text 24"/>
-          <p:cNvSpPr/>
-          <p:nvPr/>
-        </p:nvSpPr>
-        <p:spPr>
-          <a:xfrm>
-            <a:off x="5029200" y="5212080"/>
-            <a:ext cx="2743200" cy="594360"/>
-          </a:xfrm>
-          <a:prstGeom prst="rect">
-            <a:avLst/>
-          </a:prstGeom>
-          <a:noFill/>
-          <a:ln/>
-        </p:spPr>
-        <p:txBody>
-          <a:bodyPr wrap="square" rtlCol="0" anchor="ctr"/>
-          <a:lstStyle/>
-          <a:p>
-            <a:pPr marL="0" indent="0">
-              <a:buNone/>
-            </a:pPr>
-            <a:r>
-              <a:rPr lang="en-US" sz="1200" b="1" dirty="0">
-                <a:solidFill>
-                  <a:srgbClr val="F1F5F9"/>
-                </a:solidFill>
-                <a:latin typeface="Calibri" pitchFamily="34" charset="0"/>
-                <a:ea typeface="Calibri" pitchFamily="34" charset="-122"/>
-                <a:cs typeface="Calibri" pitchFamily="34" charset="-120"/>
-              </a:rPr>
-              <a:t>🌐  Dashboard &amp; Deploiement</a:t>
-            </a:r>
-            <a:endParaRPr lang="en-US" sz="1200" dirty="0"/>
-          </a:p>
-        </p:txBody>
-      </p:sp>
-      <p:sp>
-        <p:nvSpPr>
-          <p:cNvPr id="27" name="Shape 25"/>
-          <p:cNvSpPr/>
-          <p:nvPr/>
-        </p:nvSpPr>
-        <p:spPr>
-          <a:xfrm>
-            <a:off x="8138160" y="5120640"/>
-            <a:ext cx="3566160" cy="777240"/>
-          </a:xfrm>
-          <a:prstGeom prst="roundRect">
-            <a:avLst>
-              <a:gd name="adj" fmla="val 14118"/>
-            </a:avLst>
-          </a:prstGeom>
-          <a:solidFill>
-            <a:srgbClr val="111827"/>
-          </a:solidFill>
-          <a:ln w="6350">
-            <a:solidFill>
-              <a:srgbClr val="1E2D47"/>
-            </a:solidFill>
-            <a:prstDash val="solid"/>
-          </a:ln>
-        </p:spPr>
-        <p:txBody>
-          <a:bodyPr/>
-          <a:lstStyle/>
-          <a:p>
-            <a:endParaRPr lang="fr-FR"/>
-          </a:p>
-        </p:txBody>
-      </p:sp>
-      <p:sp>
-        <p:nvSpPr>
-          <p:cNvPr id="28" name="Text 26"/>
-          <p:cNvSpPr/>
-          <p:nvPr/>
-        </p:nvSpPr>
-        <p:spPr>
-          <a:xfrm>
-            <a:off x="8275320" y="5166360"/>
-            <a:ext cx="548640" cy="640080"/>
-          </a:xfrm>
-          <a:prstGeom prst="rect">
-            <a:avLst/>
-          </a:prstGeom>
-          <a:noFill/>
-          <a:ln/>
-        </p:spPr>
-        <p:txBody>
-          <a:bodyPr wrap="square" rtlCol="0" anchor="ctr"/>
-          <a:lstStyle/>
-          <a:p>
-            <a:pPr marL="0" indent="0" algn="ctr">
-              <a:buNone/>
-            </a:pPr>
-            <a:r>
-              <a:rPr lang="en-US" sz="1800" b="1" dirty="0">
-                <a:solidFill>
-                  <a:srgbClr val="4F8EF7"/>
-                </a:solidFill>
-                <a:latin typeface="Trebuchet MS" pitchFamily="34" charset="0"/>
-                <a:ea typeface="Trebuchet MS" pitchFamily="34" charset="-122"/>
-                <a:cs typeface="Trebuchet MS" pitchFamily="34" charset="-120"/>
-              </a:rPr>
-              <a:t>07</a:t>
-            </a:r>
-            <a:endParaRPr lang="en-US" sz="1800" dirty="0"/>
-          </a:p>
-        </p:txBody>
-      </p:sp>
-      <p:sp>
-        <p:nvSpPr>
-          <p:cNvPr id="29" name="Text 27"/>
-          <p:cNvSpPr/>
-          <p:nvPr/>
-        </p:nvSpPr>
-        <p:spPr>
-          <a:xfrm>
-            <a:off x="8869680" y="5212080"/>
-            <a:ext cx="2743200" cy="594360"/>
-          </a:xfrm>
-          <a:prstGeom prst="rect">
-            <a:avLst/>
-          </a:prstGeom>
-          <a:noFill/>
-          <a:ln/>
-        </p:spPr>
-        <p:txBody>
-          <a:bodyPr wrap="square" rtlCol="0" anchor="ctr"/>
-          <a:lstStyle/>
-          <a:p>
-            <a:pPr marL="0" indent="0">
-              <a:buNone/>
-            </a:pPr>
-            <a:r>
-              <a:rPr lang="en-US" sz="1200" b="1" dirty="0">
-                <a:solidFill>
-                  <a:srgbClr val="F1F5F9"/>
-                </a:solidFill>
-                <a:latin typeface="Calibri" pitchFamily="34" charset="0"/>
-                <a:ea typeface="Calibri" pitchFamily="34" charset="-122"/>
-                <a:cs typeface="Calibri" pitchFamily="34" charset="-120"/>
-              </a:rPr>
-              <a:t>  Discussion &amp; Conclusion</a:t>
-            </a:r>
-            <a:endParaRPr lang="en-US" sz="1200" dirty="0"/>
+              <a:t>05</a:t>
+            </a:r>
+            <a:endParaRPr lang="en-US" sz="1600" dirty="0"/>
           </a:p>
         </p:txBody>
       </p:sp>
@@ -3306,13 +3798,16 @@
                 <a:solidFill>
                   <a:srgbClr val="4F8EF7"/>
                 </a:solidFill>
-                <a:latin typeface="Trebuchet MS" pitchFamily="34" charset="0"/>
+                <a:latin typeface="Times New Roman" panose="02020603050405020304" pitchFamily="18" charset="0"/>
                 <a:ea typeface="Trebuchet MS" pitchFamily="34" charset="-122"/>
-                <a:cs typeface="Trebuchet MS" pitchFamily="34" charset="-120"/>
+                <a:cs typeface="Times New Roman" panose="02020603050405020304" pitchFamily="18" charset="0"/>
               </a:rPr>
               <a:t>01 — Contexte &amp; Dataset</a:t>
             </a:r>
-            <a:endParaRPr lang="en-US" sz="2200" dirty="0"/>
+            <a:endParaRPr lang="en-US" sz="2200" dirty="0">
+              <a:latin typeface="Times New Roman" panose="02020603050405020304" pitchFamily="18" charset="0"/>
+              <a:cs typeface="Times New Roman" panose="02020603050405020304" pitchFamily="18" charset="0"/>
+            </a:endParaRPr>
           </a:p>
         </p:txBody>
       </p:sp>
@@ -3432,17 +3927,23 @@
               <a:buNone/>
             </a:pPr>
             <a:r>
-              <a:rPr lang="en-US" sz="800" b="1" dirty="0">
-                <a:solidFill>
-                  <a:srgbClr val="94A3B8"/>
-                </a:solidFill>
-                <a:latin typeface="Calibri" pitchFamily="34" charset="0"/>
+              <a:rPr lang="en-US" sz="1200" b="1" dirty="0">
+                <a:solidFill>
+                  <a:schemeClr val="bg1"/>
+                </a:solidFill>
+                <a:latin typeface="Times New Roman" panose="02020603050405020304" pitchFamily="18" charset="0"/>
                 <a:ea typeface="Calibri" pitchFamily="34" charset="-122"/>
-                <a:cs typeface="Calibri" pitchFamily="34" charset="-120"/>
+                <a:cs typeface="Times New Roman" panose="02020603050405020304" pitchFamily="18" charset="0"/>
               </a:rPr>
               <a:t>PROPRIETES</a:t>
             </a:r>
-            <a:endParaRPr lang="en-US" sz="800" dirty="0"/>
+            <a:endParaRPr lang="en-US" sz="800" dirty="0">
+              <a:solidFill>
+                <a:schemeClr val="bg1"/>
+              </a:solidFill>
+              <a:latin typeface="Times New Roman" panose="02020603050405020304" pitchFamily="18" charset="0"/>
+              <a:cs typeface="Times New Roman" panose="02020603050405020304" pitchFamily="18" charset="0"/>
+            </a:endParaRPr>
           </a:p>
         </p:txBody>
       </p:sp>
@@ -3510,17 +4011,23 @@
               <a:buNone/>
             </a:pPr>
             <a:r>
-              <a:rPr lang="en-US" sz="900" dirty="0">
-                <a:solidFill>
-                  <a:srgbClr val="94A3B8"/>
-                </a:solidFill>
-                <a:latin typeface="Calibri" pitchFamily="34" charset="0"/>
+              <a:rPr lang="en-US" sz="1200" dirty="0">
+                <a:solidFill>
+                  <a:schemeClr val="bg1"/>
+                </a:solidFill>
+                <a:latin typeface="Times New Roman" panose="02020603050405020304" pitchFamily="18" charset="0"/>
                 <a:ea typeface="Calibri" pitchFamily="34" charset="-122"/>
-                <a:cs typeface="Calibri" pitchFamily="34" charset="-120"/>
+                <a:cs typeface="Times New Roman" panose="02020603050405020304" pitchFamily="18" charset="0"/>
               </a:rPr>
               <a:t>apres nettoyage</a:t>
             </a:r>
-            <a:endParaRPr lang="en-US" sz="900" dirty="0"/>
+            <a:endParaRPr lang="en-US" sz="1200" dirty="0">
+              <a:solidFill>
+                <a:schemeClr val="bg1"/>
+              </a:solidFill>
+              <a:latin typeface="Times New Roman" panose="02020603050405020304" pitchFamily="18" charset="0"/>
+              <a:cs typeface="Times New Roman" panose="02020603050405020304" pitchFamily="18" charset="0"/>
+            </a:endParaRPr>
           </a:p>
         </p:txBody>
       </p:sp>
@@ -3610,17 +4117,23 @@
               <a:buNone/>
             </a:pPr>
             <a:r>
-              <a:rPr lang="en-US" sz="800" b="1" dirty="0">
-                <a:solidFill>
-                  <a:srgbClr val="94A3B8"/>
-                </a:solidFill>
-                <a:latin typeface="Calibri" pitchFamily="34" charset="0"/>
+              <a:rPr lang="en-US" sz="1400" b="1" dirty="0">
+                <a:solidFill>
+                  <a:schemeClr val="bg1"/>
+                </a:solidFill>
+                <a:latin typeface="Times New Roman" panose="02020603050405020304" pitchFamily="18" charset="0"/>
                 <a:ea typeface="Calibri" pitchFamily="34" charset="-122"/>
-                <a:cs typeface="Calibri" pitchFamily="34" charset="-120"/>
+                <a:cs typeface="Times New Roman" panose="02020603050405020304" pitchFamily="18" charset="0"/>
               </a:rPr>
               <a:t>VILLES</a:t>
             </a:r>
-            <a:endParaRPr lang="en-US" sz="800" dirty="0"/>
+            <a:endParaRPr lang="en-US" sz="1400" dirty="0">
+              <a:solidFill>
+                <a:schemeClr val="bg1"/>
+              </a:solidFill>
+              <a:latin typeface="Times New Roman" panose="02020603050405020304" pitchFamily="18" charset="0"/>
+              <a:cs typeface="Times New Roman" panose="02020603050405020304" pitchFamily="18" charset="0"/>
+            </a:endParaRPr>
           </a:p>
         </p:txBody>
       </p:sp>
@@ -3688,17 +4201,23 @@
               <a:buNone/>
             </a:pPr>
             <a:r>
-              <a:rPr lang="en-US" sz="900" dirty="0">
-                <a:solidFill>
-                  <a:srgbClr val="94A3B8"/>
-                </a:solidFill>
-                <a:latin typeface="Calibri" pitchFamily="34" charset="0"/>
+              <a:rPr lang="en-US" sz="1200" dirty="0">
+                <a:solidFill>
+                  <a:schemeClr val="bg1"/>
+                </a:solidFill>
+                <a:latin typeface="Times New Roman" panose="02020603050405020304" pitchFamily="18" charset="0"/>
                 <a:ea typeface="Calibri" pitchFamily="34" charset="-122"/>
-                <a:cs typeface="Calibri" pitchFamily="34" charset="-120"/>
+                <a:cs typeface="Times New Roman" panose="02020603050405020304" pitchFamily="18" charset="0"/>
               </a:rPr>
               <a:t>dans toute l'Inde</a:t>
             </a:r>
-            <a:endParaRPr lang="en-US" sz="900" dirty="0"/>
+            <a:endParaRPr lang="en-US" sz="1200" dirty="0">
+              <a:solidFill>
+                <a:schemeClr val="bg1"/>
+              </a:solidFill>
+              <a:latin typeface="Times New Roman" panose="02020603050405020304" pitchFamily="18" charset="0"/>
+              <a:cs typeface="Times New Roman" panose="02020603050405020304" pitchFamily="18" charset="0"/>
+            </a:endParaRPr>
           </a:p>
         </p:txBody>
       </p:sp>
@@ -3788,17 +4307,23 @@
               <a:buNone/>
             </a:pPr>
             <a:r>
-              <a:rPr lang="en-US" sz="800" b="1" dirty="0">
-                <a:solidFill>
-                  <a:srgbClr val="94A3B8"/>
-                </a:solidFill>
-                <a:latin typeface="Calibri" pitchFamily="34" charset="0"/>
+              <a:rPr lang="en-US" sz="1200" b="1" dirty="0">
+                <a:solidFill>
+                  <a:schemeClr val="bg1"/>
+                </a:solidFill>
+                <a:latin typeface="Times New Roman" panose="02020603050405020304" pitchFamily="18" charset="0"/>
                 <a:ea typeface="Calibri" pitchFamily="34" charset="-122"/>
-                <a:cs typeface="Calibri" pitchFamily="34" charset="-120"/>
+                <a:cs typeface="Times New Roman" panose="02020603050405020304" pitchFamily="18" charset="0"/>
               </a:rPr>
               <a:t>LOYER MEDIAN</a:t>
             </a:r>
-            <a:endParaRPr lang="en-US" sz="800" dirty="0"/>
+            <a:endParaRPr lang="en-US" sz="1200" dirty="0">
+              <a:solidFill>
+                <a:schemeClr val="bg1"/>
+              </a:solidFill>
+              <a:latin typeface="Times New Roman" panose="02020603050405020304" pitchFamily="18" charset="0"/>
+              <a:cs typeface="Times New Roman" panose="02020603050405020304" pitchFamily="18" charset="0"/>
+            </a:endParaRPr>
           </a:p>
         </p:txBody>
       </p:sp>
@@ -3866,17 +4391,23 @@
               <a:buNone/>
             </a:pPr>
             <a:r>
-              <a:rPr lang="en-US" sz="900" dirty="0">
-                <a:solidFill>
-                  <a:srgbClr val="94A3B8"/>
-                </a:solidFill>
-                <a:latin typeface="Calibri" pitchFamily="34" charset="0"/>
+              <a:rPr lang="en-US" sz="1200" dirty="0">
+                <a:solidFill>
+                  <a:schemeClr val="bg1"/>
+                </a:solidFill>
+                <a:latin typeface="Times New Roman" panose="02020603050405020304" pitchFamily="18" charset="0"/>
                 <a:ea typeface="Calibri" pitchFamily="34" charset="-122"/>
-                <a:cs typeface="Calibri" pitchFamily="34" charset="-120"/>
+                <a:cs typeface="Times New Roman" panose="02020603050405020304" pitchFamily="18" charset="0"/>
               </a:rPr>
               <a:t>Rs / mois</a:t>
             </a:r>
-            <a:endParaRPr lang="en-US" sz="900" dirty="0"/>
+            <a:endParaRPr lang="en-US" sz="1200" dirty="0">
+              <a:solidFill>
+                <a:schemeClr val="bg1"/>
+              </a:solidFill>
+              <a:latin typeface="Times New Roman" panose="02020603050405020304" pitchFamily="18" charset="0"/>
+              <a:cs typeface="Times New Roman" panose="02020603050405020304" pitchFamily="18" charset="0"/>
+            </a:endParaRPr>
           </a:p>
         </p:txBody>
       </p:sp>
@@ -3966,17 +4497,23 @@
               <a:buNone/>
             </a:pPr>
             <a:r>
-              <a:rPr lang="en-US" sz="800" b="1" dirty="0">
-                <a:solidFill>
-                  <a:srgbClr val="94A3B8"/>
-                </a:solidFill>
-                <a:latin typeface="Calibri" pitchFamily="34" charset="0"/>
+              <a:rPr lang="en-US" sz="1200" b="1" dirty="0">
+                <a:solidFill>
+                  <a:schemeClr val="bg1"/>
+                </a:solidFill>
+                <a:latin typeface="Times New Roman" panose="02020603050405020304" pitchFamily="18" charset="0"/>
                 <a:ea typeface="Calibri" pitchFamily="34" charset="-122"/>
-                <a:cs typeface="Calibri" pitchFamily="34" charset="-120"/>
+                <a:cs typeface="Times New Roman" panose="02020603050405020304" pitchFamily="18" charset="0"/>
               </a:rPr>
               <a:t>MEILLEUR R²</a:t>
             </a:r>
-            <a:endParaRPr lang="en-US" sz="800" dirty="0"/>
+            <a:endParaRPr lang="en-US" sz="1200" dirty="0">
+              <a:solidFill>
+                <a:schemeClr val="bg1"/>
+              </a:solidFill>
+              <a:latin typeface="Times New Roman" panose="02020603050405020304" pitchFamily="18" charset="0"/>
+              <a:cs typeface="Times New Roman" panose="02020603050405020304" pitchFamily="18" charset="0"/>
+            </a:endParaRPr>
           </a:p>
         </p:txBody>
       </p:sp>
@@ -4044,17 +4581,23 @@
               <a:buNone/>
             </a:pPr>
             <a:r>
-              <a:rPr lang="en-US" sz="900" dirty="0">
-                <a:solidFill>
-                  <a:srgbClr val="94A3B8"/>
-                </a:solidFill>
-                <a:latin typeface="Calibri" pitchFamily="34" charset="0"/>
+              <a:rPr lang="en-US" sz="1200" dirty="0">
+                <a:solidFill>
+                  <a:schemeClr val="bg1"/>
+                </a:solidFill>
+                <a:latin typeface="Times New Roman" panose="02020603050405020304" pitchFamily="18" charset="0"/>
                 <a:ea typeface="Calibri" pitchFamily="34" charset="-122"/>
-                <a:cs typeface="Calibri" pitchFamily="34" charset="-120"/>
+                <a:cs typeface="Times New Roman" panose="02020603050405020304" pitchFamily="18" charset="0"/>
               </a:rPr>
               <a:t>XGBoost tune</a:t>
             </a:r>
-            <a:endParaRPr lang="en-US" sz="900" dirty="0"/>
+            <a:endParaRPr lang="en-US" sz="1200" dirty="0">
+              <a:solidFill>
+                <a:schemeClr val="bg1"/>
+              </a:solidFill>
+              <a:latin typeface="Times New Roman" panose="02020603050405020304" pitchFamily="18" charset="0"/>
+              <a:cs typeface="Times New Roman" panose="02020603050405020304" pitchFamily="18" charset="0"/>
+            </a:endParaRPr>
           </a:p>
         </p:txBody>
       </p:sp>
@@ -4088,7 +4631,7 @@
           <a:bodyPr/>
           <a:lstStyle/>
           <a:p>
-            <a:endParaRPr lang="fr-FR"/>
+            <a:endParaRPr lang="fr-FR" dirty="0"/>
           </a:p>
         </p:txBody>
       </p:sp>
@@ -4117,29 +4660,246 @@
               <a:buNone/>
             </a:pPr>
             <a:r>
-              <a:rPr lang="en-US" sz="1300" b="1" dirty="0">
+              <a:rPr lang="en-US" sz="1400" b="1" dirty="0">
                 <a:solidFill>
                   <a:srgbClr val="4F8EF7"/>
+                </a:solidFill>
+                <a:latin typeface="Times New Roman" panose="02020603050405020304" pitchFamily="18" charset="0"/>
+                <a:ea typeface="Calibri" pitchFamily="34" charset="-122"/>
+                <a:cs typeface="Times New Roman" panose="02020603050405020304" pitchFamily="18" charset="0"/>
+              </a:rPr>
+              <a:t>Repartition par ville</a:t>
+            </a:r>
+            <a:endParaRPr lang="en-US" sz="1400" dirty="0">
+              <a:latin typeface="Times New Roman" panose="02020603050405020304" pitchFamily="18" charset="0"/>
+              <a:cs typeface="Times New Roman" panose="02020603050405020304" pitchFamily="18" charset="0"/>
+            </a:endParaRPr>
+          </a:p>
+        </p:txBody>
+      </p:sp>
+      <p:sp>
+        <p:nvSpPr>
+          <p:cNvPr id="27" name="Text 25"/>
+          <p:cNvSpPr/>
+          <p:nvPr/>
+        </p:nvSpPr>
+        <p:spPr>
+          <a:xfrm>
+            <a:off x="548640" y="3108960"/>
+            <a:ext cx="1554480" cy="384048"/>
+          </a:xfrm>
+          <a:prstGeom prst="rect">
+            <a:avLst/>
+          </a:prstGeom>
+          <a:noFill/>
+          <a:ln/>
+        </p:spPr>
+        <p:txBody>
+          <a:bodyPr wrap="square" rtlCol="0" anchor="ctr"/>
+          <a:lstStyle/>
+          <a:p>
+            <a:pPr marL="0" indent="0">
+              <a:buNone/>
+            </a:pPr>
+            <a:r>
+              <a:rPr lang="en-US" sz="1200" b="1" dirty="0">
+                <a:solidFill>
+                  <a:srgbClr val="4F8EF7"/>
+                </a:solidFill>
+                <a:latin typeface="Times New Roman" panose="02020603050405020304" pitchFamily="18" charset="0"/>
+                <a:ea typeface="Calibri" pitchFamily="34" charset="-122"/>
+                <a:cs typeface="Times New Roman" panose="02020603050405020304" pitchFamily="18" charset="0"/>
+              </a:rPr>
+              <a:t>Ville</a:t>
+            </a:r>
+            <a:endParaRPr lang="en-US" sz="1200" dirty="0">
+              <a:latin typeface="Times New Roman" panose="02020603050405020304" pitchFamily="18" charset="0"/>
+              <a:cs typeface="Times New Roman" panose="02020603050405020304" pitchFamily="18" charset="0"/>
+            </a:endParaRPr>
+          </a:p>
+        </p:txBody>
+      </p:sp>
+      <p:sp>
+        <p:nvSpPr>
+          <p:cNvPr id="28" name="Text 26"/>
+          <p:cNvSpPr/>
+          <p:nvPr/>
+        </p:nvSpPr>
+        <p:spPr>
+          <a:xfrm>
+            <a:off x="2194560" y="3108960"/>
+            <a:ext cx="1554480" cy="384048"/>
+          </a:xfrm>
+          <a:prstGeom prst="rect">
+            <a:avLst/>
+          </a:prstGeom>
+          <a:noFill/>
+          <a:ln/>
+        </p:spPr>
+        <p:txBody>
+          <a:bodyPr wrap="square" rtlCol="0" anchor="ctr"/>
+          <a:lstStyle/>
+          <a:p>
+            <a:pPr marL="0" indent="0">
+              <a:buNone/>
+            </a:pPr>
+            <a:r>
+              <a:rPr lang="en-US" sz="1200" b="1" dirty="0">
+                <a:solidFill>
+                  <a:srgbClr val="4F8EF7"/>
+                </a:solidFill>
+                <a:latin typeface="Times New Roman" panose="02020603050405020304" pitchFamily="18" charset="0"/>
+                <a:ea typeface="Calibri" pitchFamily="34" charset="-122"/>
+                <a:cs typeface="Times New Roman" panose="02020603050405020304" pitchFamily="18" charset="0"/>
+              </a:rPr>
+              <a:t>Nb biens</a:t>
+            </a:r>
+            <a:endParaRPr lang="en-US" sz="1200" dirty="0">
+              <a:latin typeface="Times New Roman" panose="02020603050405020304" pitchFamily="18" charset="0"/>
+              <a:cs typeface="Times New Roman" panose="02020603050405020304" pitchFamily="18" charset="0"/>
+            </a:endParaRPr>
+          </a:p>
+        </p:txBody>
+      </p:sp>
+      <p:sp>
+        <p:nvSpPr>
+          <p:cNvPr id="29" name="Text 27"/>
+          <p:cNvSpPr/>
+          <p:nvPr/>
+        </p:nvSpPr>
+        <p:spPr>
+          <a:xfrm>
+            <a:off x="3840480" y="3108960"/>
+            <a:ext cx="1554480" cy="384048"/>
+          </a:xfrm>
+          <a:prstGeom prst="rect">
+            <a:avLst/>
+          </a:prstGeom>
+          <a:noFill/>
+          <a:ln/>
+        </p:spPr>
+        <p:txBody>
+          <a:bodyPr wrap="square" rtlCol="0" anchor="ctr"/>
+          <a:lstStyle/>
+          <a:p>
+            <a:pPr marL="0" indent="0">
+              <a:buNone/>
+            </a:pPr>
+            <a:r>
+              <a:rPr lang="en-US" sz="1200" b="1" dirty="0">
+                <a:solidFill>
+                  <a:srgbClr val="4F8EF7"/>
+                </a:solidFill>
+                <a:latin typeface="Times New Roman" panose="02020603050405020304" pitchFamily="18" charset="0"/>
+                <a:ea typeface="Calibri" pitchFamily="34" charset="-122"/>
+                <a:cs typeface="Times New Roman" panose="02020603050405020304" pitchFamily="18" charset="0"/>
+              </a:rPr>
+              <a:t>Loyer moyen</a:t>
+            </a:r>
+            <a:endParaRPr lang="en-US" sz="1200" dirty="0">
+              <a:latin typeface="Times New Roman" panose="02020603050405020304" pitchFamily="18" charset="0"/>
+              <a:cs typeface="Times New Roman" panose="02020603050405020304" pitchFamily="18" charset="0"/>
+            </a:endParaRPr>
+          </a:p>
+        </p:txBody>
+      </p:sp>
+      <p:sp>
+        <p:nvSpPr>
+          <p:cNvPr id="30" name="Text 28"/>
+          <p:cNvSpPr/>
+          <p:nvPr/>
+        </p:nvSpPr>
+        <p:spPr>
+          <a:xfrm>
+            <a:off x="548640" y="3538728"/>
+            <a:ext cx="1554480" cy="384048"/>
+          </a:xfrm>
+          <a:prstGeom prst="rect">
+            <a:avLst/>
+          </a:prstGeom>
+          <a:noFill/>
+          <a:ln/>
+        </p:spPr>
+        <p:txBody>
+          <a:bodyPr wrap="square" rtlCol="0" anchor="ctr"/>
+          <a:lstStyle/>
+          <a:p>
+            <a:pPr marL="0" indent="0">
+              <a:buNone/>
+            </a:pPr>
+            <a:r>
+              <a:rPr lang="en-US" sz="1200" dirty="0">
+                <a:solidFill>
+                  <a:schemeClr val="bg1"/>
+                </a:solidFill>
+                <a:latin typeface="Times New Roman" panose="02020603050405020304" pitchFamily="18" charset="0"/>
+                <a:ea typeface="Calibri" pitchFamily="34" charset="-122"/>
+                <a:cs typeface="Times New Roman" panose="02020603050405020304" pitchFamily="18" charset="0"/>
+              </a:rPr>
+              <a:t>Mumbai</a:t>
+            </a:r>
+            <a:endParaRPr lang="en-US" sz="1200" dirty="0">
+              <a:solidFill>
+                <a:schemeClr val="bg1"/>
+              </a:solidFill>
+              <a:latin typeface="Times New Roman" panose="02020603050405020304" pitchFamily="18" charset="0"/>
+              <a:cs typeface="Times New Roman" panose="02020603050405020304" pitchFamily="18" charset="0"/>
+            </a:endParaRPr>
+          </a:p>
+        </p:txBody>
+      </p:sp>
+      <p:sp>
+        <p:nvSpPr>
+          <p:cNvPr id="31" name="Text 29"/>
+          <p:cNvSpPr/>
+          <p:nvPr/>
+        </p:nvSpPr>
+        <p:spPr>
+          <a:xfrm>
+            <a:off x="2194560" y="3538728"/>
+            <a:ext cx="1554480" cy="384048"/>
+          </a:xfrm>
+          <a:prstGeom prst="rect">
+            <a:avLst/>
+          </a:prstGeom>
+          <a:noFill/>
+          <a:ln/>
+        </p:spPr>
+        <p:txBody>
+          <a:bodyPr wrap="square" rtlCol="0" anchor="ctr"/>
+          <a:lstStyle/>
+          <a:p>
+            <a:pPr marL="0" indent="0">
+              <a:buNone/>
+            </a:pPr>
+            <a:r>
+              <a:rPr lang="en-US" sz="1200" dirty="0">
+                <a:solidFill>
+                  <a:schemeClr val="bg1"/>
                 </a:solidFill>
                 <a:latin typeface="Calibri" pitchFamily="34" charset="0"/>
                 <a:ea typeface="Calibri" pitchFamily="34" charset="-122"/>
                 <a:cs typeface="Calibri" pitchFamily="34" charset="-120"/>
               </a:rPr>
-              <a:t>Repartition par ville</a:t>
-            </a:r>
-            <a:endParaRPr lang="en-US" sz="1300" dirty="0"/>
-          </a:p>
-        </p:txBody>
-      </p:sp>
-      <p:sp>
-        <p:nvSpPr>
-          <p:cNvPr id="27" name="Text 25"/>
-          <p:cNvSpPr/>
-          <p:nvPr/>
-        </p:nvSpPr>
-        <p:spPr>
-          <a:xfrm>
-            <a:off x="548640" y="3108960"/>
+              <a:t>348</a:t>
+            </a:r>
+            <a:endParaRPr lang="en-US" sz="1200" dirty="0">
+              <a:solidFill>
+                <a:schemeClr val="bg1"/>
+              </a:solidFill>
+            </a:endParaRPr>
+          </a:p>
+        </p:txBody>
+      </p:sp>
+      <p:sp>
+        <p:nvSpPr>
+          <p:cNvPr id="32" name="Text 30"/>
+          <p:cNvSpPr/>
+          <p:nvPr/>
+        </p:nvSpPr>
+        <p:spPr>
+          <a:xfrm>
+            <a:off x="3840480" y="3538728"/>
             <a:ext cx="1554480" cy="384048"/>
           </a:xfrm>
           <a:prstGeom prst="rect">
@@ -4156,212 +4916,21 @@
               <a:buNone/>
             </a:pPr>
             <a:r>
-              <a:rPr lang="en-US" sz="1100" b="1" dirty="0">
-                <a:solidFill>
-                  <a:srgbClr val="4F8EF7"/>
+              <a:rPr lang="en-US" sz="1200" b="1" dirty="0">
+                <a:solidFill>
+                  <a:schemeClr val="bg1"/>
                 </a:solidFill>
                 <a:latin typeface="Calibri" pitchFamily="34" charset="0"/>
                 <a:ea typeface="Calibri" pitchFamily="34" charset="-122"/>
                 <a:cs typeface="Calibri" pitchFamily="34" charset="-120"/>
               </a:rPr>
-              <a:t>Ville</a:t>
-            </a:r>
-            <a:endParaRPr lang="en-US" sz="1100" dirty="0"/>
-          </a:p>
-        </p:txBody>
-      </p:sp>
-      <p:sp>
-        <p:nvSpPr>
-          <p:cNvPr id="28" name="Text 26"/>
-          <p:cNvSpPr/>
-          <p:nvPr/>
-        </p:nvSpPr>
-        <p:spPr>
-          <a:xfrm>
-            <a:off x="2194560" y="3108960"/>
-            <a:ext cx="1554480" cy="384048"/>
-          </a:xfrm>
-          <a:prstGeom prst="rect">
-            <a:avLst/>
-          </a:prstGeom>
-          <a:noFill/>
-          <a:ln/>
-        </p:spPr>
-        <p:txBody>
-          <a:bodyPr wrap="square" rtlCol="0" anchor="ctr"/>
-          <a:lstStyle/>
-          <a:p>
-            <a:pPr marL="0" indent="0">
-              <a:buNone/>
-            </a:pPr>
-            <a:r>
-              <a:rPr lang="en-US" sz="1100" b="1" dirty="0">
-                <a:solidFill>
-                  <a:srgbClr val="4F8EF7"/>
-                </a:solidFill>
-                <a:latin typeface="Calibri" pitchFamily="34" charset="0"/>
-                <a:ea typeface="Calibri" pitchFamily="34" charset="-122"/>
-                <a:cs typeface="Calibri" pitchFamily="34" charset="-120"/>
-              </a:rPr>
-              <a:t>Nb biens</a:t>
-            </a:r>
-            <a:endParaRPr lang="en-US" sz="1100" dirty="0"/>
-          </a:p>
-        </p:txBody>
-      </p:sp>
-      <p:sp>
-        <p:nvSpPr>
-          <p:cNvPr id="29" name="Text 27"/>
-          <p:cNvSpPr/>
-          <p:nvPr/>
-        </p:nvSpPr>
-        <p:spPr>
-          <a:xfrm>
-            <a:off x="3840480" y="3108960"/>
-            <a:ext cx="1554480" cy="384048"/>
-          </a:xfrm>
-          <a:prstGeom prst="rect">
-            <a:avLst/>
-          </a:prstGeom>
-          <a:noFill/>
-          <a:ln/>
-        </p:spPr>
-        <p:txBody>
-          <a:bodyPr wrap="square" rtlCol="0" anchor="ctr"/>
-          <a:lstStyle/>
-          <a:p>
-            <a:pPr marL="0" indent="0">
-              <a:buNone/>
-            </a:pPr>
-            <a:r>
-              <a:rPr lang="en-US" sz="1100" b="1" dirty="0">
-                <a:solidFill>
-                  <a:srgbClr val="4F8EF7"/>
-                </a:solidFill>
-                <a:latin typeface="Calibri" pitchFamily="34" charset="0"/>
-                <a:ea typeface="Calibri" pitchFamily="34" charset="-122"/>
-                <a:cs typeface="Calibri" pitchFamily="34" charset="-120"/>
-              </a:rPr>
-              <a:t>Loyer moyen</a:t>
-            </a:r>
-            <a:endParaRPr lang="en-US" sz="1100" dirty="0"/>
-          </a:p>
-        </p:txBody>
-      </p:sp>
-      <p:sp>
-        <p:nvSpPr>
-          <p:cNvPr id="30" name="Text 28"/>
-          <p:cNvSpPr/>
-          <p:nvPr/>
-        </p:nvSpPr>
-        <p:spPr>
-          <a:xfrm>
-            <a:off x="548640" y="3538728"/>
-            <a:ext cx="1554480" cy="384048"/>
-          </a:xfrm>
-          <a:prstGeom prst="rect">
-            <a:avLst/>
-          </a:prstGeom>
-          <a:noFill/>
-          <a:ln/>
-        </p:spPr>
-        <p:txBody>
-          <a:bodyPr wrap="square" rtlCol="0" anchor="ctr"/>
-          <a:lstStyle/>
-          <a:p>
-            <a:pPr marL="0" indent="0">
-              <a:buNone/>
-            </a:pPr>
-            <a:r>
-              <a:rPr lang="en-US" sz="1100" dirty="0">
-                <a:solidFill>
-                  <a:srgbClr val="94A3B8"/>
-                </a:solidFill>
-                <a:latin typeface="Calibri" pitchFamily="34" charset="0"/>
-                <a:ea typeface="Calibri" pitchFamily="34" charset="-122"/>
-                <a:cs typeface="Calibri" pitchFamily="34" charset="-120"/>
-              </a:rPr>
-              <a:t>Mumbai</a:t>
-            </a:r>
-            <a:endParaRPr lang="en-US" sz="1100" dirty="0"/>
-          </a:p>
-        </p:txBody>
-      </p:sp>
-      <p:sp>
-        <p:nvSpPr>
-          <p:cNvPr id="31" name="Text 29"/>
-          <p:cNvSpPr/>
-          <p:nvPr/>
-        </p:nvSpPr>
-        <p:spPr>
-          <a:xfrm>
-            <a:off x="2194560" y="3538728"/>
-            <a:ext cx="1554480" cy="384048"/>
-          </a:xfrm>
-          <a:prstGeom prst="rect">
-            <a:avLst/>
-          </a:prstGeom>
-          <a:noFill/>
-          <a:ln/>
-        </p:spPr>
-        <p:txBody>
-          <a:bodyPr wrap="square" rtlCol="0" anchor="ctr"/>
-          <a:lstStyle/>
-          <a:p>
-            <a:pPr marL="0" indent="0">
-              <a:buNone/>
-            </a:pPr>
-            <a:r>
-              <a:rPr lang="en-US" sz="1100" dirty="0">
-                <a:solidFill>
-                  <a:srgbClr val="94A3B8"/>
-                </a:solidFill>
-                <a:latin typeface="Calibri" pitchFamily="34" charset="0"/>
-                <a:ea typeface="Calibri" pitchFamily="34" charset="-122"/>
-                <a:cs typeface="Calibri" pitchFamily="34" charset="-120"/>
-              </a:rPr>
-              <a:t>348</a:t>
-            </a:r>
-            <a:endParaRPr lang="en-US" sz="1100" dirty="0"/>
-          </a:p>
-        </p:txBody>
-      </p:sp>
-      <p:sp>
-        <p:nvSpPr>
-          <p:cNvPr id="32" name="Text 30"/>
-          <p:cNvSpPr/>
-          <p:nvPr/>
-        </p:nvSpPr>
-        <p:spPr>
-          <a:xfrm>
-            <a:off x="3840480" y="3538728"/>
-            <a:ext cx="1554480" cy="384048"/>
-          </a:xfrm>
-          <a:prstGeom prst="rect">
-            <a:avLst/>
-          </a:prstGeom>
-          <a:noFill/>
-          <a:ln/>
-        </p:spPr>
-        <p:txBody>
-          <a:bodyPr wrap="square" rtlCol="0" anchor="ctr"/>
-          <a:lstStyle/>
-          <a:p>
-            <a:pPr marL="0" indent="0">
-              <a:buNone/>
-            </a:pPr>
-            <a:r>
-              <a:rPr lang="en-US" sz="1100" b="1" dirty="0">
-                <a:solidFill>
-                  <a:srgbClr val="34D399"/>
-                </a:solidFill>
-                <a:latin typeface="Calibri" pitchFamily="34" charset="0"/>
-                <a:ea typeface="Calibri" pitchFamily="34" charset="-122"/>
-                <a:cs typeface="Calibri" pitchFamily="34" charset="-120"/>
-              </a:rPr>
               <a:t>₹48 000</a:t>
             </a:r>
-            <a:endParaRPr lang="en-US" sz="1100" dirty="0"/>
+            <a:endParaRPr lang="en-US" sz="1200" dirty="0">
+              <a:solidFill>
+                <a:schemeClr val="bg1"/>
+              </a:solidFill>
+            </a:endParaRPr>
           </a:p>
         </p:txBody>
       </p:sp>
@@ -4420,29 +4989,78 @@
               <a:buNone/>
             </a:pPr>
             <a:r>
-              <a:rPr lang="en-US" sz="1100" dirty="0">
-                <a:solidFill>
-                  <a:srgbClr val="94A3B8"/>
+              <a:rPr lang="en-US" sz="1200" dirty="0">
+                <a:solidFill>
+                  <a:schemeClr val="bg1"/>
+                </a:solidFill>
+                <a:latin typeface="Times New Roman" panose="02020603050405020304" pitchFamily="18" charset="0"/>
+                <a:ea typeface="Calibri" pitchFamily="34" charset="-122"/>
+                <a:cs typeface="Times New Roman" panose="02020603050405020304" pitchFamily="18" charset="0"/>
+              </a:rPr>
+              <a:t>Delhi</a:t>
+            </a:r>
+            <a:endParaRPr lang="en-US" sz="1200" dirty="0">
+              <a:solidFill>
+                <a:schemeClr val="bg1"/>
+              </a:solidFill>
+              <a:latin typeface="Times New Roman" panose="02020603050405020304" pitchFamily="18" charset="0"/>
+              <a:cs typeface="Times New Roman" panose="02020603050405020304" pitchFamily="18" charset="0"/>
+            </a:endParaRPr>
+          </a:p>
+        </p:txBody>
+      </p:sp>
+      <p:sp>
+        <p:nvSpPr>
+          <p:cNvPr id="35" name="Text 33"/>
+          <p:cNvSpPr/>
+          <p:nvPr/>
+        </p:nvSpPr>
+        <p:spPr>
+          <a:xfrm>
+            <a:off x="2194560" y="3968496"/>
+            <a:ext cx="1554480" cy="384048"/>
+          </a:xfrm>
+          <a:prstGeom prst="rect">
+            <a:avLst/>
+          </a:prstGeom>
+          <a:noFill/>
+          <a:ln/>
+        </p:spPr>
+        <p:txBody>
+          <a:bodyPr wrap="square" rtlCol="0" anchor="ctr"/>
+          <a:lstStyle/>
+          <a:p>
+            <a:pPr marL="0" indent="0">
+              <a:buNone/>
+            </a:pPr>
+            <a:r>
+              <a:rPr lang="en-US" sz="1200" dirty="0">
+                <a:solidFill>
+                  <a:schemeClr val="bg1"/>
                 </a:solidFill>
                 <a:latin typeface="Calibri" pitchFamily="34" charset="0"/>
                 <a:ea typeface="Calibri" pitchFamily="34" charset="-122"/>
                 <a:cs typeface="Calibri" pitchFamily="34" charset="-120"/>
               </a:rPr>
-              <a:t>Delhi</a:t>
-            </a:r>
-            <a:endParaRPr lang="en-US" sz="1100" dirty="0"/>
-          </a:p>
-        </p:txBody>
-      </p:sp>
-      <p:sp>
-        <p:nvSpPr>
-          <p:cNvPr id="35" name="Text 33"/>
-          <p:cNvSpPr/>
-          <p:nvPr/>
-        </p:nvSpPr>
-        <p:spPr>
-          <a:xfrm>
-            <a:off x="2194560" y="3968496"/>
+              <a:t>1 200</a:t>
+            </a:r>
+            <a:endParaRPr lang="en-US" sz="1200" dirty="0">
+              <a:solidFill>
+                <a:schemeClr val="bg1"/>
+              </a:solidFill>
+            </a:endParaRPr>
+          </a:p>
+        </p:txBody>
+      </p:sp>
+      <p:sp>
+        <p:nvSpPr>
+          <p:cNvPr id="36" name="Text 34"/>
+          <p:cNvSpPr/>
+          <p:nvPr/>
+        </p:nvSpPr>
+        <p:spPr>
+          <a:xfrm>
+            <a:off x="3840480" y="3968496"/>
             <a:ext cx="1554480" cy="384048"/>
           </a:xfrm>
           <a:prstGeom prst="rect">
@@ -4459,56 +5077,21 @@
               <a:buNone/>
             </a:pPr>
             <a:r>
-              <a:rPr lang="en-US" sz="1100" dirty="0">
-                <a:solidFill>
-                  <a:srgbClr val="94A3B8"/>
+              <a:rPr lang="en-US" sz="1200" b="1" dirty="0">
+                <a:solidFill>
+                  <a:schemeClr val="bg1"/>
                 </a:solidFill>
                 <a:latin typeface="Calibri" pitchFamily="34" charset="0"/>
                 <a:ea typeface="Calibri" pitchFamily="34" charset="-122"/>
                 <a:cs typeface="Calibri" pitchFamily="34" charset="-120"/>
               </a:rPr>
-              <a:t>1 200</a:t>
-            </a:r>
-            <a:endParaRPr lang="en-US" sz="1100" dirty="0"/>
-          </a:p>
-        </p:txBody>
-      </p:sp>
-      <p:sp>
-        <p:nvSpPr>
-          <p:cNvPr id="36" name="Text 34"/>
-          <p:cNvSpPr/>
-          <p:nvPr/>
-        </p:nvSpPr>
-        <p:spPr>
-          <a:xfrm>
-            <a:off x="3840480" y="3968496"/>
-            <a:ext cx="1554480" cy="384048"/>
-          </a:xfrm>
-          <a:prstGeom prst="rect">
-            <a:avLst/>
-          </a:prstGeom>
-          <a:noFill/>
-          <a:ln/>
-        </p:spPr>
-        <p:txBody>
-          <a:bodyPr wrap="square" rtlCol="0" anchor="ctr"/>
-          <a:lstStyle/>
-          <a:p>
-            <a:pPr marL="0" indent="0">
-              <a:buNone/>
-            </a:pPr>
-            <a:r>
-              <a:rPr lang="en-US" sz="1100" b="1" dirty="0">
-                <a:solidFill>
-                  <a:srgbClr val="34D399"/>
-                </a:solidFill>
-                <a:latin typeface="Calibri" pitchFamily="34" charset="0"/>
-                <a:ea typeface="Calibri" pitchFamily="34" charset="-122"/>
-                <a:cs typeface="Calibri" pitchFamily="34" charset="-120"/>
-              </a:rPr>
               <a:t>₹35 000</a:t>
             </a:r>
-            <a:endParaRPr lang="en-US" sz="1100" dirty="0"/>
+            <a:endParaRPr lang="en-US" sz="1200" dirty="0">
+              <a:solidFill>
+                <a:schemeClr val="bg1"/>
+              </a:solidFill>
+            </a:endParaRPr>
           </a:p>
         </p:txBody>
       </p:sp>
@@ -4567,29 +5150,78 @@
               <a:buNone/>
             </a:pPr>
             <a:r>
-              <a:rPr lang="en-US" sz="1100" dirty="0">
-                <a:solidFill>
-                  <a:srgbClr val="94A3B8"/>
+              <a:rPr lang="en-US" sz="1200" dirty="0">
+                <a:solidFill>
+                  <a:schemeClr val="bg1"/>
+                </a:solidFill>
+                <a:latin typeface="Times New Roman" panose="02020603050405020304" pitchFamily="18" charset="0"/>
+                <a:ea typeface="Calibri" pitchFamily="34" charset="-122"/>
+                <a:cs typeface="Times New Roman" panose="02020603050405020304" pitchFamily="18" charset="0"/>
+              </a:rPr>
+              <a:t>Bangalore</a:t>
+            </a:r>
+            <a:endParaRPr lang="en-US" sz="1200" dirty="0">
+              <a:solidFill>
+                <a:schemeClr val="bg1"/>
+              </a:solidFill>
+              <a:latin typeface="Times New Roman" panose="02020603050405020304" pitchFamily="18" charset="0"/>
+              <a:cs typeface="Times New Roman" panose="02020603050405020304" pitchFamily="18" charset="0"/>
+            </a:endParaRPr>
+          </a:p>
+        </p:txBody>
+      </p:sp>
+      <p:sp>
+        <p:nvSpPr>
+          <p:cNvPr id="39" name="Text 37"/>
+          <p:cNvSpPr/>
+          <p:nvPr/>
+        </p:nvSpPr>
+        <p:spPr>
+          <a:xfrm>
+            <a:off x="2194560" y="4398264"/>
+            <a:ext cx="1554480" cy="384048"/>
+          </a:xfrm>
+          <a:prstGeom prst="rect">
+            <a:avLst/>
+          </a:prstGeom>
+          <a:noFill/>
+          <a:ln/>
+        </p:spPr>
+        <p:txBody>
+          <a:bodyPr wrap="square" rtlCol="0" anchor="ctr"/>
+          <a:lstStyle/>
+          <a:p>
+            <a:pPr marL="0" indent="0">
+              <a:buNone/>
+            </a:pPr>
+            <a:r>
+              <a:rPr lang="en-US" sz="1200" dirty="0">
+                <a:solidFill>
+                  <a:schemeClr val="bg1"/>
                 </a:solidFill>
                 <a:latin typeface="Calibri" pitchFamily="34" charset="0"/>
                 <a:ea typeface="Calibri" pitchFamily="34" charset="-122"/>
                 <a:cs typeface="Calibri" pitchFamily="34" charset="-120"/>
               </a:rPr>
-              <a:t>Bangalore</a:t>
-            </a:r>
-            <a:endParaRPr lang="en-US" sz="1100" dirty="0"/>
-          </a:p>
-        </p:txBody>
-      </p:sp>
-      <p:sp>
-        <p:nvSpPr>
-          <p:cNvPr id="39" name="Text 37"/>
-          <p:cNvSpPr/>
-          <p:nvPr/>
-        </p:nvSpPr>
-        <p:spPr>
-          <a:xfrm>
-            <a:off x="2194560" y="4398264"/>
+              <a:t>1 300</a:t>
+            </a:r>
+            <a:endParaRPr lang="en-US" sz="1200" dirty="0">
+              <a:solidFill>
+                <a:schemeClr val="bg1"/>
+              </a:solidFill>
+            </a:endParaRPr>
+          </a:p>
+        </p:txBody>
+      </p:sp>
+      <p:sp>
+        <p:nvSpPr>
+          <p:cNvPr id="40" name="Text 38"/>
+          <p:cNvSpPr/>
+          <p:nvPr/>
+        </p:nvSpPr>
+        <p:spPr>
+          <a:xfrm>
+            <a:off x="3840480" y="4398264"/>
             <a:ext cx="1554480" cy="384048"/>
           </a:xfrm>
           <a:prstGeom prst="rect">
@@ -4606,56 +5238,21 @@
               <a:buNone/>
             </a:pPr>
             <a:r>
-              <a:rPr lang="en-US" sz="1100" dirty="0">
-                <a:solidFill>
-                  <a:srgbClr val="94A3B8"/>
+              <a:rPr lang="en-US" sz="1200" b="1" dirty="0">
+                <a:solidFill>
+                  <a:schemeClr val="bg1"/>
                 </a:solidFill>
                 <a:latin typeface="Calibri" pitchFamily="34" charset="0"/>
                 <a:ea typeface="Calibri" pitchFamily="34" charset="-122"/>
                 <a:cs typeface="Calibri" pitchFamily="34" charset="-120"/>
               </a:rPr>
-              <a:t>1 300</a:t>
-            </a:r>
-            <a:endParaRPr lang="en-US" sz="1100" dirty="0"/>
-          </a:p>
-        </p:txBody>
-      </p:sp>
-      <p:sp>
-        <p:nvSpPr>
-          <p:cNvPr id="40" name="Text 38"/>
-          <p:cNvSpPr/>
-          <p:nvPr/>
-        </p:nvSpPr>
-        <p:spPr>
-          <a:xfrm>
-            <a:off x="3840480" y="4398264"/>
-            <a:ext cx="1554480" cy="384048"/>
-          </a:xfrm>
-          <a:prstGeom prst="rect">
-            <a:avLst/>
-          </a:prstGeom>
-          <a:noFill/>
-          <a:ln/>
-        </p:spPr>
-        <p:txBody>
-          <a:bodyPr wrap="square" rtlCol="0" anchor="ctr"/>
-          <a:lstStyle/>
-          <a:p>
-            <a:pPr marL="0" indent="0">
-              <a:buNone/>
-            </a:pPr>
-            <a:r>
-              <a:rPr lang="en-US" sz="1100" b="1" dirty="0">
-                <a:solidFill>
-                  <a:srgbClr val="34D399"/>
-                </a:solidFill>
-                <a:latin typeface="Calibri" pitchFamily="34" charset="0"/>
-                <a:ea typeface="Calibri" pitchFamily="34" charset="-122"/>
-                <a:cs typeface="Calibri" pitchFamily="34" charset="-120"/>
-              </a:rPr>
               <a:t>₹28 000</a:t>
             </a:r>
-            <a:endParaRPr lang="en-US" sz="1100" dirty="0"/>
+            <a:endParaRPr lang="en-US" sz="1200" dirty="0">
+              <a:solidFill>
+                <a:schemeClr val="bg1"/>
+              </a:solidFill>
+            </a:endParaRPr>
           </a:p>
         </p:txBody>
       </p:sp>
@@ -4714,29 +5311,78 @@
               <a:buNone/>
             </a:pPr>
             <a:r>
-              <a:rPr lang="en-US" sz="1100" dirty="0">
-                <a:solidFill>
-                  <a:srgbClr val="94A3B8"/>
+              <a:rPr lang="en-US" sz="1200" dirty="0">
+                <a:solidFill>
+                  <a:schemeClr val="bg1"/>
+                </a:solidFill>
+                <a:latin typeface="Times New Roman" panose="02020603050405020304" pitchFamily="18" charset="0"/>
+                <a:ea typeface="Calibri" pitchFamily="34" charset="-122"/>
+                <a:cs typeface="Times New Roman" panose="02020603050405020304" pitchFamily="18" charset="0"/>
+              </a:rPr>
+              <a:t>Hyderabad</a:t>
+            </a:r>
+            <a:endParaRPr lang="en-US" sz="1200" dirty="0">
+              <a:solidFill>
+                <a:schemeClr val="bg1"/>
+              </a:solidFill>
+              <a:latin typeface="Times New Roman" panose="02020603050405020304" pitchFamily="18" charset="0"/>
+              <a:cs typeface="Times New Roman" panose="02020603050405020304" pitchFamily="18" charset="0"/>
+            </a:endParaRPr>
+          </a:p>
+        </p:txBody>
+      </p:sp>
+      <p:sp>
+        <p:nvSpPr>
+          <p:cNvPr id="43" name="Text 41"/>
+          <p:cNvSpPr/>
+          <p:nvPr/>
+        </p:nvSpPr>
+        <p:spPr>
+          <a:xfrm>
+            <a:off x="2194560" y="4828032"/>
+            <a:ext cx="1554480" cy="384048"/>
+          </a:xfrm>
+          <a:prstGeom prst="rect">
+            <a:avLst/>
+          </a:prstGeom>
+          <a:noFill/>
+          <a:ln/>
+        </p:spPr>
+        <p:txBody>
+          <a:bodyPr wrap="square" rtlCol="0" anchor="ctr"/>
+          <a:lstStyle/>
+          <a:p>
+            <a:pPr marL="0" indent="0">
+              <a:buNone/>
+            </a:pPr>
+            <a:r>
+              <a:rPr lang="en-US" sz="1200" dirty="0">
+                <a:solidFill>
+                  <a:schemeClr val="bg1"/>
                 </a:solidFill>
                 <a:latin typeface="Calibri" pitchFamily="34" charset="0"/>
                 <a:ea typeface="Calibri" pitchFamily="34" charset="-122"/>
                 <a:cs typeface="Calibri" pitchFamily="34" charset="-120"/>
               </a:rPr>
-              <a:t>Hyderabad</a:t>
-            </a:r>
-            <a:endParaRPr lang="en-US" sz="1100" dirty="0"/>
-          </a:p>
-        </p:txBody>
-      </p:sp>
-      <p:sp>
-        <p:nvSpPr>
-          <p:cNvPr id="43" name="Text 41"/>
-          <p:cNvSpPr/>
-          <p:nvPr/>
-        </p:nvSpPr>
-        <p:spPr>
-          <a:xfrm>
-            <a:off x="2194560" y="4828032"/>
+              <a:t>480</a:t>
+            </a:r>
+            <a:endParaRPr lang="en-US" sz="1200" dirty="0">
+              <a:solidFill>
+                <a:schemeClr val="bg1"/>
+              </a:solidFill>
+            </a:endParaRPr>
+          </a:p>
+        </p:txBody>
+      </p:sp>
+      <p:sp>
+        <p:nvSpPr>
+          <p:cNvPr id="44" name="Text 42"/>
+          <p:cNvSpPr/>
+          <p:nvPr/>
+        </p:nvSpPr>
+        <p:spPr>
+          <a:xfrm>
+            <a:off x="3840480" y="4828032"/>
             <a:ext cx="1554480" cy="384048"/>
           </a:xfrm>
           <a:prstGeom prst="rect">
@@ -4753,56 +5399,21 @@
               <a:buNone/>
             </a:pPr>
             <a:r>
-              <a:rPr lang="en-US" sz="1100" dirty="0">
-                <a:solidFill>
-                  <a:srgbClr val="94A3B8"/>
+              <a:rPr lang="en-US" sz="1200" b="1" dirty="0">
+                <a:solidFill>
+                  <a:schemeClr val="bg1"/>
                 </a:solidFill>
                 <a:latin typeface="Calibri" pitchFamily="34" charset="0"/>
                 <a:ea typeface="Calibri" pitchFamily="34" charset="-122"/>
                 <a:cs typeface="Calibri" pitchFamily="34" charset="-120"/>
               </a:rPr>
-              <a:t>480</a:t>
-            </a:r>
-            <a:endParaRPr lang="en-US" sz="1100" dirty="0"/>
-          </a:p>
-        </p:txBody>
-      </p:sp>
-      <p:sp>
-        <p:nvSpPr>
-          <p:cNvPr id="44" name="Text 42"/>
-          <p:cNvSpPr/>
-          <p:nvPr/>
-        </p:nvSpPr>
-        <p:spPr>
-          <a:xfrm>
-            <a:off x="3840480" y="4828032"/>
-            <a:ext cx="1554480" cy="384048"/>
-          </a:xfrm>
-          <a:prstGeom prst="rect">
-            <a:avLst/>
-          </a:prstGeom>
-          <a:noFill/>
-          <a:ln/>
-        </p:spPr>
-        <p:txBody>
-          <a:bodyPr wrap="square" rtlCol="0" anchor="ctr"/>
-          <a:lstStyle/>
-          <a:p>
-            <a:pPr marL="0" indent="0">
-              <a:buNone/>
-            </a:pPr>
-            <a:r>
-              <a:rPr lang="en-US" sz="1100" b="1" dirty="0">
-                <a:solidFill>
-                  <a:srgbClr val="34D399"/>
-                </a:solidFill>
-                <a:latin typeface="Calibri" pitchFamily="34" charset="0"/>
-                <a:ea typeface="Calibri" pitchFamily="34" charset="-122"/>
-                <a:cs typeface="Calibri" pitchFamily="34" charset="-120"/>
-              </a:rPr>
               <a:t>₹22 000</a:t>
             </a:r>
-            <a:endParaRPr lang="en-US" sz="1100" dirty="0"/>
+            <a:endParaRPr lang="en-US" sz="1200" dirty="0">
+              <a:solidFill>
+                <a:schemeClr val="bg1"/>
+              </a:solidFill>
+            </a:endParaRPr>
           </a:p>
         </p:txBody>
       </p:sp>
@@ -4861,6 +5472,17 @@
               <a:buNone/>
             </a:pPr>
             <a:r>
+              <a:rPr lang="en-US" sz="1200" dirty="0">
+                <a:solidFill>
+                  <a:schemeClr val="bg1"/>
+                </a:solidFill>
+                <a:latin typeface="Times New Roman" panose="02020603050405020304" pitchFamily="18" charset="0"/>
+                <a:ea typeface="Calibri" pitchFamily="34" charset="-122"/>
+                <a:cs typeface="Times New Roman" panose="02020603050405020304" pitchFamily="18" charset="0"/>
+              </a:rPr>
+              <a:t>Chenna</a:t>
+            </a:r>
+            <a:r>
               <a:rPr lang="en-US" sz="1100" dirty="0">
                 <a:solidFill>
                   <a:srgbClr val="94A3B8"/>
@@ -4869,7 +5491,7 @@
                 <a:ea typeface="Calibri" pitchFamily="34" charset="-122"/>
                 <a:cs typeface="Calibri" pitchFamily="34" charset="-120"/>
               </a:rPr>
-              <a:t>Chennai</a:t>
+              <a:t>i</a:t>
             </a:r>
             <a:endParaRPr lang="en-US" sz="1100" dirty="0"/>
           </a:p>
@@ -4900,9 +5522,9 @@
               <a:buNone/>
             </a:pPr>
             <a:r>
-              <a:rPr lang="en-US" sz="1100" dirty="0">
-                <a:solidFill>
-                  <a:srgbClr val="94A3B8"/>
+              <a:rPr lang="en-US" sz="1200" dirty="0">
+                <a:solidFill>
+                  <a:schemeClr val="bg1"/>
                 </a:solidFill>
                 <a:latin typeface="Calibri" pitchFamily="34" charset="0"/>
                 <a:ea typeface="Calibri" pitchFamily="34" charset="-122"/>
@@ -4910,7 +5532,11 @@
               </a:rPr>
               <a:t>400</a:t>
             </a:r>
-            <a:endParaRPr lang="en-US" sz="1100" dirty="0"/>
+            <a:endParaRPr lang="en-US" sz="1200" dirty="0">
+              <a:solidFill>
+                <a:schemeClr val="bg1"/>
+              </a:solidFill>
+            </a:endParaRPr>
           </a:p>
         </p:txBody>
       </p:sp>
@@ -4939,9 +5565,9 @@
               <a:buNone/>
             </a:pPr>
             <a:r>
-              <a:rPr lang="en-US" sz="1100" b="1" dirty="0">
-                <a:solidFill>
-                  <a:srgbClr val="34D399"/>
+              <a:rPr lang="en-US" sz="1200" b="1" dirty="0">
+                <a:solidFill>
+                  <a:schemeClr val="bg1"/>
                 </a:solidFill>
                 <a:latin typeface="Calibri" pitchFamily="34" charset="0"/>
                 <a:ea typeface="Calibri" pitchFamily="34" charset="-122"/>
@@ -4949,7 +5575,11 @@
               </a:rPr>
               <a:t>₹14 000</a:t>
             </a:r>
-            <a:endParaRPr lang="en-US" sz="1100" dirty="0"/>
+            <a:endParaRPr lang="en-US" sz="1200" dirty="0">
+              <a:solidFill>
+                <a:schemeClr val="bg1"/>
+              </a:solidFill>
+            </a:endParaRPr>
           </a:p>
         </p:txBody>
       </p:sp>
@@ -5008,29 +5638,78 @@
               <a:buNone/>
             </a:pPr>
             <a:r>
-              <a:rPr lang="en-US" sz="1100" dirty="0">
-                <a:solidFill>
-                  <a:srgbClr val="94A3B8"/>
+              <a:rPr lang="en-US" sz="1200" dirty="0">
+                <a:solidFill>
+                  <a:schemeClr val="bg1"/>
+                </a:solidFill>
+                <a:latin typeface="Times New Roman" panose="02020603050405020304" pitchFamily="18" charset="0"/>
+                <a:ea typeface="Calibri" pitchFamily="34" charset="-122"/>
+                <a:cs typeface="Times New Roman" panose="02020603050405020304" pitchFamily="18" charset="0"/>
+              </a:rPr>
+              <a:t>Kolkata</a:t>
+            </a:r>
+            <a:endParaRPr lang="en-US" sz="1200" dirty="0">
+              <a:solidFill>
+                <a:schemeClr val="bg1"/>
+              </a:solidFill>
+              <a:latin typeface="Times New Roman" panose="02020603050405020304" pitchFamily="18" charset="0"/>
+              <a:cs typeface="Times New Roman" panose="02020603050405020304" pitchFamily="18" charset="0"/>
+            </a:endParaRPr>
+          </a:p>
+        </p:txBody>
+      </p:sp>
+      <p:sp>
+        <p:nvSpPr>
+          <p:cNvPr id="51" name="Text 49"/>
+          <p:cNvSpPr/>
+          <p:nvPr/>
+        </p:nvSpPr>
+        <p:spPr>
+          <a:xfrm>
+            <a:off x="2194560" y="5687568"/>
+            <a:ext cx="1554480" cy="384048"/>
+          </a:xfrm>
+          <a:prstGeom prst="rect">
+            <a:avLst/>
+          </a:prstGeom>
+          <a:noFill/>
+          <a:ln/>
+        </p:spPr>
+        <p:txBody>
+          <a:bodyPr wrap="square" rtlCol="0" anchor="ctr"/>
+          <a:lstStyle/>
+          <a:p>
+            <a:pPr marL="0" indent="0">
+              <a:buNone/>
+            </a:pPr>
+            <a:r>
+              <a:rPr lang="en-US" sz="1200" dirty="0">
+                <a:solidFill>
+                  <a:schemeClr val="bg1"/>
                 </a:solidFill>
                 <a:latin typeface="Calibri" pitchFamily="34" charset="0"/>
                 <a:ea typeface="Calibri" pitchFamily="34" charset="-122"/>
                 <a:cs typeface="Calibri" pitchFamily="34" charset="-120"/>
               </a:rPr>
-              <a:t>Kolkata</a:t>
-            </a:r>
-            <a:endParaRPr lang="en-US" sz="1100" dirty="0"/>
-          </a:p>
-        </p:txBody>
-      </p:sp>
-      <p:sp>
-        <p:nvSpPr>
-          <p:cNvPr id="51" name="Text 49"/>
-          <p:cNvSpPr/>
-          <p:nvPr/>
-        </p:nvSpPr>
-        <p:spPr>
-          <a:xfrm>
-            <a:off x="2194560" y="5687568"/>
+              <a:t>950</a:t>
+            </a:r>
+            <a:endParaRPr lang="en-US" sz="1200" dirty="0">
+              <a:solidFill>
+                <a:schemeClr val="bg1"/>
+              </a:solidFill>
+            </a:endParaRPr>
+          </a:p>
+        </p:txBody>
+      </p:sp>
+      <p:sp>
+        <p:nvSpPr>
+          <p:cNvPr id="52" name="Text 50"/>
+          <p:cNvSpPr/>
+          <p:nvPr/>
+        </p:nvSpPr>
+        <p:spPr>
+          <a:xfrm>
+            <a:off x="3840480" y="5687568"/>
             <a:ext cx="1554480" cy="384048"/>
           </a:xfrm>
           <a:prstGeom prst="rect">
@@ -5047,56 +5726,21 @@
               <a:buNone/>
             </a:pPr>
             <a:r>
-              <a:rPr lang="en-US" sz="1100" dirty="0">
-                <a:solidFill>
-                  <a:srgbClr val="94A3B8"/>
+              <a:rPr lang="en-US" sz="1200" b="1" dirty="0">
+                <a:solidFill>
+                  <a:schemeClr val="bg1"/>
                 </a:solidFill>
                 <a:latin typeface="Calibri" pitchFamily="34" charset="0"/>
                 <a:ea typeface="Calibri" pitchFamily="34" charset="-122"/>
                 <a:cs typeface="Calibri" pitchFamily="34" charset="-120"/>
               </a:rPr>
-              <a:t>950</a:t>
-            </a:r>
-            <a:endParaRPr lang="en-US" sz="1100" dirty="0"/>
-          </a:p>
-        </p:txBody>
-      </p:sp>
-      <p:sp>
-        <p:nvSpPr>
-          <p:cNvPr id="52" name="Text 50"/>
-          <p:cNvSpPr/>
-          <p:nvPr/>
-        </p:nvSpPr>
-        <p:spPr>
-          <a:xfrm>
-            <a:off x="3840480" y="5687568"/>
-            <a:ext cx="1554480" cy="384048"/>
-          </a:xfrm>
-          <a:prstGeom prst="rect">
-            <a:avLst/>
-          </a:prstGeom>
-          <a:noFill/>
-          <a:ln/>
-        </p:spPr>
-        <p:txBody>
-          <a:bodyPr wrap="square" rtlCol="0" anchor="ctr"/>
-          <a:lstStyle/>
-          <a:p>
-            <a:pPr marL="0" indent="0">
-              <a:buNone/>
-            </a:pPr>
-            <a:r>
-              <a:rPr lang="en-US" sz="1100" b="1" dirty="0">
-                <a:solidFill>
-                  <a:srgbClr val="34D399"/>
-                </a:solidFill>
-                <a:latin typeface="Calibri" pitchFamily="34" charset="0"/>
-                <a:ea typeface="Calibri" pitchFamily="34" charset="-122"/>
-                <a:cs typeface="Calibri" pitchFamily="34" charset="-120"/>
-              </a:rPr>
               <a:t>₹10 000</a:t>
             </a:r>
-            <a:endParaRPr lang="en-US" sz="1100" dirty="0"/>
+            <a:endParaRPr lang="en-US" sz="1200" dirty="0">
+              <a:solidFill>
+                <a:schemeClr val="bg1"/>
+              </a:solidFill>
+            </a:endParaRPr>
           </a:p>
         </p:txBody>
       </p:sp>
@@ -5189,17 +5833,20 @@
               <a:buNone/>
             </a:pPr>
             <a:r>
-              <a:rPr lang="en-US" sz="1300" b="1" dirty="0">
+              <a:rPr lang="en-US" sz="1400" b="1" dirty="0">
                 <a:solidFill>
                   <a:srgbClr val="4F8EF7"/>
                 </a:solidFill>
-                <a:latin typeface="Calibri" pitchFamily="34" charset="0"/>
+                <a:latin typeface="Times New Roman" panose="02020603050405020304" pitchFamily="18" charset="0"/>
                 <a:ea typeface="Calibri" pitchFamily="34" charset="-122"/>
-                <a:cs typeface="Calibri" pitchFamily="34" charset="-120"/>
+                <a:cs typeface="Times New Roman" panose="02020603050405020304" pitchFamily="18" charset="0"/>
               </a:rPr>
               <a:t>12 variables disponibles</a:t>
             </a:r>
-            <a:endParaRPr lang="en-US" sz="1300" dirty="0"/>
+            <a:endParaRPr lang="en-US" sz="1400" dirty="0">
+              <a:latin typeface="Times New Roman" panose="02020603050405020304" pitchFamily="18" charset="0"/>
+              <a:cs typeface="Times New Roman" panose="02020603050405020304" pitchFamily="18" charset="0"/>
+            </a:endParaRPr>
           </a:p>
         </p:txBody>
       </p:sp>
@@ -5255,17 +5902,20 @@
               <a:buNone/>
             </a:pPr>
             <a:r>
-              <a:rPr lang="en-US" sz="1000" b="1" dirty="0">
+              <a:rPr lang="en-US" sz="1200" b="1" dirty="0">
                 <a:solidFill>
                   <a:srgbClr val="F1F5F9"/>
                 </a:solidFill>
-                <a:latin typeface="Calibri" pitchFamily="34" charset="0"/>
+                <a:latin typeface="Times New Roman" panose="02020603050405020304" pitchFamily="18" charset="0"/>
                 <a:ea typeface="Calibri" pitchFamily="34" charset="-122"/>
-                <a:cs typeface="Calibri" pitchFamily="34" charset="-120"/>
+                <a:cs typeface="Times New Roman" panose="02020603050405020304" pitchFamily="18" charset="0"/>
               </a:rPr>
               <a:t>BHK, Size, Bathroom</a:t>
             </a:r>
-            <a:endParaRPr lang="en-US" sz="1000" dirty="0"/>
+            <a:endParaRPr lang="en-US" sz="1200" dirty="0">
+              <a:latin typeface="Times New Roman" panose="02020603050405020304" pitchFamily="18" charset="0"/>
+              <a:cs typeface="Times New Roman" panose="02020603050405020304" pitchFamily="18" charset="0"/>
+            </a:endParaRPr>
           </a:p>
         </p:txBody>
       </p:sp>
@@ -5294,17 +5944,23 @@
               <a:buNone/>
             </a:pPr>
             <a:r>
-              <a:rPr lang="en-US" sz="900" dirty="0">
-                <a:solidFill>
-                  <a:srgbClr val="94A3B8"/>
-                </a:solidFill>
-                <a:latin typeface="Calibri" pitchFamily="34" charset="0"/>
+              <a:rPr lang="en-US" sz="1200" dirty="0">
+                <a:solidFill>
+                  <a:schemeClr val="bg1"/>
+                </a:solidFill>
+                <a:latin typeface="Times New Roman" panose="02020603050405020304" pitchFamily="18" charset="0"/>
                 <a:ea typeface="Calibri" pitchFamily="34" charset="-122"/>
-                <a:cs typeface="Calibri" pitchFamily="34" charset="-120"/>
+                <a:cs typeface="Times New Roman" panose="02020603050405020304" pitchFamily="18" charset="0"/>
               </a:rPr>
               <a:t>Variables numeriques cles</a:t>
             </a:r>
-            <a:endParaRPr lang="en-US" sz="900" dirty="0"/>
+            <a:endParaRPr lang="en-US" sz="1200" dirty="0">
+              <a:solidFill>
+                <a:schemeClr val="bg1"/>
+              </a:solidFill>
+              <a:latin typeface="Times New Roman" panose="02020603050405020304" pitchFamily="18" charset="0"/>
+              <a:cs typeface="Times New Roman" panose="02020603050405020304" pitchFamily="18" charset="0"/>
+            </a:endParaRPr>
           </a:p>
         </p:txBody>
       </p:sp>
@@ -5360,17 +6016,20 @@
               <a:buNone/>
             </a:pPr>
             <a:r>
-              <a:rPr lang="en-US" sz="1000" b="1" dirty="0">
+              <a:rPr lang="en-US" sz="1200" b="1" dirty="0">
                 <a:solidFill>
                   <a:srgbClr val="F1F5F9"/>
                 </a:solidFill>
-                <a:latin typeface="Calibri" pitchFamily="34" charset="0"/>
+                <a:latin typeface="Times New Roman" panose="02020603050405020304" pitchFamily="18" charset="0"/>
                 <a:ea typeface="Calibri" pitchFamily="34" charset="-122"/>
-                <a:cs typeface="Calibri" pitchFamily="34" charset="-120"/>
+                <a:cs typeface="Times New Roman" panose="02020603050405020304" pitchFamily="18" charset="0"/>
               </a:rPr>
               <a:t>Floor</a:t>
             </a:r>
-            <a:endParaRPr lang="en-US" sz="1000" dirty="0"/>
+            <a:endParaRPr lang="en-US" sz="1200" dirty="0">
+              <a:latin typeface="Times New Roman" panose="02020603050405020304" pitchFamily="18" charset="0"/>
+              <a:cs typeface="Times New Roman" panose="02020603050405020304" pitchFamily="18" charset="0"/>
+            </a:endParaRPr>
           </a:p>
         </p:txBody>
       </p:sp>
@@ -5399,17 +6058,23 @@
               <a:buNone/>
             </a:pPr>
             <a:r>
-              <a:rPr lang="en-US" sz="900" dirty="0">
-                <a:solidFill>
-                  <a:srgbClr val="94A3B8"/>
-                </a:solidFill>
-                <a:latin typeface="Calibri" pitchFamily="34" charset="0"/>
+              <a:rPr lang="en-US" sz="1200" dirty="0">
+                <a:solidFill>
+                  <a:schemeClr val="bg1"/>
+                </a:solidFill>
+                <a:latin typeface="Times New Roman" panose="02020603050405020304" pitchFamily="18" charset="0"/>
                 <a:ea typeface="Calibri" pitchFamily="34" charset="-122"/>
-                <a:cs typeface="Calibri" pitchFamily="34" charset="-120"/>
+                <a:cs typeface="Times New Roman" panose="02020603050405020304" pitchFamily="18" charset="0"/>
               </a:rPr>
               <a:t>Etage — extraction numerique</a:t>
             </a:r>
-            <a:endParaRPr lang="en-US" sz="900" dirty="0"/>
+            <a:endParaRPr lang="en-US" sz="1200" dirty="0">
+              <a:solidFill>
+                <a:schemeClr val="bg1"/>
+              </a:solidFill>
+              <a:latin typeface="Times New Roman" panose="02020603050405020304" pitchFamily="18" charset="0"/>
+              <a:cs typeface="Times New Roman" panose="02020603050405020304" pitchFamily="18" charset="0"/>
+            </a:endParaRPr>
           </a:p>
         </p:txBody>
       </p:sp>
@@ -5465,17 +6130,20 @@
               <a:buNone/>
             </a:pPr>
             <a:r>
-              <a:rPr lang="en-US" sz="1000" b="1" dirty="0">
+              <a:rPr lang="en-US" sz="1200" b="1" dirty="0">
                 <a:solidFill>
                   <a:srgbClr val="F1F5F9"/>
                 </a:solidFill>
-                <a:latin typeface="Calibri" pitchFamily="34" charset="0"/>
+                <a:latin typeface="Times New Roman" panose="02020603050405020304" pitchFamily="18" charset="0"/>
                 <a:ea typeface="Calibri" pitchFamily="34" charset="-122"/>
-                <a:cs typeface="Calibri" pitchFamily="34" charset="-120"/>
+                <a:cs typeface="Times New Roman" panose="02020603050405020304" pitchFamily="18" charset="0"/>
               </a:rPr>
               <a:t>City, Area Type</a:t>
             </a:r>
-            <a:endParaRPr lang="en-US" sz="1000" dirty="0"/>
+            <a:endParaRPr lang="en-US" sz="1200" dirty="0">
+              <a:latin typeface="Times New Roman" panose="02020603050405020304" pitchFamily="18" charset="0"/>
+              <a:cs typeface="Times New Roman" panose="02020603050405020304" pitchFamily="18" charset="0"/>
+            </a:endParaRPr>
           </a:p>
         </p:txBody>
       </p:sp>
@@ -5504,17 +6172,23 @@
               <a:buNone/>
             </a:pPr>
             <a:r>
-              <a:rPr lang="en-US" sz="900" dirty="0">
-                <a:solidFill>
-                  <a:srgbClr val="94A3B8"/>
-                </a:solidFill>
-                <a:latin typeface="Calibri" pitchFamily="34" charset="0"/>
+              <a:rPr lang="en-US" sz="1200" dirty="0">
+                <a:solidFill>
+                  <a:schemeClr val="bg1"/>
+                </a:solidFill>
+                <a:latin typeface="Times New Roman" panose="02020603050405020304" pitchFamily="18" charset="0"/>
                 <a:ea typeface="Calibri" pitchFamily="34" charset="-122"/>
-                <a:cs typeface="Calibri" pitchFamily="34" charset="-120"/>
+                <a:cs typeface="Times New Roman" panose="02020603050405020304" pitchFamily="18" charset="0"/>
               </a:rPr>
               <a:t>Localisation (6 villes)</a:t>
             </a:r>
-            <a:endParaRPr lang="en-US" sz="900" dirty="0"/>
+            <a:endParaRPr lang="en-US" sz="1200" dirty="0">
+              <a:solidFill>
+                <a:schemeClr val="bg1"/>
+              </a:solidFill>
+              <a:latin typeface="Times New Roman" panose="02020603050405020304" pitchFamily="18" charset="0"/>
+              <a:cs typeface="Times New Roman" panose="02020603050405020304" pitchFamily="18" charset="0"/>
+            </a:endParaRPr>
           </a:p>
         </p:txBody>
       </p:sp>
@@ -5570,17 +6244,20 @@
               <a:buNone/>
             </a:pPr>
             <a:r>
-              <a:rPr lang="en-US" sz="1000" b="1" dirty="0">
+              <a:rPr lang="en-US" sz="1200" b="1" dirty="0">
                 <a:solidFill>
                   <a:srgbClr val="F1F5F9"/>
                 </a:solidFill>
-                <a:latin typeface="Calibri" pitchFamily="34" charset="0"/>
+                <a:latin typeface="Times New Roman" panose="02020603050405020304" pitchFamily="18" charset="0"/>
                 <a:ea typeface="Calibri" pitchFamily="34" charset="-122"/>
-                <a:cs typeface="Calibri" pitchFamily="34" charset="-120"/>
+                <a:cs typeface="Times New Roman" panose="02020603050405020304" pitchFamily="18" charset="0"/>
               </a:rPr>
               <a:t>Furnishing Status</a:t>
             </a:r>
-            <a:endParaRPr lang="en-US" sz="1000" dirty="0"/>
+            <a:endParaRPr lang="en-US" sz="1200" dirty="0">
+              <a:latin typeface="Times New Roman" panose="02020603050405020304" pitchFamily="18" charset="0"/>
+              <a:cs typeface="Times New Roman" panose="02020603050405020304" pitchFamily="18" charset="0"/>
+            </a:endParaRPr>
           </a:p>
         </p:txBody>
       </p:sp>
@@ -5609,17 +6286,23 @@
               <a:buNone/>
             </a:pPr>
             <a:r>
-              <a:rPr lang="en-US" sz="900" dirty="0">
-                <a:solidFill>
-                  <a:srgbClr val="94A3B8"/>
-                </a:solidFill>
-                <a:latin typeface="Calibri" pitchFamily="34" charset="0"/>
+              <a:rPr lang="en-US" sz="1200" dirty="0">
+                <a:solidFill>
+                  <a:schemeClr val="bg1"/>
+                </a:solidFill>
+                <a:latin typeface="Times New Roman" panose="02020603050405020304" pitchFamily="18" charset="0"/>
                 <a:ea typeface="Calibri" pitchFamily="34" charset="-122"/>
-                <a:cs typeface="Calibri" pitchFamily="34" charset="-120"/>
+                <a:cs typeface="Times New Roman" panose="02020603050405020304" pitchFamily="18" charset="0"/>
               </a:rPr>
               <a:t>Meuble / Semi / Non meuble</a:t>
             </a:r>
-            <a:endParaRPr lang="en-US" sz="900" dirty="0"/>
+            <a:endParaRPr lang="en-US" sz="1200" dirty="0">
+              <a:solidFill>
+                <a:schemeClr val="bg1"/>
+              </a:solidFill>
+              <a:latin typeface="Times New Roman" panose="02020603050405020304" pitchFamily="18" charset="0"/>
+              <a:cs typeface="Times New Roman" panose="02020603050405020304" pitchFamily="18" charset="0"/>
+            </a:endParaRPr>
           </a:p>
         </p:txBody>
       </p:sp>
@@ -5675,17 +6358,20 @@
               <a:buNone/>
             </a:pPr>
             <a:r>
-              <a:rPr lang="en-US" sz="1000" b="1" dirty="0">
+              <a:rPr lang="en-US" sz="1200" b="1" dirty="0">
                 <a:solidFill>
                   <a:srgbClr val="F1F5F9"/>
                 </a:solidFill>
-                <a:latin typeface="Calibri" pitchFamily="34" charset="0"/>
+                <a:latin typeface="Times New Roman" panose="02020603050405020304" pitchFamily="18" charset="0"/>
                 <a:ea typeface="Calibri" pitchFamily="34" charset="-122"/>
-                <a:cs typeface="Calibri" pitchFamily="34" charset="-120"/>
+                <a:cs typeface="Times New Roman" panose="02020603050405020304" pitchFamily="18" charset="0"/>
               </a:rPr>
               <a:t>Tenant Preferred</a:t>
             </a:r>
-            <a:endParaRPr lang="en-US" sz="1000" dirty="0"/>
+            <a:endParaRPr lang="en-US" sz="1200" dirty="0">
+              <a:latin typeface="Times New Roman" panose="02020603050405020304" pitchFamily="18" charset="0"/>
+              <a:cs typeface="Times New Roman" panose="02020603050405020304" pitchFamily="18" charset="0"/>
+            </a:endParaRPr>
           </a:p>
         </p:txBody>
       </p:sp>
@@ -5714,17 +6400,23 @@
               <a:buNone/>
             </a:pPr>
             <a:r>
-              <a:rPr lang="en-US" sz="900" dirty="0">
-                <a:solidFill>
-                  <a:srgbClr val="94A3B8"/>
-                </a:solidFill>
-                <a:latin typeface="Calibri" pitchFamily="34" charset="0"/>
+              <a:rPr lang="en-US" sz="1200" dirty="0">
+                <a:solidFill>
+                  <a:schemeClr val="bg1"/>
+                </a:solidFill>
+                <a:latin typeface="Times New Roman" panose="02020603050405020304" pitchFamily="18" charset="0"/>
                 <a:ea typeface="Calibri" pitchFamily="34" charset="-122"/>
-                <a:cs typeface="Calibri" pitchFamily="34" charset="-120"/>
+                <a:cs typeface="Times New Roman" panose="02020603050405020304" pitchFamily="18" charset="0"/>
               </a:rPr>
               <a:t>Bachelors / Family</a:t>
             </a:r>
-            <a:endParaRPr lang="en-US" sz="900" dirty="0"/>
+            <a:endParaRPr lang="en-US" sz="1200" dirty="0">
+              <a:solidFill>
+                <a:schemeClr val="bg1"/>
+              </a:solidFill>
+              <a:latin typeface="Times New Roman" panose="02020603050405020304" pitchFamily="18" charset="0"/>
+              <a:cs typeface="Times New Roman" panose="02020603050405020304" pitchFamily="18" charset="0"/>
+            </a:endParaRPr>
           </a:p>
         </p:txBody>
       </p:sp>
@@ -5780,17 +6472,23 @@
               <a:buNone/>
             </a:pPr>
             <a:r>
-              <a:rPr lang="en-US" sz="1000" b="1" dirty="0">
-                <a:solidFill>
-                  <a:srgbClr val="F1F5F9"/>
-                </a:solidFill>
-                <a:latin typeface="Calibri" pitchFamily="34" charset="0"/>
+              <a:rPr lang="en-US" sz="1200" b="1" dirty="0">
+                <a:solidFill>
+                  <a:schemeClr val="bg1"/>
+                </a:solidFill>
+                <a:latin typeface="Times New Roman" panose="02020603050405020304" pitchFamily="18" charset="0"/>
                 <a:ea typeface="Calibri" pitchFamily="34" charset="-122"/>
-                <a:cs typeface="Calibri" pitchFamily="34" charset="-120"/>
+                <a:cs typeface="Times New Roman" panose="02020603050405020304" pitchFamily="18" charset="0"/>
               </a:rPr>
               <a:t>Point of Contact</a:t>
             </a:r>
-            <a:endParaRPr lang="en-US" sz="1000" dirty="0"/>
+            <a:endParaRPr lang="en-US" sz="1200" dirty="0">
+              <a:solidFill>
+                <a:schemeClr val="bg1"/>
+              </a:solidFill>
+              <a:latin typeface="Times New Roman" panose="02020603050405020304" pitchFamily="18" charset="0"/>
+              <a:cs typeface="Times New Roman" panose="02020603050405020304" pitchFamily="18" charset="0"/>
+            </a:endParaRPr>
           </a:p>
         </p:txBody>
       </p:sp>
@@ -5819,17 +6517,23 @@
               <a:buNone/>
             </a:pPr>
             <a:r>
-              <a:rPr lang="en-US" sz="900" dirty="0">
-                <a:solidFill>
-                  <a:srgbClr val="94A3B8"/>
-                </a:solidFill>
-                <a:latin typeface="Calibri" pitchFamily="34" charset="0"/>
+              <a:rPr lang="en-US" sz="1200" dirty="0">
+                <a:solidFill>
+                  <a:schemeClr val="bg1"/>
+                </a:solidFill>
+                <a:latin typeface="Times New Roman" panose="02020603050405020304" pitchFamily="18" charset="0"/>
                 <a:ea typeface="Calibri" pitchFamily="34" charset="-122"/>
-                <a:cs typeface="Calibri" pitchFamily="34" charset="-120"/>
+                <a:cs typeface="Times New Roman" panose="02020603050405020304" pitchFamily="18" charset="0"/>
               </a:rPr>
               <a:t>★ Variable la plus influente !</a:t>
             </a:r>
-            <a:endParaRPr lang="en-US" sz="900" dirty="0"/>
+            <a:endParaRPr lang="en-US" sz="1200" dirty="0">
+              <a:solidFill>
+                <a:schemeClr val="bg1"/>
+              </a:solidFill>
+              <a:latin typeface="Times New Roman" panose="02020603050405020304" pitchFamily="18" charset="0"/>
+              <a:cs typeface="Times New Roman" panose="02020603050405020304" pitchFamily="18" charset="0"/>
+            </a:endParaRPr>
           </a:p>
         </p:txBody>
       </p:sp>
@@ -5885,17 +6589,20 @@
               <a:buNone/>
             </a:pPr>
             <a:r>
-              <a:rPr lang="en-US" sz="1000" b="1" dirty="0">
+              <a:rPr lang="en-US" sz="1200" b="1" dirty="0">
                 <a:solidFill>
                   <a:srgbClr val="F1F5F9"/>
                 </a:solidFill>
-                <a:latin typeface="Calibri" pitchFamily="34" charset="0"/>
+                <a:latin typeface="Times New Roman" panose="02020603050405020304" pitchFamily="18" charset="0"/>
                 <a:ea typeface="Calibri" pitchFamily="34" charset="-122"/>
-                <a:cs typeface="Calibri" pitchFamily="34" charset="-120"/>
+                <a:cs typeface="Times New Roman" panose="02020603050405020304" pitchFamily="18" charset="0"/>
               </a:rPr>
               <a:t>Rent</a:t>
             </a:r>
-            <a:endParaRPr lang="en-US" sz="1000" dirty="0"/>
+            <a:endParaRPr lang="en-US" sz="1200" dirty="0">
+              <a:latin typeface="Times New Roman" panose="02020603050405020304" pitchFamily="18" charset="0"/>
+              <a:cs typeface="Times New Roman" panose="02020603050405020304" pitchFamily="18" charset="0"/>
+            </a:endParaRPr>
           </a:p>
         </p:txBody>
       </p:sp>
@@ -5924,17 +6631,23 @@
               <a:buNone/>
             </a:pPr>
             <a:r>
-              <a:rPr lang="en-US" sz="900" dirty="0">
-                <a:solidFill>
-                  <a:srgbClr val="94A3B8"/>
-                </a:solidFill>
-                <a:latin typeface="Calibri" pitchFamily="34" charset="0"/>
+              <a:rPr lang="en-US" sz="1200" dirty="0">
+                <a:solidFill>
+                  <a:schemeClr val="bg1"/>
+                </a:solidFill>
+                <a:latin typeface="Times New Roman" panose="02020603050405020304" pitchFamily="18" charset="0"/>
                 <a:ea typeface="Calibri" pitchFamily="34" charset="-122"/>
-                <a:cs typeface="Calibri" pitchFamily="34" charset="-120"/>
+                <a:cs typeface="Times New Roman" panose="02020603050405020304" pitchFamily="18" charset="0"/>
               </a:rPr>
               <a:t>CIBLE : loyer en roupies/mois</a:t>
             </a:r>
-            <a:endParaRPr lang="en-US" sz="900" dirty="0"/>
+            <a:endParaRPr lang="en-US" sz="1200" dirty="0">
+              <a:solidFill>
+                <a:schemeClr val="bg1"/>
+              </a:solidFill>
+              <a:latin typeface="Times New Roman" panose="02020603050405020304" pitchFamily="18" charset="0"/>
+              <a:cs typeface="Times New Roman" panose="02020603050405020304" pitchFamily="18" charset="0"/>
+            </a:endParaRPr>
           </a:p>
         </p:txBody>
       </p:sp>
@@ -6019,13 +6732,16 @@
                 <a:solidFill>
                   <a:srgbClr val="4F8EF7"/>
                 </a:solidFill>
-                <a:latin typeface="Trebuchet MS" pitchFamily="34" charset="0"/>
+                <a:latin typeface="Times New Roman" panose="02020603050405020304" pitchFamily="18" charset="0"/>
                 <a:ea typeface="Trebuchet MS" pitchFamily="34" charset="-122"/>
-                <a:cs typeface="Trebuchet MS" pitchFamily="34" charset="-120"/>
+                <a:cs typeface="Times New Roman" panose="02020603050405020304" pitchFamily="18" charset="0"/>
               </a:rPr>
               <a:t>02 — Pipeline &amp; Preprocessing</a:t>
             </a:r>
-            <a:endParaRPr lang="en-US" sz="2200" dirty="0"/>
+            <a:endParaRPr lang="en-US" sz="2200" dirty="0">
+              <a:latin typeface="Times New Roman" panose="02020603050405020304" pitchFamily="18" charset="0"/>
+              <a:cs typeface="Times New Roman" panose="02020603050405020304" pitchFamily="18" charset="0"/>
+            </a:endParaRPr>
           </a:p>
         </p:txBody>
       </p:sp>
@@ -6216,15 +6932,21 @@
             <a:r>
               <a:rPr lang="en-US" sz="1400" b="1" dirty="0">
                 <a:solidFill>
-                  <a:srgbClr val="FFFFFF"/>
-                </a:solidFill>
-                <a:latin typeface="Trebuchet MS" pitchFamily="34" charset="0"/>
+                  <a:schemeClr val="bg1"/>
+                </a:solidFill>
+                <a:latin typeface="Times New Roman" panose="02020603050405020304" pitchFamily="18" charset="0"/>
                 <a:ea typeface="Trebuchet MS" pitchFamily="34" charset="-122"/>
-                <a:cs typeface="Trebuchet MS" pitchFamily="34" charset="-120"/>
+                <a:cs typeface="Times New Roman" panose="02020603050405020304" pitchFamily="18" charset="0"/>
               </a:rPr>
               <a:t>EDA</a:t>
             </a:r>
-            <a:endParaRPr lang="en-US" sz="1400" dirty="0"/>
+            <a:endParaRPr lang="en-US" sz="1400" dirty="0">
+              <a:solidFill>
+                <a:schemeClr val="bg1"/>
+              </a:solidFill>
+              <a:latin typeface="Times New Roman" panose="02020603050405020304" pitchFamily="18" charset="0"/>
+              <a:cs typeface="Times New Roman" panose="02020603050405020304" pitchFamily="18" charset="0"/>
+            </a:endParaRPr>
           </a:p>
         </p:txBody>
       </p:sp>
@@ -6283,34 +7005,46 @@
               <a:buNone/>
             </a:pPr>
             <a:r>
-              <a:rPr lang="en-US" sz="1000" dirty="0">
-                <a:solidFill>
-                  <a:srgbClr val="94A3B8"/>
-                </a:solidFill>
-                <a:latin typeface="Calibri" pitchFamily="34" charset="0"/>
+              <a:rPr lang="en-US" sz="1200" dirty="0">
+                <a:solidFill>
+                  <a:schemeClr val="bg1"/>
+                </a:solidFill>
+                <a:latin typeface="Times New Roman" panose="02020603050405020304" pitchFamily="18" charset="0"/>
                 <a:ea typeface="Calibri" pitchFamily="34" charset="-122"/>
-                <a:cs typeface="Calibri" pitchFamily="34" charset="-120"/>
+                <a:cs typeface="Times New Roman" panose="02020603050405020304" pitchFamily="18" charset="0"/>
               </a:rPr>
               <a:t>Analyse distributions</a:t>
             </a:r>
-            <a:endParaRPr lang="en-US" sz="1000" dirty="0"/>
+            <a:endParaRPr lang="en-US" sz="1200" dirty="0">
+              <a:solidFill>
+                <a:schemeClr val="bg1"/>
+              </a:solidFill>
+              <a:latin typeface="Times New Roman" panose="02020603050405020304" pitchFamily="18" charset="0"/>
+              <a:cs typeface="Times New Roman" panose="02020603050405020304" pitchFamily="18" charset="0"/>
+            </a:endParaRPr>
           </a:p>
           <a:p>
             <a:pPr marL="0" indent="0" algn="ctr">
               <a:buNone/>
             </a:pPr>
             <a:r>
-              <a:rPr lang="en-US" sz="1000" dirty="0">
-                <a:solidFill>
-                  <a:srgbClr val="94A3B8"/>
-                </a:solidFill>
-                <a:latin typeface="Calibri" pitchFamily="34" charset="0"/>
+              <a:rPr lang="en-US" sz="1200" dirty="0">
+                <a:solidFill>
+                  <a:schemeClr val="bg1"/>
+                </a:solidFill>
+                <a:latin typeface="Times New Roman" panose="02020603050405020304" pitchFamily="18" charset="0"/>
                 <a:ea typeface="Calibri" pitchFamily="34" charset="-122"/>
-                <a:cs typeface="Calibri" pitchFamily="34" charset="-120"/>
+                <a:cs typeface="Times New Roman" panose="02020603050405020304" pitchFamily="18" charset="0"/>
               </a:rPr>
               <a:t>Correlations, skewness</a:t>
             </a:r>
-            <a:endParaRPr lang="en-US" sz="1000" dirty="0"/>
+            <a:endParaRPr lang="en-US" sz="1200" dirty="0">
+              <a:solidFill>
+                <a:schemeClr val="bg1"/>
+              </a:solidFill>
+              <a:latin typeface="Times New Roman" panose="02020603050405020304" pitchFamily="18" charset="0"/>
+              <a:cs typeface="Times New Roman" panose="02020603050405020304" pitchFamily="18" charset="0"/>
+            </a:endParaRPr>
           </a:p>
         </p:txBody>
       </p:sp>
@@ -6471,15 +7205,21 @@
             <a:r>
               <a:rPr lang="en-US" sz="1400" b="1" dirty="0">
                 <a:solidFill>
-                  <a:srgbClr val="FFFFFF"/>
-                </a:solidFill>
-                <a:latin typeface="Trebuchet MS" pitchFamily="34" charset="0"/>
+                  <a:schemeClr val="bg1"/>
+                </a:solidFill>
+                <a:latin typeface="Times New Roman" panose="02020603050405020304" pitchFamily="18" charset="0"/>
                 <a:ea typeface="Trebuchet MS" pitchFamily="34" charset="-122"/>
-                <a:cs typeface="Trebuchet MS" pitchFamily="34" charset="-120"/>
+                <a:cs typeface="Times New Roman" panose="02020603050405020304" pitchFamily="18" charset="0"/>
               </a:rPr>
               <a:t>Nettoyage</a:t>
             </a:r>
-            <a:endParaRPr lang="en-US" sz="1400" dirty="0"/>
+            <a:endParaRPr lang="en-US" sz="1400" dirty="0">
+              <a:solidFill>
+                <a:schemeClr val="bg1"/>
+              </a:solidFill>
+              <a:latin typeface="Times New Roman" panose="02020603050405020304" pitchFamily="18" charset="0"/>
+              <a:cs typeface="Times New Roman" panose="02020603050405020304" pitchFamily="18" charset="0"/>
+            </a:endParaRPr>
           </a:p>
         </p:txBody>
       </p:sp>
@@ -6538,34 +7278,46 @@
               <a:buNone/>
             </a:pPr>
             <a:r>
-              <a:rPr lang="en-US" sz="1000" dirty="0">
-                <a:solidFill>
-                  <a:srgbClr val="94A3B8"/>
-                </a:solidFill>
-                <a:latin typeface="Calibri" pitchFamily="34" charset="0"/>
+              <a:rPr lang="en-US" sz="1200" dirty="0">
+                <a:solidFill>
+                  <a:schemeClr val="bg1"/>
+                </a:solidFill>
+                <a:latin typeface="Times New Roman" panose="02020603050405020304" pitchFamily="18" charset="0"/>
                 <a:ea typeface="Calibri" pitchFamily="34" charset="-122"/>
-                <a:cs typeface="Calibri" pitchFamily="34" charset="-120"/>
+                <a:cs typeface="Times New Roman" panose="02020603050405020304" pitchFamily="18" charset="0"/>
               </a:rPr>
               <a:t>68 doublons supprimes</a:t>
             </a:r>
-            <a:endParaRPr lang="en-US" sz="1000" dirty="0"/>
+            <a:endParaRPr lang="en-US" sz="1200" dirty="0">
+              <a:solidFill>
+                <a:schemeClr val="bg1"/>
+              </a:solidFill>
+              <a:latin typeface="Times New Roman" panose="02020603050405020304" pitchFamily="18" charset="0"/>
+              <a:cs typeface="Times New Roman" panose="02020603050405020304" pitchFamily="18" charset="0"/>
+            </a:endParaRPr>
           </a:p>
           <a:p>
             <a:pPr marL="0" indent="0" algn="ctr">
               <a:buNone/>
             </a:pPr>
             <a:r>
-              <a:rPr lang="en-US" sz="1000" dirty="0">
-                <a:solidFill>
-                  <a:srgbClr val="94A3B8"/>
-                </a:solidFill>
-                <a:latin typeface="Calibri" pitchFamily="34" charset="0"/>
+              <a:rPr lang="en-US" sz="1200" dirty="0">
+                <a:solidFill>
+                  <a:schemeClr val="bg1"/>
+                </a:solidFill>
+                <a:latin typeface="Times New Roman" panose="02020603050405020304" pitchFamily="18" charset="0"/>
                 <a:ea typeface="Calibri" pitchFamily="34" charset="-122"/>
-                <a:cs typeface="Calibri" pitchFamily="34" charset="-120"/>
+                <a:cs typeface="Times New Roman" panose="02020603050405020304" pitchFamily="18" charset="0"/>
               </a:rPr>
               <a:t>Valeurs aberrantes</a:t>
             </a:r>
-            <a:endParaRPr lang="en-US" sz="1000" dirty="0"/>
+            <a:endParaRPr lang="en-US" sz="1200" dirty="0">
+              <a:solidFill>
+                <a:schemeClr val="bg1"/>
+              </a:solidFill>
+              <a:latin typeface="Times New Roman" panose="02020603050405020304" pitchFamily="18" charset="0"/>
+              <a:cs typeface="Times New Roman" panose="02020603050405020304" pitchFamily="18" charset="0"/>
+            </a:endParaRPr>
           </a:p>
         </p:txBody>
       </p:sp>
@@ -6726,15 +7478,21 @@
             <a:r>
               <a:rPr lang="en-US" sz="1400" b="1" dirty="0">
                 <a:solidFill>
-                  <a:srgbClr val="FFFFFF"/>
-                </a:solidFill>
-                <a:latin typeface="Trebuchet MS" pitchFamily="34" charset="0"/>
+                  <a:schemeClr val="bg1"/>
+                </a:solidFill>
+                <a:latin typeface="Times New Roman" panose="02020603050405020304" pitchFamily="18" charset="0"/>
                 <a:ea typeface="Trebuchet MS" pitchFamily="34" charset="-122"/>
-                <a:cs typeface="Trebuchet MS" pitchFamily="34" charset="-120"/>
+                <a:cs typeface="Times New Roman" panose="02020603050405020304" pitchFamily="18" charset="0"/>
               </a:rPr>
               <a:t>Encodage</a:t>
             </a:r>
-            <a:endParaRPr lang="en-US" sz="1400" dirty="0"/>
+            <a:endParaRPr lang="en-US" sz="1400" dirty="0">
+              <a:solidFill>
+                <a:schemeClr val="bg1"/>
+              </a:solidFill>
+              <a:latin typeface="Times New Roman" panose="02020603050405020304" pitchFamily="18" charset="0"/>
+              <a:cs typeface="Times New Roman" panose="02020603050405020304" pitchFamily="18" charset="0"/>
+            </a:endParaRPr>
           </a:p>
         </p:txBody>
       </p:sp>
@@ -6793,34 +7551,46 @@
               <a:buNone/>
             </a:pPr>
             <a:r>
-              <a:rPr lang="en-US" sz="1000" dirty="0">
-                <a:solidFill>
-                  <a:srgbClr val="94A3B8"/>
-                </a:solidFill>
-                <a:latin typeface="Calibri" pitchFamily="34" charset="0"/>
+              <a:rPr lang="en-US" sz="1200" dirty="0">
+                <a:solidFill>
+                  <a:schemeClr val="bg1"/>
+                </a:solidFill>
+                <a:latin typeface="Times New Roman" panose="02020603050405020304" pitchFamily="18" charset="0"/>
                 <a:ea typeface="Calibri" pitchFamily="34" charset="-122"/>
-                <a:cs typeface="Calibri" pitchFamily="34" charset="-120"/>
+                <a:cs typeface="Times New Roman" panose="02020603050405020304" pitchFamily="18" charset="0"/>
               </a:rPr>
               <a:t>Label encoding x5</a:t>
             </a:r>
-            <a:endParaRPr lang="en-US" sz="1000" dirty="0"/>
+            <a:endParaRPr lang="en-US" sz="1200" dirty="0">
+              <a:solidFill>
+                <a:schemeClr val="bg1"/>
+              </a:solidFill>
+              <a:latin typeface="Times New Roman" panose="02020603050405020304" pitchFamily="18" charset="0"/>
+              <a:cs typeface="Times New Roman" panose="02020603050405020304" pitchFamily="18" charset="0"/>
+            </a:endParaRPr>
           </a:p>
           <a:p>
             <a:pPr marL="0" indent="0" algn="ctr">
               <a:buNone/>
             </a:pPr>
             <a:r>
-              <a:rPr lang="en-US" sz="1000" dirty="0">
-                <a:solidFill>
-                  <a:srgbClr val="94A3B8"/>
-                </a:solidFill>
-                <a:latin typeface="Calibri" pitchFamily="34" charset="0"/>
+              <a:rPr lang="en-US" sz="1200" dirty="0">
+                <a:solidFill>
+                  <a:schemeClr val="bg1"/>
+                </a:solidFill>
+                <a:latin typeface="Times New Roman" panose="02020603050405020304" pitchFamily="18" charset="0"/>
                 <a:ea typeface="Calibri" pitchFamily="34" charset="-122"/>
-                <a:cs typeface="Calibri" pitchFamily="34" charset="-120"/>
+                <a:cs typeface="Times New Roman" panose="02020603050405020304" pitchFamily="18" charset="0"/>
               </a:rPr>
               <a:t>Extraction etage</a:t>
             </a:r>
-            <a:endParaRPr lang="en-US" sz="1000" dirty="0"/>
+            <a:endParaRPr lang="en-US" sz="1200" dirty="0">
+              <a:solidFill>
+                <a:schemeClr val="bg1"/>
+              </a:solidFill>
+              <a:latin typeface="Times New Roman" panose="02020603050405020304" pitchFamily="18" charset="0"/>
+              <a:cs typeface="Times New Roman" panose="02020603050405020304" pitchFamily="18" charset="0"/>
+            </a:endParaRPr>
           </a:p>
         </p:txBody>
       </p:sp>
@@ -6981,15 +7751,21 @@
             <a:r>
               <a:rPr lang="en-US" sz="1400" b="1" dirty="0">
                 <a:solidFill>
-                  <a:srgbClr val="FFFFFF"/>
-                </a:solidFill>
-                <a:latin typeface="Trebuchet MS" pitchFamily="34" charset="0"/>
+                  <a:schemeClr val="bg1"/>
+                </a:solidFill>
+                <a:latin typeface="Times New Roman" panose="02020603050405020304" pitchFamily="18" charset="0"/>
                 <a:ea typeface="Trebuchet MS" pitchFamily="34" charset="-122"/>
-                <a:cs typeface="Trebuchet MS" pitchFamily="34" charset="-120"/>
+                <a:cs typeface="Times New Roman" panose="02020603050405020304" pitchFamily="18" charset="0"/>
               </a:rPr>
               <a:t>Transform</a:t>
             </a:r>
-            <a:endParaRPr lang="en-US" sz="1400" dirty="0"/>
+            <a:endParaRPr lang="en-US" sz="1400" dirty="0">
+              <a:solidFill>
+                <a:schemeClr val="bg1"/>
+              </a:solidFill>
+              <a:latin typeface="Times New Roman" panose="02020603050405020304" pitchFamily="18" charset="0"/>
+              <a:cs typeface="Times New Roman" panose="02020603050405020304" pitchFamily="18" charset="0"/>
+            </a:endParaRPr>
           </a:p>
         </p:txBody>
       </p:sp>
@@ -7048,34 +7824,46 @@
               <a:buNone/>
             </a:pPr>
             <a:r>
-              <a:rPr lang="en-US" sz="1000" dirty="0">
-                <a:solidFill>
-                  <a:srgbClr val="94A3B8"/>
-                </a:solidFill>
-                <a:latin typeface="Calibri" pitchFamily="34" charset="0"/>
+              <a:rPr lang="en-US" sz="1200" dirty="0">
+                <a:solidFill>
+                  <a:schemeClr val="bg1"/>
+                </a:solidFill>
+                <a:latin typeface="Times New Roman" panose="02020603050405020304" pitchFamily="18" charset="0"/>
                 <a:ea typeface="Calibri" pitchFamily="34" charset="-122"/>
-                <a:cs typeface="Calibri" pitchFamily="34" charset="-120"/>
+                <a:cs typeface="Times New Roman" panose="02020603050405020304" pitchFamily="18" charset="0"/>
               </a:rPr>
               <a:t>Log(Rent), Log(Size)</a:t>
             </a:r>
-            <a:endParaRPr lang="en-US" sz="1000" dirty="0"/>
+            <a:endParaRPr lang="en-US" sz="1200" dirty="0">
+              <a:solidFill>
+                <a:schemeClr val="bg1"/>
+              </a:solidFill>
+              <a:latin typeface="Times New Roman" panose="02020603050405020304" pitchFamily="18" charset="0"/>
+              <a:cs typeface="Times New Roman" panose="02020603050405020304" pitchFamily="18" charset="0"/>
+            </a:endParaRPr>
           </a:p>
           <a:p>
             <a:pPr marL="0" indent="0" algn="ctr">
               <a:buNone/>
             </a:pPr>
             <a:r>
-              <a:rPr lang="en-US" sz="1000" dirty="0">
-                <a:solidFill>
-                  <a:srgbClr val="94A3B8"/>
-                </a:solidFill>
-                <a:latin typeface="Calibri" pitchFamily="34" charset="0"/>
+              <a:rPr lang="en-US" sz="1200" dirty="0">
+                <a:solidFill>
+                  <a:schemeClr val="bg1"/>
+                </a:solidFill>
+                <a:latin typeface="Times New Roman" panose="02020603050405020304" pitchFamily="18" charset="0"/>
                 <a:ea typeface="Calibri" pitchFamily="34" charset="-122"/>
-                <a:cs typeface="Calibri" pitchFamily="34" charset="-120"/>
+                <a:cs typeface="Times New Roman" panose="02020603050405020304" pitchFamily="18" charset="0"/>
               </a:rPr>
               <a:t>Standardisation</a:t>
             </a:r>
-            <a:endParaRPr lang="en-US" sz="1000" dirty="0"/>
+            <a:endParaRPr lang="en-US" sz="1200" dirty="0">
+              <a:solidFill>
+                <a:schemeClr val="bg1"/>
+              </a:solidFill>
+              <a:latin typeface="Times New Roman" panose="02020603050405020304" pitchFamily="18" charset="0"/>
+              <a:cs typeface="Times New Roman" panose="02020603050405020304" pitchFamily="18" charset="0"/>
+            </a:endParaRPr>
           </a:p>
         </p:txBody>
       </p:sp>
@@ -7208,13 +7996,16 @@
                 <a:solidFill>
                   <a:srgbClr val="FFFFFF"/>
                 </a:solidFill>
-                <a:latin typeface="Trebuchet MS" pitchFamily="34" charset="0"/>
+                <a:latin typeface="Times New Roman" panose="02020603050405020304" pitchFamily="18" charset="0"/>
                 <a:ea typeface="Trebuchet MS" pitchFamily="34" charset="-122"/>
-                <a:cs typeface="Trebuchet MS" pitchFamily="34" charset="-120"/>
+                <a:cs typeface="Times New Roman" panose="02020603050405020304" pitchFamily="18" charset="0"/>
               </a:rPr>
               <a:t>Split</a:t>
             </a:r>
-            <a:endParaRPr lang="en-US" sz="1400" dirty="0"/>
+            <a:endParaRPr lang="en-US" sz="1400" dirty="0">
+              <a:latin typeface="Times New Roman" panose="02020603050405020304" pitchFamily="18" charset="0"/>
+              <a:cs typeface="Times New Roman" panose="02020603050405020304" pitchFamily="18" charset="0"/>
+            </a:endParaRPr>
           </a:p>
         </p:txBody>
       </p:sp>
@@ -7273,34 +8064,46 @@
               <a:buNone/>
             </a:pPr>
             <a:r>
-              <a:rPr lang="en-US" sz="1000" dirty="0">
-                <a:solidFill>
-                  <a:srgbClr val="94A3B8"/>
-                </a:solidFill>
-                <a:latin typeface="Calibri" pitchFamily="34" charset="0"/>
+              <a:rPr lang="en-US" sz="1200" dirty="0">
+                <a:solidFill>
+                  <a:schemeClr val="bg1"/>
+                </a:solidFill>
+                <a:latin typeface="Times New Roman" panose="02020603050405020304" pitchFamily="18" charset="0"/>
                 <a:ea typeface="Calibri" pitchFamily="34" charset="-122"/>
-                <a:cs typeface="Calibri" pitchFamily="34" charset="-120"/>
+                <a:cs typeface="Times New Roman" panose="02020603050405020304" pitchFamily="18" charset="0"/>
               </a:rPr>
               <a:t>80% train / 20% test</a:t>
             </a:r>
-            <a:endParaRPr lang="en-US" sz="1000" dirty="0"/>
+            <a:endParaRPr lang="en-US" sz="1200" dirty="0">
+              <a:solidFill>
+                <a:schemeClr val="bg1"/>
+              </a:solidFill>
+              <a:latin typeface="Times New Roman" panose="02020603050405020304" pitchFamily="18" charset="0"/>
+              <a:cs typeface="Times New Roman" panose="02020603050405020304" pitchFamily="18" charset="0"/>
+            </a:endParaRPr>
           </a:p>
           <a:p>
             <a:pPr marL="0" indent="0" algn="ctr">
               <a:buNone/>
             </a:pPr>
             <a:r>
-              <a:rPr lang="en-US" sz="1000" dirty="0">
-                <a:solidFill>
-                  <a:srgbClr val="94A3B8"/>
-                </a:solidFill>
-                <a:latin typeface="Calibri" pitchFamily="34" charset="0"/>
+              <a:rPr lang="en-US" sz="1200" dirty="0">
+                <a:solidFill>
+                  <a:schemeClr val="bg1"/>
+                </a:solidFill>
+                <a:latin typeface="Times New Roman" panose="02020603050405020304" pitchFamily="18" charset="0"/>
                 <a:ea typeface="Calibri" pitchFamily="34" charset="-122"/>
-                <a:cs typeface="Calibri" pitchFamily="34" charset="-120"/>
+                <a:cs typeface="Times New Roman" panose="02020603050405020304" pitchFamily="18" charset="0"/>
               </a:rPr>
               <a:t>random_state=42</a:t>
             </a:r>
-            <a:endParaRPr lang="en-US" sz="1000" dirty="0"/>
+            <a:endParaRPr lang="en-US" sz="1200" dirty="0">
+              <a:solidFill>
+                <a:schemeClr val="bg1"/>
+              </a:solidFill>
+              <a:latin typeface="Times New Roman" panose="02020603050405020304" pitchFamily="18" charset="0"/>
+              <a:cs typeface="Times New Roman" panose="02020603050405020304" pitchFamily="18" charset="0"/>
+            </a:endParaRPr>
           </a:p>
         </p:txBody>
       </p:sp>
@@ -7347,7 +8150,7 @@
         <p:spPr>
           <a:xfrm>
             <a:off x="548640" y="4983480"/>
-            <a:ext cx="10789920" cy="822960"/>
+            <a:ext cx="10972800" cy="1143000"/>
           </a:xfrm>
           <a:prstGeom prst="rect">
             <a:avLst/>
@@ -7363,17 +8166,23 @@
               <a:buNone/>
             </a:pPr>
             <a:r>
-              <a:rPr lang="en-US" sz="1100" dirty="0">
-                <a:solidFill>
-                  <a:srgbClr val="94A3B8"/>
-                </a:solidFill>
-                <a:latin typeface="Calibri" pitchFamily="34" charset="0"/>
+              <a:rPr lang="en-US" sz="1400" dirty="0">
+                <a:solidFill>
+                  <a:schemeClr val="bg1"/>
+                </a:solidFill>
+                <a:latin typeface="Times New Roman" panose="02020603050405020304" pitchFamily="18" charset="0"/>
                 <a:ea typeface="Calibri" pitchFamily="34" charset="-122"/>
-                <a:cs typeface="Calibri" pitchFamily="34" charset="-120"/>
+                <a:cs typeface="Times New Roman" panose="02020603050405020304" pitchFamily="18" charset="0"/>
               </a:rPr>
               <a:t>Traitements cles appliques : Log-transform sur Rent (reduire skewness) + Label Encoding sur 5 variables categorielles (City, Area Type, Furnishing Status, Tenant Preferred, Point of Contact) + extraction numerique de l'etage depuis la chaine textuelle</a:t>
             </a:r>
-            <a:endParaRPr lang="en-US" sz="1100" dirty="0"/>
+            <a:endParaRPr lang="en-US" sz="1400" dirty="0">
+              <a:solidFill>
+                <a:schemeClr val="bg1"/>
+              </a:solidFill>
+              <a:latin typeface="Times New Roman" panose="02020603050405020304" pitchFamily="18" charset="0"/>
+              <a:cs typeface="Times New Roman" panose="02020603050405020304" pitchFamily="18" charset="0"/>
+            </a:endParaRPr>
           </a:p>
         </p:txBody>
       </p:sp>
@@ -7458,13 +8267,16 @@
                 <a:solidFill>
                   <a:srgbClr val="4F8EF7"/>
                 </a:solidFill>
-                <a:latin typeface="Trebuchet MS" pitchFamily="34" charset="0"/>
+                <a:latin typeface="Times New Roman" panose="02020603050405020304" pitchFamily="18" charset="0"/>
                 <a:ea typeface="Trebuchet MS" pitchFamily="34" charset="-122"/>
-                <a:cs typeface="Trebuchet MS" pitchFamily="34" charset="-120"/>
+                <a:cs typeface="Times New Roman" panose="02020603050405020304" pitchFamily="18" charset="0"/>
               </a:rPr>
               <a:t>03 — Algorithmes Testes</a:t>
             </a:r>
-            <a:endParaRPr lang="en-US" sz="2200" dirty="0"/>
+            <a:endParaRPr lang="en-US" sz="2200" dirty="0">
+              <a:latin typeface="Times New Roman" panose="02020603050405020304" pitchFamily="18" charset="0"/>
+              <a:cs typeface="Times New Roman" panose="02020603050405020304" pitchFamily="18" charset="0"/>
+            </a:endParaRPr>
           </a:p>
         </p:txBody>
       </p:sp>
@@ -7561,69 +8373,79 @@
                 <a:solidFill>
                   <a:srgbClr val="FFFFFF"/>
                 </a:solidFill>
+                <a:latin typeface="Times New Roman" panose="02020603050405020304" pitchFamily="18" charset="0"/>
+                <a:ea typeface="Trebuchet MS" pitchFamily="34" charset="-122"/>
+                <a:cs typeface="Times New Roman" panose="02020603050405020304" pitchFamily="18" charset="0"/>
+              </a:rPr>
+              <a:t>Regression</a:t>
+            </a:r>
+            <a:endParaRPr lang="en-US" sz="1400" dirty="0">
+              <a:latin typeface="Times New Roman" panose="02020603050405020304" pitchFamily="18" charset="0"/>
+              <a:cs typeface="Times New Roman" panose="02020603050405020304" pitchFamily="18" charset="0"/>
+            </a:endParaRPr>
+          </a:p>
+          <a:p>
+            <a:pPr marL="0" indent="0" algn="ctr">
+              <a:buNone/>
+            </a:pPr>
+            <a:r>
+              <a:rPr lang="en-US" sz="1400" b="1" dirty="0">
+                <a:solidFill>
+                  <a:srgbClr val="FFFFFF"/>
+                </a:solidFill>
+                <a:latin typeface="Times New Roman" panose="02020603050405020304" pitchFamily="18" charset="0"/>
+                <a:ea typeface="Trebuchet MS" pitchFamily="34" charset="-122"/>
+                <a:cs typeface="Times New Roman" panose="02020603050405020304" pitchFamily="18" charset="0"/>
+              </a:rPr>
+              <a:t>Lineaire</a:t>
+            </a:r>
+            <a:endParaRPr lang="en-US" sz="1400" dirty="0">
+              <a:latin typeface="Times New Roman" panose="02020603050405020304" pitchFamily="18" charset="0"/>
+              <a:cs typeface="Times New Roman" panose="02020603050405020304" pitchFamily="18" charset="0"/>
+            </a:endParaRPr>
+          </a:p>
+        </p:txBody>
+      </p:sp>
+      <p:sp>
+        <p:nvSpPr>
+          <p:cNvPr id="7" name="Text 5"/>
+          <p:cNvSpPr/>
+          <p:nvPr/>
+        </p:nvSpPr>
+        <p:spPr>
+          <a:xfrm>
+            <a:off x="457200" y="2011680"/>
+            <a:ext cx="1828800" cy="777240"/>
+          </a:xfrm>
+          <a:prstGeom prst="rect">
+            <a:avLst/>
+          </a:prstGeom>
+          <a:noFill/>
+          <a:ln/>
+        </p:spPr>
+        <p:txBody>
+          <a:bodyPr wrap="square" rtlCol="0" anchor="ctr"/>
+          <a:lstStyle/>
+          <a:p>
+            <a:pPr marL="0" indent="0" algn="ctr">
+              <a:buNone/>
+            </a:pPr>
+            <a:r>
+              <a:rPr lang="en-US" sz="3000" b="1" dirty="0">
+                <a:solidFill>
+                  <a:schemeClr val="bg1"/>
+                </a:solidFill>
                 <a:latin typeface="Trebuchet MS" pitchFamily="34" charset="0"/>
                 <a:ea typeface="Trebuchet MS" pitchFamily="34" charset="-122"/>
                 <a:cs typeface="Trebuchet MS" pitchFamily="34" charset="-120"/>
               </a:rPr>
-              <a:t>Regression</a:t>
-            </a:r>
-            <a:endParaRPr lang="en-US" sz="1400" dirty="0"/>
-          </a:p>
-          <a:p>
-            <a:pPr marL="0" indent="0" algn="ctr">
-              <a:buNone/>
-            </a:pPr>
-            <a:r>
-              <a:rPr lang="en-US" sz="1400" b="1" dirty="0">
-                <a:solidFill>
-                  <a:srgbClr val="FFFFFF"/>
-                </a:solidFill>
-                <a:latin typeface="Trebuchet MS" pitchFamily="34" charset="0"/>
-                <a:ea typeface="Trebuchet MS" pitchFamily="34" charset="-122"/>
-                <a:cs typeface="Trebuchet MS" pitchFamily="34" charset="-120"/>
-              </a:rPr>
-              <a:t>Lineaire</a:t>
-            </a:r>
-            <a:endParaRPr lang="en-US" sz="1400" dirty="0"/>
-          </a:p>
-        </p:txBody>
-      </p:sp>
-      <p:sp>
-        <p:nvSpPr>
-          <p:cNvPr id="7" name="Text 5"/>
-          <p:cNvSpPr/>
-          <p:nvPr/>
-        </p:nvSpPr>
-        <p:spPr>
-          <a:xfrm>
-            <a:off x="457200" y="2011680"/>
-            <a:ext cx="1828800" cy="777240"/>
-          </a:xfrm>
-          <a:prstGeom prst="rect">
-            <a:avLst/>
-          </a:prstGeom>
-          <a:noFill/>
-          <a:ln/>
-        </p:spPr>
-        <p:txBody>
-          <a:bodyPr wrap="square" rtlCol="0" anchor="ctr"/>
-          <a:lstStyle/>
-          <a:p>
-            <a:pPr marL="0" indent="0" algn="ctr">
-              <a:buNone/>
-            </a:pPr>
-            <a:r>
-              <a:rPr lang="en-US" sz="3000" b="1" dirty="0">
-                <a:solidFill>
-                  <a:srgbClr val="94A3B8"/>
-                </a:solidFill>
-                <a:latin typeface="Trebuchet MS" pitchFamily="34" charset="0"/>
-                <a:ea typeface="Trebuchet MS" pitchFamily="34" charset="-122"/>
-                <a:cs typeface="Trebuchet MS" pitchFamily="34" charset="-120"/>
-              </a:rPr>
               <a:t>0.731</a:t>
             </a:r>
-            <a:endParaRPr lang="en-US" sz="3000" dirty="0"/>
+            <a:endParaRPr lang="en-US" sz="3000" dirty="0">
+              <a:solidFill>
+                <a:schemeClr val="bg1"/>
+              </a:solidFill>
+            </a:endParaRPr>
           </a:p>
         </p:txBody>
       </p:sp>
@@ -7652,17 +8474,23 @@
               <a:buNone/>
             </a:pPr>
             <a:r>
-              <a:rPr lang="en-US" sz="1000" dirty="0">
-                <a:solidFill>
-                  <a:srgbClr val="94A3B8"/>
-                </a:solidFill>
-                <a:latin typeface="Calibri" pitchFamily="34" charset="0"/>
+              <a:rPr lang="en-US" sz="1400" dirty="0">
+                <a:solidFill>
+                  <a:schemeClr val="bg1"/>
+                </a:solidFill>
+                <a:latin typeface="Times New Roman" panose="02020603050405020304" pitchFamily="18" charset="0"/>
                 <a:ea typeface="Calibri" pitchFamily="34" charset="-122"/>
-                <a:cs typeface="Calibri" pitchFamily="34" charset="-120"/>
+                <a:cs typeface="Times New Roman" panose="02020603050405020304" pitchFamily="18" charset="0"/>
               </a:rPr>
               <a:t>R²</a:t>
             </a:r>
-            <a:endParaRPr lang="en-US" sz="1000" dirty="0"/>
+            <a:endParaRPr lang="en-US" sz="1400" dirty="0">
+              <a:solidFill>
+                <a:schemeClr val="bg1"/>
+              </a:solidFill>
+              <a:latin typeface="Times New Roman" panose="02020603050405020304" pitchFamily="18" charset="0"/>
+              <a:cs typeface="Times New Roman" panose="02020603050405020304" pitchFamily="18" charset="0"/>
+            </a:endParaRPr>
           </a:p>
         </p:txBody>
       </p:sp>
@@ -7721,34 +8549,46 @@
               <a:buNone/>
             </a:pPr>
             <a:r>
-              <a:rPr lang="en-US" sz="1000" dirty="0">
-                <a:solidFill>
-                  <a:srgbClr val="94A3B8"/>
-                </a:solidFill>
-                <a:latin typeface="Calibri" pitchFamily="34" charset="0"/>
+              <a:rPr lang="en-US" sz="1200" dirty="0">
+                <a:solidFill>
+                  <a:schemeClr val="bg1"/>
+                </a:solidFill>
+                <a:latin typeface="Times New Roman" panose="02020603050405020304" pitchFamily="18" charset="0"/>
                 <a:ea typeface="Calibri" pitchFamily="34" charset="-122"/>
-                <a:cs typeface="Calibri" pitchFamily="34" charset="-120"/>
+                <a:cs typeface="Times New Roman" panose="02020603050405020304" pitchFamily="18" charset="0"/>
               </a:rPr>
               <a:t>Baseline — relation lineaire</a:t>
             </a:r>
-            <a:endParaRPr lang="en-US" sz="1000" dirty="0"/>
+            <a:endParaRPr lang="en-US" sz="1200" dirty="0">
+              <a:solidFill>
+                <a:schemeClr val="bg1"/>
+              </a:solidFill>
+              <a:latin typeface="Times New Roman" panose="02020603050405020304" pitchFamily="18" charset="0"/>
+              <a:cs typeface="Times New Roman" panose="02020603050405020304" pitchFamily="18" charset="0"/>
+            </a:endParaRPr>
           </a:p>
           <a:p>
             <a:pPr marL="0" indent="0" algn="ctr">
               <a:buNone/>
             </a:pPr>
             <a:r>
-              <a:rPr lang="en-US" sz="1000" dirty="0">
-                <a:solidFill>
-                  <a:srgbClr val="94A3B8"/>
-                </a:solidFill>
-                <a:latin typeface="Calibri" pitchFamily="34" charset="0"/>
+              <a:rPr lang="en-US" sz="1200" dirty="0">
+                <a:solidFill>
+                  <a:schemeClr val="bg1"/>
+                </a:solidFill>
+                <a:latin typeface="Times New Roman" panose="02020603050405020304" pitchFamily="18" charset="0"/>
                 <a:ea typeface="Calibri" pitchFamily="34" charset="-122"/>
-                <a:cs typeface="Calibri" pitchFamily="34" charset="-120"/>
+                <a:cs typeface="Times New Roman" panose="02020603050405020304" pitchFamily="18" charset="0"/>
               </a:rPr>
               <a:t>Simple mais limite</a:t>
             </a:r>
-            <a:endParaRPr lang="en-US" sz="1000" dirty="0"/>
+            <a:endParaRPr lang="en-US" sz="1200" dirty="0">
+              <a:solidFill>
+                <a:schemeClr val="bg1"/>
+              </a:solidFill>
+              <a:latin typeface="Times New Roman" panose="02020603050405020304" pitchFamily="18" charset="0"/>
+              <a:cs typeface="Times New Roman" panose="02020603050405020304" pitchFamily="18" charset="0"/>
+            </a:endParaRPr>
           </a:p>
         </p:txBody>
       </p:sp>
@@ -7779,7 +8619,11 @@
           <a:bodyPr/>
           <a:lstStyle/>
           <a:p>
-            <a:endParaRPr lang="fr-FR"/>
+            <a:endParaRPr lang="fr-FR" sz="2000">
+              <a:solidFill>
+                <a:schemeClr val="bg1"/>
+              </a:solidFill>
+            </a:endParaRPr>
           </a:p>
         </p:txBody>
       </p:sp>
@@ -7808,17 +8652,23 @@
               <a:buNone/>
             </a:pPr>
             <a:r>
-              <a:rPr lang="en-US" sz="1000" b="1" dirty="0">
-                <a:solidFill>
-                  <a:srgbClr val="94A3B8"/>
-                </a:solidFill>
-                <a:latin typeface="Calibri" pitchFamily="34" charset="0"/>
+              <a:rPr lang="en-US" sz="1200" b="1" dirty="0">
+                <a:solidFill>
+                  <a:schemeClr val="bg1"/>
+                </a:solidFill>
+                <a:latin typeface="Times New Roman" panose="02020603050405020304" pitchFamily="18" charset="0"/>
                 <a:ea typeface="Calibri" pitchFamily="34" charset="-122"/>
-                <a:cs typeface="Calibri" pitchFamily="34" charset="-120"/>
+                <a:cs typeface="Times New Roman" panose="02020603050405020304" pitchFamily="18" charset="0"/>
               </a:rPr>
               <a:t>Baseline</a:t>
             </a:r>
-            <a:endParaRPr lang="en-US" sz="1000" dirty="0"/>
+            <a:endParaRPr lang="en-US" sz="1200" dirty="0">
+              <a:solidFill>
+                <a:schemeClr val="bg1"/>
+              </a:solidFill>
+              <a:latin typeface="Times New Roman" panose="02020603050405020304" pitchFamily="18" charset="0"/>
+              <a:cs typeface="Times New Roman" panose="02020603050405020304" pitchFamily="18" charset="0"/>
+            </a:endParaRPr>
           </a:p>
         </p:txBody>
       </p:sp>
@@ -7885,13 +8735,16 @@
                 <a:solidFill>
                   <a:srgbClr val="FFFFFF"/>
                 </a:solidFill>
-                <a:latin typeface="Trebuchet MS" pitchFamily="34" charset="0"/>
+                <a:latin typeface="Times New Roman" panose="02020603050405020304" pitchFamily="18" charset="0"/>
                 <a:ea typeface="Trebuchet MS" pitchFamily="34" charset="-122"/>
-                <a:cs typeface="Trebuchet MS" pitchFamily="34" charset="-120"/>
+                <a:cs typeface="Times New Roman" panose="02020603050405020304" pitchFamily="18" charset="0"/>
               </a:rPr>
               <a:t>Random</a:t>
             </a:r>
-            <a:endParaRPr lang="en-US" sz="1400" dirty="0"/>
+            <a:endParaRPr lang="en-US" sz="1400" dirty="0">
+              <a:latin typeface="Times New Roman" panose="02020603050405020304" pitchFamily="18" charset="0"/>
+              <a:cs typeface="Times New Roman" panose="02020603050405020304" pitchFamily="18" charset="0"/>
+            </a:endParaRPr>
           </a:p>
           <a:p>
             <a:pPr marL="0" indent="0" algn="ctr">
@@ -7902,13 +8755,16 @@
                 <a:solidFill>
                   <a:srgbClr val="FFFFFF"/>
                 </a:solidFill>
-                <a:latin typeface="Trebuchet MS" pitchFamily="34" charset="0"/>
+                <a:latin typeface="Times New Roman" panose="02020603050405020304" pitchFamily="18" charset="0"/>
                 <a:ea typeface="Trebuchet MS" pitchFamily="34" charset="-122"/>
-                <a:cs typeface="Trebuchet MS" pitchFamily="34" charset="-120"/>
+                <a:cs typeface="Times New Roman" panose="02020603050405020304" pitchFamily="18" charset="0"/>
               </a:rPr>
               <a:t>Forest</a:t>
             </a:r>
-            <a:endParaRPr lang="en-US" sz="1400" dirty="0"/>
+            <a:endParaRPr lang="en-US" sz="1400" dirty="0">
+              <a:latin typeface="Times New Roman" panose="02020603050405020304" pitchFamily="18" charset="0"/>
+              <a:cs typeface="Times New Roman" panose="02020603050405020304" pitchFamily="18" charset="0"/>
+            </a:endParaRPr>
           </a:p>
         </p:txBody>
       </p:sp>
@@ -7941,13 +8797,16 @@
                 <a:solidFill>
                   <a:srgbClr val="4F8EF7"/>
                 </a:solidFill>
-                <a:latin typeface="Trebuchet MS" pitchFamily="34" charset="0"/>
+                <a:latin typeface="Times New Roman" panose="02020603050405020304" pitchFamily="18" charset="0"/>
                 <a:ea typeface="Trebuchet MS" pitchFamily="34" charset="-122"/>
-                <a:cs typeface="Trebuchet MS" pitchFamily="34" charset="-120"/>
+                <a:cs typeface="Times New Roman" panose="02020603050405020304" pitchFamily="18" charset="0"/>
               </a:rPr>
               <a:t>0.822</a:t>
             </a:r>
-            <a:endParaRPr lang="en-US" sz="3000" dirty="0"/>
+            <a:endParaRPr lang="en-US" sz="3000" dirty="0">
+              <a:latin typeface="Times New Roman" panose="02020603050405020304" pitchFamily="18" charset="0"/>
+              <a:cs typeface="Times New Roman" panose="02020603050405020304" pitchFamily="18" charset="0"/>
+            </a:endParaRPr>
           </a:p>
         </p:txBody>
       </p:sp>
@@ -7976,17 +8835,23 @@
               <a:buNone/>
             </a:pPr>
             <a:r>
-              <a:rPr lang="en-US" sz="1000" dirty="0">
-                <a:solidFill>
-                  <a:srgbClr val="94A3B8"/>
-                </a:solidFill>
-                <a:latin typeface="Calibri" pitchFamily="34" charset="0"/>
+              <a:rPr lang="en-US" sz="1200" dirty="0">
+                <a:solidFill>
+                  <a:schemeClr val="bg1"/>
+                </a:solidFill>
+                <a:latin typeface="Times New Roman" panose="02020603050405020304" pitchFamily="18" charset="0"/>
                 <a:ea typeface="Calibri" pitchFamily="34" charset="-122"/>
-                <a:cs typeface="Calibri" pitchFamily="34" charset="-120"/>
+                <a:cs typeface="Times New Roman" panose="02020603050405020304" pitchFamily="18" charset="0"/>
               </a:rPr>
               <a:t>R²</a:t>
             </a:r>
-            <a:endParaRPr lang="en-US" sz="1000" dirty="0"/>
+            <a:endParaRPr lang="en-US" sz="1200" dirty="0">
+              <a:solidFill>
+                <a:schemeClr val="bg1"/>
+              </a:solidFill>
+              <a:latin typeface="Times New Roman" panose="02020603050405020304" pitchFamily="18" charset="0"/>
+              <a:cs typeface="Times New Roman" panose="02020603050405020304" pitchFamily="18" charset="0"/>
+            </a:endParaRPr>
           </a:p>
         </p:txBody>
       </p:sp>
@@ -8045,34 +8910,46 @@
               <a:buNone/>
             </a:pPr>
             <a:r>
-              <a:rPr lang="en-US" sz="1000" dirty="0">
-                <a:solidFill>
-                  <a:srgbClr val="94A3B8"/>
-                </a:solidFill>
-                <a:latin typeface="Calibri" pitchFamily="34" charset="0"/>
+              <a:rPr lang="en-US" sz="1200" dirty="0">
+                <a:solidFill>
+                  <a:schemeClr val="bg1"/>
+                </a:solidFill>
+                <a:latin typeface="Times New Roman" panose="02020603050405020304" pitchFamily="18" charset="0"/>
                 <a:ea typeface="Calibri" pitchFamily="34" charset="-122"/>
-                <a:cs typeface="Calibri" pitchFamily="34" charset="-120"/>
+                <a:cs typeface="Times New Roman" panose="02020603050405020304" pitchFamily="18" charset="0"/>
               </a:rPr>
               <a:t>Ensemble 100 arbres</a:t>
             </a:r>
-            <a:endParaRPr lang="en-US" sz="1000" dirty="0"/>
+            <a:endParaRPr lang="en-US" sz="1200" dirty="0">
+              <a:solidFill>
+                <a:schemeClr val="bg1"/>
+              </a:solidFill>
+              <a:latin typeface="Times New Roman" panose="02020603050405020304" pitchFamily="18" charset="0"/>
+              <a:cs typeface="Times New Roman" panose="02020603050405020304" pitchFamily="18" charset="0"/>
+            </a:endParaRPr>
           </a:p>
           <a:p>
             <a:pPr marL="0" indent="0" algn="ctr">
               <a:buNone/>
             </a:pPr>
             <a:r>
-              <a:rPr lang="en-US" sz="1000" dirty="0">
-                <a:solidFill>
-                  <a:srgbClr val="94A3B8"/>
-                </a:solidFill>
-                <a:latin typeface="Calibri" pitchFamily="34" charset="0"/>
+              <a:rPr lang="en-US" sz="1200" dirty="0">
+                <a:solidFill>
+                  <a:schemeClr val="bg1"/>
+                </a:solidFill>
+                <a:latin typeface="Times New Roman" panose="02020603050405020304" pitchFamily="18" charset="0"/>
                 <a:ea typeface="Calibri" pitchFamily="34" charset="-122"/>
-                <a:cs typeface="Calibri" pitchFamily="34" charset="-120"/>
+                <a:cs typeface="Times New Roman" panose="02020603050405020304" pitchFamily="18" charset="0"/>
               </a:rPr>
               <a:t>Robuste au bruit</a:t>
             </a:r>
-            <a:endParaRPr lang="en-US" sz="1000" dirty="0"/>
+            <a:endParaRPr lang="en-US" sz="1200" dirty="0">
+              <a:solidFill>
+                <a:schemeClr val="bg1"/>
+              </a:solidFill>
+              <a:latin typeface="Times New Roman" panose="02020603050405020304" pitchFamily="18" charset="0"/>
+              <a:cs typeface="Times New Roman" panose="02020603050405020304" pitchFamily="18" charset="0"/>
+            </a:endParaRPr>
           </a:p>
         </p:txBody>
       </p:sp>
@@ -8132,17 +9009,20 @@
               <a:buNone/>
             </a:pPr>
             <a:r>
-              <a:rPr lang="en-US" sz="1000" b="1" dirty="0">
+              <a:rPr lang="en-US" sz="1200" b="1" dirty="0">
                 <a:solidFill>
                   <a:srgbClr val="4F8EF7"/>
                 </a:solidFill>
-                <a:latin typeface="Calibri" pitchFamily="34" charset="0"/>
+                <a:latin typeface="Times New Roman" panose="02020603050405020304" pitchFamily="18" charset="0"/>
                 <a:ea typeface="Calibri" pitchFamily="34" charset="-122"/>
-                <a:cs typeface="Calibri" pitchFamily="34" charset="-120"/>
+                <a:cs typeface="Times New Roman" panose="02020603050405020304" pitchFamily="18" charset="0"/>
               </a:rPr>
               <a:t>Tres bon</a:t>
             </a:r>
-            <a:endParaRPr lang="en-US" sz="1000" dirty="0"/>
+            <a:endParaRPr lang="en-US" sz="1200" dirty="0">
+              <a:latin typeface="Times New Roman" panose="02020603050405020304" pitchFamily="18" charset="0"/>
+              <a:cs typeface="Times New Roman" panose="02020603050405020304" pitchFamily="18" charset="0"/>
+            </a:endParaRPr>
           </a:p>
         </p:txBody>
       </p:sp>
@@ -8207,68 +9087,80 @@
             <a:r>
               <a:rPr lang="en-US" sz="1400" b="1" dirty="0">
                 <a:solidFill>
-                  <a:srgbClr val="FFFFFF"/>
+                  <a:schemeClr val="bg1"/>
+                </a:solidFill>
+                <a:latin typeface="Times New Roman" panose="02020603050405020304" pitchFamily="18" charset="0"/>
+                <a:ea typeface="Trebuchet MS" pitchFamily="34" charset="-122"/>
+                <a:cs typeface="Times New Roman" panose="02020603050405020304" pitchFamily="18" charset="0"/>
+              </a:rPr>
+              <a:t>Gradient</a:t>
+            </a:r>
+            <a:endParaRPr lang="en-US" sz="1400" dirty="0">
+              <a:solidFill>
+                <a:schemeClr val="bg1"/>
+              </a:solidFill>
+              <a:latin typeface="Times New Roman" panose="02020603050405020304" pitchFamily="18" charset="0"/>
+              <a:cs typeface="Times New Roman" panose="02020603050405020304" pitchFamily="18" charset="0"/>
+            </a:endParaRPr>
+          </a:p>
+          <a:p>
+            <a:pPr marL="0" indent="0" algn="ctr">
+              <a:buNone/>
+            </a:pPr>
+            <a:r>
+              <a:rPr lang="en-US" sz="1400" b="1" dirty="0">
+                <a:solidFill>
+                  <a:schemeClr val="bg1"/>
+                </a:solidFill>
+                <a:latin typeface="Times New Roman" panose="02020603050405020304" pitchFamily="18" charset="0"/>
+                <a:ea typeface="Trebuchet MS" pitchFamily="34" charset="-122"/>
+                <a:cs typeface="Times New Roman" panose="02020603050405020304" pitchFamily="18" charset="0"/>
+              </a:rPr>
+              <a:t>Boosting</a:t>
+            </a:r>
+            <a:endParaRPr lang="en-US" sz="1400" dirty="0">
+              <a:solidFill>
+                <a:schemeClr val="bg1"/>
+              </a:solidFill>
+              <a:latin typeface="Times New Roman" panose="02020603050405020304" pitchFamily="18" charset="0"/>
+              <a:cs typeface="Times New Roman" panose="02020603050405020304" pitchFamily="18" charset="0"/>
+            </a:endParaRPr>
+          </a:p>
+        </p:txBody>
+      </p:sp>
+      <p:sp>
+        <p:nvSpPr>
+          <p:cNvPr id="23" name="Text 21"/>
+          <p:cNvSpPr/>
+          <p:nvPr/>
+        </p:nvSpPr>
+        <p:spPr>
+          <a:xfrm>
+            <a:off x="5120640" y="2011680"/>
+            <a:ext cx="1828800" cy="777240"/>
+          </a:xfrm>
+          <a:prstGeom prst="rect">
+            <a:avLst/>
+          </a:prstGeom>
+          <a:noFill/>
+          <a:ln/>
+        </p:spPr>
+        <p:txBody>
+          <a:bodyPr wrap="square" rtlCol="0" anchor="ctr"/>
+          <a:lstStyle/>
+          <a:p>
+            <a:pPr marL="0" indent="0" algn="ctr">
+              <a:buNone/>
+            </a:pPr>
+            <a:r>
+              <a:rPr lang="en-US" sz="3000" b="1" dirty="0">
+                <a:solidFill>
+                  <a:srgbClr val="22D3EE"/>
                 </a:solidFill>
                 <a:latin typeface="Trebuchet MS" pitchFamily="34" charset="0"/>
                 <a:ea typeface="Trebuchet MS" pitchFamily="34" charset="-122"/>
                 <a:cs typeface="Trebuchet MS" pitchFamily="34" charset="-120"/>
               </a:rPr>
-              <a:t>Gradient</a:t>
-            </a:r>
-            <a:endParaRPr lang="en-US" sz="1400" dirty="0"/>
-          </a:p>
-          <a:p>
-            <a:pPr marL="0" indent="0" algn="ctr">
-              <a:buNone/>
-            </a:pPr>
-            <a:r>
-              <a:rPr lang="en-US" sz="1400" b="1" dirty="0">
-                <a:solidFill>
-                  <a:srgbClr val="FFFFFF"/>
-                </a:solidFill>
-                <a:latin typeface="Trebuchet MS" pitchFamily="34" charset="0"/>
-                <a:ea typeface="Trebuchet MS" pitchFamily="34" charset="-122"/>
-                <a:cs typeface="Trebuchet MS" pitchFamily="34" charset="-120"/>
-              </a:rPr>
-              <a:t>Boosting</a:t>
-            </a:r>
-            <a:endParaRPr lang="en-US" sz="1400" dirty="0"/>
-          </a:p>
-        </p:txBody>
-      </p:sp>
-      <p:sp>
-        <p:nvSpPr>
-          <p:cNvPr id="23" name="Text 21"/>
-          <p:cNvSpPr/>
-          <p:nvPr/>
-        </p:nvSpPr>
-        <p:spPr>
-          <a:xfrm>
-            <a:off x="5120640" y="2011680"/>
-            <a:ext cx="1828800" cy="777240"/>
-          </a:xfrm>
-          <a:prstGeom prst="rect">
-            <a:avLst/>
-          </a:prstGeom>
-          <a:noFill/>
-          <a:ln/>
-        </p:spPr>
-        <p:txBody>
-          <a:bodyPr wrap="square" rtlCol="0" anchor="ctr"/>
-          <a:lstStyle/>
-          <a:p>
-            <a:pPr marL="0" indent="0" algn="ctr">
-              <a:buNone/>
-            </a:pPr>
-            <a:r>
-              <a:rPr lang="en-US" sz="3000" b="1" dirty="0">
-                <a:solidFill>
-                  <a:srgbClr val="22D3EE"/>
-                </a:solidFill>
-                <a:latin typeface="Trebuchet MS" pitchFamily="34" charset="0"/>
-                <a:ea typeface="Trebuchet MS" pitchFamily="34" charset="-122"/>
-                <a:cs typeface="Trebuchet MS" pitchFamily="34" charset="-120"/>
-              </a:rPr>
               <a:t>0.844</a:t>
             </a:r>
             <a:endParaRPr lang="en-US" sz="3000" dirty="0"/>
@@ -8300,17 +9192,23 @@
               <a:buNone/>
             </a:pPr>
             <a:r>
-              <a:rPr lang="en-US" sz="1000" dirty="0">
-                <a:solidFill>
-                  <a:srgbClr val="94A3B8"/>
-                </a:solidFill>
-                <a:latin typeface="Calibri" pitchFamily="34" charset="0"/>
+              <a:rPr lang="en-US" sz="1200" dirty="0">
+                <a:solidFill>
+                  <a:schemeClr val="bg1"/>
+                </a:solidFill>
+                <a:latin typeface="Times New Roman" panose="02020603050405020304" pitchFamily="18" charset="0"/>
                 <a:ea typeface="Calibri" pitchFamily="34" charset="-122"/>
-                <a:cs typeface="Calibri" pitchFamily="34" charset="-120"/>
+                <a:cs typeface="Times New Roman" panose="02020603050405020304" pitchFamily="18" charset="0"/>
               </a:rPr>
               <a:t>R²</a:t>
             </a:r>
-            <a:endParaRPr lang="en-US" sz="1000" dirty="0"/>
+            <a:endParaRPr lang="en-US" sz="1200" dirty="0">
+              <a:solidFill>
+                <a:schemeClr val="bg1"/>
+              </a:solidFill>
+              <a:latin typeface="Times New Roman" panose="02020603050405020304" pitchFamily="18" charset="0"/>
+              <a:cs typeface="Times New Roman" panose="02020603050405020304" pitchFamily="18" charset="0"/>
+            </a:endParaRPr>
           </a:p>
         </p:txBody>
       </p:sp>
@@ -8369,34 +9267,46 @@
               <a:buNone/>
             </a:pPr>
             <a:r>
-              <a:rPr lang="en-US" sz="1000" dirty="0">
-                <a:solidFill>
-                  <a:srgbClr val="94A3B8"/>
-                </a:solidFill>
-                <a:latin typeface="Calibri" pitchFamily="34" charset="0"/>
+              <a:rPr lang="en-US" sz="1200" dirty="0">
+                <a:solidFill>
+                  <a:schemeClr val="bg1"/>
+                </a:solidFill>
+                <a:latin typeface="Times New Roman" panose="02020603050405020304" pitchFamily="18" charset="0"/>
                 <a:ea typeface="Calibri" pitchFamily="34" charset="-122"/>
-                <a:cs typeface="Calibri" pitchFamily="34" charset="-120"/>
+                <a:cs typeface="Times New Roman" panose="02020603050405020304" pitchFamily="18" charset="0"/>
               </a:rPr>
               <a:t>Apprentissage sequentiel</a:t>
             </a:r>
-            <a:endParaRPr lang="en-US" sz="1000" dirty="0"/>
+            <a:endParaRPr lang="en-US" sz="1200" dirty="0">
+              <a:solidFill>
+                <a:schemeClr val="bg1"/>
+              </a:solidFill>
+              <a:latin typeface="Times New Roman" panose="02020603050405020304" pitchFamily="18" charset="0"/>
+              <a:cs typeface="Times New Roman" panose="02020603050405020304" pitchFamily="18" charset="0"/>
+            </a:endParaRPr>
           </a:p>
           <a:p>
             <a:pPr marL="0" indent="0" algn="ctr">
               <a:buNone/>
             </a:pPr>
             <a:r>
-              <a:rPr lang="en-US" sz="1000" dirty="0">
-                <a:solidFill>
-                  <a:srgbClr val="94A3B8"/>
-                </a:solidFill>
-                <a:latin typeface="Calibri" pitchFamily="34" charset="0"/>
+              <a:rPr lang="en-US" sz="1200" dirty="0">
+                <a:solidFill>
+                  <a:schemeClr val="bg1"/>
+                </a:solidFill>
+                <a:latin typeface="Times New Roman" panose="02020603050405020304" pitchFamily="18" charset="0"/>
                 <a:ea typeface="Calibri" pitchFamily="34" charset="-122"/>
-                <a:cs typeface="Calibri" pitchFamily="34" charset="-120"/>
+                <a:cs typeface="Times New Roman" panose="02020603050405020304" pitchFamily="18" charset="0"/>
               </a:rPr>
               <a:t>Correction des erreurs</a:t>
             </a:r>
-            <a:endParaRPr lang="en-US" sz="1000" dirty="0"/>
+            <a:endParaRPr lang="en-US" sz="1200" dirty="0">
+              <a:solidFill>
+                <a:schemeClr val="bg1"/>
+              </a:solidFill>
+              <a:latin typeface="Times New Roman" panose="02020603050405020304" pitchFamily="18" charset="0"/>
+              <a:cs typeface="Times New Roman" panose="02020603050405020304" pitchFamily="18" charset="0"/>
+            </a:endParaRPr>
           </a:p>
         </p:txBody>
       </p:sp>
@@ -8456,6 +9366,17 @@
               <a:buNone/>
             </a:pPr>
             <a:r>
+              <a:rPr lang="en-US" sz="1200" b="1" dirty="0">
+                <a:solidFill>
+                  <a:srgbClr val="22D3EE"/>
+                </a:solidFill>
+                <a:latin typeface="Times New Roman" panose="02020603050405020304" pitchFamily="18" charset="0"/>
+                <a:ea typeface="Calibri" pitchFamily="34" charset="-122"/>
+                <a:cs typeface="Times New Roman" panose="02020603050405020304" pitchFamily="18" charset="0"/>
+              </a:rPr>
+              <a:t>Excellen</a:t>
+            </a:r>
+            <a:r>
               <a:rPr lang="en-US" sz="1000" b="1" dirty="0">
                 <a:solidFill>
                   <a:srgbClr val="22D3EE"/>
@@ -8464,7 +9385,7 @@
                 <a:ea typeface="Calibri" pitchFamily="34" charset="-122"/>
                 <a:cs typeface="Calibri" pitchFamily="34" charset="-120"/>
               </a:rPr>
-              <a:t>Excellent</a:t>
+              <a:t>t</a:t>
             </a:r>
             <a:endParaRPr lang="en-US" sz="1000" dirty="0"/>
           </a:p>
@@ -8558,17 +9479,20 @@
               <a:buNone/>
             </a:pPr>
             <a:r>
-              <a:rPr lang="en-US" sz="1000" b="1" dirty="0">
+              <a:rPr lang="en-US" sz="1200" b="1" dirty="0">
                 <a:solidFill>
                   <a:srgbClr val="000000"/>
                 </a:solidFill>
-                <a:latin typeface="Calibri" pitchFamily="34" charset="0"/>
+                <a:latin typeface="Times New Roman" panose="02020603050405020304" pitchFamily="18" charset="0"/>
                 <a:ea typeface="Calibri" pitchFamily="34" charset="-122"/>
-                <a:cs typeface="Calibri" pitchFamily="34" charset="-120"/>
+                <a:cs typeface="Times New Roman" panose="02020603050405020304" pitchFamily="18" charset="0"/>
               </a:rPr>
               <a:t>★ MEILLEUR</a:t>
             </a:r>
-            <a:endParaRPr lang="en-US" sz="1000" dirty="0"/>
+            <a:endParaRPr lang="en-US" sz="1200" dirty="0">
+              <a:latin typeface="Times New Roman" panose="02020603050405020304" pitchFamily="18" charset="0"/>
+              <a:cs typeface="Times New Roman" panose="02020603050405020304" pitchFamily="18" charset="0"/>
+            </a:endParaRPr>
           </a:p>
         </p:txBody>
       </p:sp>
@@ -8599,68 +9523,80 @@
             <a:r>
               <a:rPr lang="en-US" sz="1400" b="1" dirty="0">
                 <a:solidFill>
-                  <a:srgbClr val="FFFFFF"/>
+                  <a:schemeClr val="bg1"/>
+                </a:solidFill>
+                <a:latin typeface="Times New Roman" panose="02020603050405020304" pitchFamily="18" charset="0"/>
+                <a:ea typeface="Trebuchet MS" pitchFamily="34" charset="-122"/>
+                <a:cs typeface="Times New Roman" panose="02020603050405020304" pitchFamily="18" charset="0"/>
+              </a:rPr>
+              <a:t>XGBoost</a:t>
+            </a:r>
+            <a:endParaRPr lang="en-US" sz="1400" dirty="0">
+              <a:solidFill>
+                <a:schemeClr val="bg1"/>
+              </a:solidFill>
+              <a:latin typeface="Times New Roman" panose="02020603050405020304" pitchFamily="18" charset="0"/>
+              <a:cs typeface="Times New Roman" panose="02020603050405020304" pitchFamily="18" charset="0"/>
+            </a:endParaRPr>
+          </a:p>
+          <a:p>
+            <a:pPr marL="0" indent="0" algn="ctr">
+              <a:buNone/>
+            </a:pPr>
+            <a:r>
+              <a:rPr lang="en-US" sz="1400" b="1" dirty="0">
+                <a:solidFill>
+                  <a:schemeClr val="bg1"/>
+                </a:solidFill>
+                <a:latin typeface="Times New Roman" panose="02020603050405020304" pitchFamily="18" charset="0"/>
+                <a:ea typeface="Trebuchet MS" pitchFamily="34" charset="-122"/>
+                <a:cs typeface="Times New Roman" panose="02020603050405020304" pitchFamily="18" charset="0"/>
+              </a:rPr>
+              <a:t>Tune</a:t>
+            </a:r>
+            <a:endParaRPr lang="en-US" sz="1400" dirty="0">
+              <a:solidFill>
+                <a:schemeClr val="bg1"/>
+              </a:solidFill>
+              <a:latin typeface="Times New Roman" panose="02020603050405020304" pitchFamily="18" charset="0"/>
+              <a:cs typeface="Times New Roman" panose="02020603050405020304" pitchFamily="18" charset="0"/>
+            </a:endParaRPr>
+          </a:p>
+        </p:txBody>
+      </p:sp>
+      <p:sp>
+        <p:nvSpPr>
+          <p:cNvPr id="33" name="Text 31"/>
+          <p:cNvSpPr/>
+          <p:nvPr/>
+        </p:nvSpPr>
+        <p:spPr>
+          <a:xfrm>
+            <a:off x="7452360" y="2377440"/>
+            <a:ext cx="1828800" cy="777240"/>
+          </a:xfrm>
+          <a:prstGeom prst="rect">
+            <a:avLst/>
+          </a:prstGeom>
+          <a:noFill/>
+          <a:ln/>
+        </p:spPr>
+        <p:txBody>
+          <a:bodyPr wrap="square" rtlCol="0" anchor="ctr"/>
+          <a:lstStyle/>
+          <a:p>
+            <a:pPr marL="0" indent="0" algn="ctr">
+              <a:buNone/>
+            </a:pPr>
+            <a:r>
+              <a:rPr lang="en-US" sz="3000" b="1" dirty="0">
+                <a:solidFill>
+                  <a:srgbClr val="34D399"/>
                 </a:solidFill>
                 <a:latin typeface="Trebuchet MS" pitchFamily="34" charset="0"/>
                 <a:ea typeface="Trebuchet MS" pitchFamily="34" charset="-122"/>
                 <a:cs typeface="Trebuchet MS" pitchFamily="34" charset="-120"/>
               </a:rPr>
-              <a:t>XGBoost</a:t>
-            </a:r>
-            <a:endParaRPr lang="en-US" sz="1400" dirty="0"/>
-          </a:p>
-          <a:p>
-            <a:pPr marL="0" indent="0" algn="ctr">
-              <a:buNone/>
-            </a:pPr>
-            <a:r>
-              <a:rPr lang="en-US" sz="1400" b="1" dirty="0">
-                <a:solidFill>
-                  <a:srgbClr val="FFFFFF"/>
-                </a:solidFill>
-                <a:latin typeface="Trebuchet MS" pitchFamily="34" charset="0"/>
-                <a:ea typeface="Trebuchet MS" pitchFamily="34" charset="-122"/>
-                <a:cs typeface="Trebuchet MS" pitchFamily="34" charset="-120"/>
-              </a:rPr>
-              <a:t>Tune</a:t>
-            </a:r>
-            <a:endParaRPr lang="en-US" sz="1400" dirty="0"/>
-          </a:p>
-        </p:txBody>
-      </p:sp>
-      <p:sp>
-        <p:nvSpPr>
-          <p:cNvPr id="33" name="Text 31"/>
-          <p:cNvSpPr/>
-          <p:nvPr/>
-        </p:nvSpPr>
-        <p:spPr>
-          <a:xfrm>
-            <a:off x="7452360" y="2377440"/>
-            <a:ext cx="1828800" cy="777240"/>
-          </a:xfrm>
-          <a:prstGeom prst="rect">
-            <a:avLst/>
-          </a:prstGeom>
-          <a:noFill/>
-          <a:ln/>
-        </p:spPr>
-        <p:txBody>
-          <a:bodyPr wrap="square" rtlCol="0" anchor="ctr"/>
-          <a:lstStyle/>
-          <a:p>
-            <a:pPr marL="0" indent="0" algn="ctr">
-              <a:buNone/>
-            </a:pPr>
-            <a:r>
-              <a:rPr lang="en-US" sz="3000" b="1" dirty="0">
-                <a:solidFill>
-                  <a:srgbClr val="34D399"/>
-                </a:solidFill>
-                <a:latin typeface="Trebuchet MS" pitchFamily="34" charset="0"/>
-                <a:ea typeface="Trebuchet MS" pitchFamily="34" charset="-122"/>
-                <a:cs typeface="Trebuchet MS" pitchFamily="34" charset="-120"/>
-              </a:rPr>
               <a:t>0.850</a:t>
             </a:r>
             <a:endParaRPr lang="en-US" sz="3000" dirty="0"/>
@@ -8692,17 +9628,23 @@
               <a:buNone/>
             </a:pPr>
             <a:r>
-              <a:rPr lang="en-US" sz="1000" dirty="0">
-                <a:solidFill>
-                  <a:srgbClr val="94A3B8"/>
-                </a:solidFill>
-                <a:latin typeface="Calibri" pitchFamily="34" charset="0"/>
+              <a:rPr lang="en-US" sz="1200" dirty="0">
+                <a:solidFill>
+                  <a:schemeClr val="bg1"/>
+                </a:solidFill>
+                <a:latin typeface="Times New Roman" panose="02020603050405020304" pitchFamily="18" charset="0"/>
                 <a:ea typeface="Calibri" pitchFamily="34" charset="-122"/>
-                <a:cs typeface="Calibri" pitchFamily="34" charset="-120"/>
+                <a:cs typeface="Times New Roman" panose="02020603050405020304" pitchFamily="18" charset="0"/>
               </a:rPr>
               <a:t>R²</a:t>
             </a:r>
-            <a:endParaRPr lang="en-US" sz="1000" dirty="0"/>
+            <a:endParaRPr lang="en-US" sz="1200" dirty="0">
+              <a:solidFill>
+                <a:schemeClr val="bg1"/>
+              </a:solidFill>
+              <a:latin typeface="Times New Roman" panose="02020603050405020304" pitchFamily="18" charset="0"/>
+              <a:cs typeface="Times New Roman" panose="02020603050405020304" pitchFamily="18" charset="0"/>
+            </a:endParaRPr>
           </a:p>
         </p:txBody>
       </p:sp>
@@ -8761,34 +9703,46 @@
               <a:buNone/>
             </a:pPr>
             <a:r>
-              <a:rPr lang="en-US" sz="1000" dirty="0">
-                <a:solidFill>
-                  <a:srgbClr val="94A3B8"/>
-                </a:solidFill>
-                <a:latin typeface="Calibri" pitchFamily="34" charset="0"/>
+              <a:rPr lang="en-US" sz="1200" dirty="0">
+                <a:solidFill>
+                  <a:schemeClr val="bg1"/>
+                </a:solidFill>
+                <a:latin typeface="Times New Roman" panose="02020603050405020304" pitchFamily="18" charset="0"/>
                 <a:ea typeface="Calibri" pitchFamily="34" charset="-122"/>
-                <a:cs typeface="Calibri" pitchFamily="34" charset="-120"/>
+                <a:cs typeface="Times New Roman" panose="02020603050405020304" pitchFamily="18" charset="0"/>
               </a:rPr>
               <a:t>GridSearchCV tuning</a:t>
             </a:r>
-            <a:endParaRPr lang="en-US" sz="1000" dirty="0"/>
+            <a:endParaRPr lang="en-US" sz="1200" dirty="0">
+              <a:solidFill>
+                <a:schemeClr val="bg1"/>
+              </a:solidFill>
+              <a:latin typeface="Times New Roman" panose="02020603050405020304" pitchFamily="18" charset="0"/>
+              <a:cs typeface="Times New Roman" panose="02020603050405020304" pitchFamily="18" charset="0"/>
+            </a:endParaRPr>
           </a:p>
           <a:p>
             <a:pPr marL="0" indent="0" algn="ctr">
               <a:buNone/>
             </a:pPr>
             <a:r>
-              <a:rPr lang="en-US" sz="1000" dirty="0">
-                <a:solidFill>
-                  <a:srgbClr val="94A3B8"/>
-                </a:solidFill>
-                <a:latin typeface="Calibri" pitchFamily="34" charset="0"/>
+              <a:rPr lang="en-US" sz="1200" dirty="0">
+                <a:solidFill>
+                  <a:schemeClr val="bg1"/>
+                </a:solidFill>
+                <a:latin typeface="Times New Roman" panose="02020603050405020304" pitchFamily="18" charset="0"/>
                 <a:ea typeface="Calibri" pitchFamily="34" charset="-122"/>
-                <a:cs typeface="Calibri" pitchFamily="34" charset="-120"/>
+                <a:cs typeface="Times New Roman" panose="02020603050405020304" pitchFamily="18" charset="0"/>
               </a:rPr>
               <a:t>Meilleur modele</a:t>
             </a:r>
-            <a:endParaRPr lang="en-US" sz="1000" dirty="0"/>
+            <a:endParaRPr lang="en-US" sz="1200" dirty="0">
+              <a:solidFill>
+                <a:schemeClr val="bg1"/>
+              </a:solidFill>
+              <a:latin typeface="Times New Roman" panose="02020603050405020304" pitchFamily="18" charset="0"/>
+              <a:cs typeface="Times New Roman" panose="02020603050405020304" pitchFamily="18" charset="0"/>
+            </a:endParaRPr>
           </a:p>
         </p:txBody>
       </p:sp>
@@ -8848,17 +9802,20 @@
               <a:buNone/>
             </a:pPr>
             <a:r>
-              <a:rPr lang="en-US" sz="1000" b="1" dirty="0">
+              <a:rPr lang="en-US" sz="1200" b="1" dirty="0">
                 <a:solidFill>
                   <a:srgbClr val="34D399"/>
                 </a:solidFill>
-                <a:latin typeface="Calibri" pitchFamily="34" charset="0"/>
+                <a:latin typeface="Times New Roman" panose="02020603050405020304" pitchFamily="18" charset="0"/>
                 <a:ea typeface="Calibri" pitchFamily="34" charset="-122"/>
-                <a:cs typeface="Calibri" pitchFamily="34" charset="-120"/>
+                <a:cs typeface="Times New Roman" panose="02020603050405020304" pitchFamily="18" charset="0"/>
               </a:rPr>
               <a:t>MEILLEUR</a:t>
             </a:r>
-            <a:endParaRPr lang="en-US" sz="1000" dirty="0"/>
+            <a:endParaRPr lang="en-US" sz="1200" dirty="0">
+              <a:latin typeface="Times New Roman" panose="02020603050405020304" pitchFamily="18" charset="0"/>
+              <a:cs typeface="Times New Roman" panose="02020603050405020304" pitchFamily="18" charset="0"/>
+            </a:endParaRPr>
           </a:p>
         </p:txBody>
       </p:sp>
@@ -8923,68 +9880,80 @@
             <a:r>
               <a:rPr lang="en-US" sz="1400" b="1" dirty="0">
                 <a:solidFill>
-                  <a:srgbClr val="FFFFFF"/>
+                  <a:schemeClr val="bg1"/>
+                </a:solidFill>
+                <a:latin typeface="Times New Roman" panose="02020603050405020304" pitchFamily="18" charset="0"/>
+                <a:ea typeface="Trebuchet MS" pitchFamily="34" charset="-122"/>
+                <a:cs typeface="Times New Roman" panose="02020603050405020304" pitchFamily="18" charset="0"/>
+              </a:rPr>
+              <a:t>SVR</a:t>
+            </a:r>
+            <a:endParaRPr lang="en-US" sz="1400" dirty="0">
+              <a:solidFill>
+                <a:schemeClr val="bg1"/>
+              </a:solidFill>
+              <a:latin typeface="Times New Roman" panose="02020603050405020304" pitchFamily="18" charset="0"/>
+              <a:cs typeface="Times New Roman" panose="02020603050405020304" pitchFamily="18" charset="0"/>
+            </a:endParaRPr>
+          </a:p>
+          <a:p>
+            <a:pPr marL="0" indent="0" algn="ctr">
+              <a:buNone/>
+            </a:pPr>
+            <a:r>
+              <a:rPr lang="en-US" sz="1400" b="1" dirty="0">
+                <a:solidFill>
+                  <a:schemeClr val="bg1"/>
+                </a:solidFill>
+                <a:latin typeface="Times New Roman" panose="02020603050405020304" pitchFamily="18" charset="0"/>
+                <a:ea typeface="Trebuchet MS" pitchFamily="34" charset="-122"/>
+                <a:cs typeface="Times New Roman" panose="02020603050405020304" pitchFamily="18" charset="0"/>
+              </a:rPr>
+              <a:t>(RBF)</a:t>
+            </a:r>
+            <a:endParaRPr lang="en-US" sz="1400" dirty="0">
+              <a:solidFill>
+                <a:schemeClr val="bg1"/>
+              </a:solidFill>
+              <a:latin typeface="Times New Roman" panose="02020603050405020304" pitchFamily="18" charset="0"/>
+              <a:cs typeface="Times New Roman" panose="02020603050405020304" pitchFamily="18" charset="0"/>
+            </a:endParaRPr>
+          </a:p>
+        </p:txBody>
+      </p:sp>
+      <p:sp>
+        <p:nvSpPr>
+          <p:cNvPr id="41" name="Text 39"/>
+          <p:cNvSpPr/>
+          <p:nvPr/>
+        </p:nvSpPr>
+        <p:spPr>
+          <a:xfrm>
+            <a:off x="9784080" y="2011680"/>
+            <a:ext cx="1828800" cy="777240"/>
+          </a:xfrm>
+          <a:prstGeom prst="rect">
+            <a:avLst/>
+          </a:prstGeom>
+          <a:noFill/>
+          <a:ln/>
+        </p:spPr>
+        <p:txBody>
+          <a:bodyPr wrap="square" rtlCol="0" anchor="ctr"/>
+          <a:lstStyle/>
+          <a:p>
+            <a:pPr marL="0" indent="0" algn="ctr">
+              <a:buNone/>
+            </a:pPr>
+            <a:r>
+              <a:rPr lang="en-US" sz="3000" b="1" dirty="0">
+                <a:solidFill>
+                  <a:srgbClr val="FBBF24"/>
                 </a:solidFill>
                 <a:latin typeface="Trebuchet MS" pitchFamily="34" charset="0"/>
                 <a:ea typeface="Trebuchet MS" pitchFamily="34" charset="-122"/>
                 <a:cs typeface="Trebuchet MS" pitchFamily="34" charset="-120"/>
               </a:rPr>
-              <a:t>SVR</a:t>
-            </a:r>
-            <a:endParaRPr lang="en-US" sz="1400" dirty="0"/>
-          </a:p>
-          <a:p>
-            <a:pPr marL="0" indent="0" algn="ctr">
-              <a:buNone/>
-            </a:pPr>
-            <a:r>
-              <a:rPr lang="en-US" sz="1400" b="1" dirty="0">
-                <a:solidFill>
-                  <a:srgbClr val="FFFFFF"/>
-                </a:solidFill>
-                <a:latin typeface="Trebuchet MS" pitchFamily="34" charset="0"/>
-                <a:ea typeface="Trebuchet MS" pitchFamily="34" charset="-122"/>
-                <a:cs typeface="Trebuchet MS" pitchFamily="34" charset="-120"/>
-              </a:rPr>
-              <a:t>(RBF)</a:t>
-            </a:r>
-            <a:endParaRPr lang="en-US" sz="1400" dirty="0"/>
-          </a:p>
-        </p:txBody>
-      </p:sp>
-      <p:sp>
-        <p:nvSpPr>
-          <p:cNvPr id="41" name="Text 39"/>
-          <p:cNvSpPr/>
-          <p:nvPr/>
-        </p:nvSpPr>
-        <p:spPr>
-          <a:xfrm>
-            <a:off x="9784080" y="2011680"/>
-            <a:ext cx="1828800" cy="777240"/>
-          </a:xfrm>
-          <a:prstGeom prst="rect">
-            <a:avLst/>
-          </a:prstGeom>
-          <a:noFill/>
-          <a:ln/>
-        </p:spPr>
-        <p:txBody>
-          <a:bodyPr wrap="square" rtlCol="0" anchor="ctr"/>
-          <a:lstStyle/>
-          <a:p>
-            <a:pPr marL="0" indent="0" algn="ctr">
-              <a:buNone/>
-            </a:pPr>
-            <a:r>
-              <a:rPr lang="en-US" sz="3000" b="1" dirty="0">
-                <a:solidFill>
-                  <a:srgbClr val="FBBF24"/>
-                </a:solidFill>
-                <a:latin typeface="Trebuchet MS" pitchFamily="34" charset="0"/>
-                <a:ea typeface="Trebuchet MS" pitchFamily="34" charset="-122"/>
-                <a:cs typeface="Trebuchet MS" pitchFamily="34" charset="-120"/>
-              </a:rPr>
               <a:t>0.807</a:t>
             </a:r>
             <a:endParaRPr lang="en-US" sz="3000" dirty="0"/>
@@ -9016,17 +9985,23 @@
               <a:buNone/>
             </a:pPr>
             <a:r>
-              <a:rPr lang="en-US" sz="1000" dirty="0">
-                <a:solidFill>
-                  <a:srgbClr val="94A3B8"/>
-                </a:solidFill>
-                <a:latin typeface="Calibri" pitchFamily="34" charset="0"/>
+              <a:rPr lang="en-US" sz="1200" dirty="0">
+                <a:solidFill>
+                  <a:schemeClr val="bg1"/>
+                </a:solidFill>
+                <a:latin typeface="Times New Roman" panose="02020603050405020304" pitchFamily="18" charset="0"/>
                 <a:ea typeface="Calibri" pitchFamily="34" charset="-122"/>
-                <a:cs typeface="Calibri" pitchFamily="34" charset="-120"/>
+                <a:cs typeface="Times New Roman" panose="02020603050405020304" pitchFamily="18" charset="0"/>
               </a:rPr>
               <a:t>R²</a:t>
             </a:r>
-            <a:endParaRPr lang="en-US" sz="1000" dirty="0"/>
+            <a:endParaRPr lang="en-US" sz="1200" dirty="0">
+              <a:solidFill>
+                <a:schemeClr val="bg1"/>
+              </a:solidFill>
+              <a:latin typeface="Times New Roman" panose="02020603050405020304" pitchFamily="18" charset="0"/>
+              <a:cs typeface="Times New Roman" panose="02020603050405020304" pitchFamily="18" charset="0"/>
+            </a:endParaRPr>
           </a:p>
         </p:txBody>
       </p:sp>
@@ -9085,34 +10060,46 @@
               <a:buNone/>
             </a:pPr>
             <a:r>
-              <a:rPr lang="en-US" sz="1000" dirty="0">
-                <a:solidFill>
-                  <a:srgbClr val="94A3B8"/>
-                </a:solidFill>
-                <a:latin typeface="Calibri" pitchFamily="34" charset="0"/>
+              <a:rPr lang="en-US" sz="1200" dirty="0">
+                <a:solidFill>
+                  <a:schemeClr val="bg1"/>
+                </a:solidFill>
+                <a:latin typeface="Times New Roman" panose="02020603050405020304" pitchFamily="18" charset="0"/>
                 <a:ea typeface="Calibri" pitchFamily="34" charset="-122"/>
-                <a:cs typeface="Calibri" pitchFamily="34" charset="-120"/>
+                <a:cs typeface="Times New Roman" panose="02020603050405020304" pitchFamily="18" charset="0"/>
               </a:rPr>
               <a:t>Noyau RBF</a:t>
             </a:r>
-            <a:endParaRPr lang="en-US" sz="1000" dirty="0"/>
+            <a:endParaRPr lang="en-US" sz="1200" dirty="0">
+              <a:solidFill>
+                <a:schemeClr val="bg1"/>
+              </a:solidFill>
+              <a:latin typeface="Times New Roman" panose="02020603050405020304" pitchFamily="18" charset="0"/>
+              <a:cs typeface="Times New Roman" panose="02020603050405020304" pitchFamily="18" charset="0"/>
+            </a:endParaRPr>
           </a:p>
           <a:p>
             <a:pPr marL="0" indent="0" algn="ctr">
               <a:buNone/>
             </a:pPr>
             <a:r>
-              <a:rPr lang="en-US" sz="1000" dirty="0">
-                <a:solidFill>
-                  <a:srgbClr val="94A3B8"/>
-                </a:solidFill>
-                <a:latin typeface="Calibri" pitchFamily="34" charset="0"/>
+              <a:rPr lang="en-US" sz="1200" dirty="0">
+                <a:solidFill>
+                  <a:schemeClr val="bg1"/>
+                </a:solidFill>
+                <a:latin typeface="Times New Roman" panose="02020603050405020304" pitchFamily="18" charset="0"/>
                 <a:ea typeface="Calibri" pitchFamily="34" charset="-122"/>
-                <a:cs typeface="Calibri" pitchFamily="34" charset="-120"/>
+                <a:cs typeface="Times New Roman" panose="02020603050405020304" pitchFamily="18" charset="0"/>
               </a:rPr>
               <a:t>Bon mais plus lent</a:t>
             </a:r>
-            <a:endParaRPr lang="en-US" sz="1000" dirty="0"/>
+            <a:endParaRPr lang="en-US" sz="1200" dirty="0">
+              <a:solidFill>
+                <a:schemeClr val="bg1"/>
+              </a:solidFill>
+              <a:latin typeface="Times New Roman" panose="02020603050405020304" pitchFamily="18" charset="0"/>
+              <a:cs typeface="Times New Roman" panose="02020603050405020304" pitchFamily="18" charset="0"/>
+            </a:endParaRPr>
           </a:p>
         </p:txBody>
       </p:sp>
@@ -9172,17 +10159,20 @@
               <a:buNone/>
             </a:pPr>
             <a:r>
-              <a:rPr lang="en-US" sz="1000" b="1" dirty="0">
+              <a:rPr lang="en-US" sz="1200" b="1" dirty="0">
                 <a:solidFill>
                   <a:srgbClr val="FBBF24"/>
                 </a:solidFill>
-                <a:latin typeface="Calibri" pitchFamily="34" charset="0"/>
+                <a:latin typeface="Times New Roman" panose="02020603050405020304" pitchFamily="18" charset="0"/>
                 <a:ea typeface="Calibri" pitchFamily="34" charset="-122"/>
-                <a:cs typeface="Calibri" pitchFamily="34" charset="-120"/>
+                <a:cs typeface="Times New Roman" panose="02020603050405020304" pitchFamily="18" charset="0"/>
               </a:rPr>
               <a:t>Bon</a:t>
             </a:r>
-            <a:endParaRPr lang="en-US" sz="1000" dirty="0"/>
+            <a:endParaRPr lang="en-US" sz="1200" dirty="0">
+              <a:latin typeface="Times New Roman" panose="02020603050405020304" pitchFamily="18" charset="0"/>
+              <a:cs typeface="Times New Roman" panose="02020603050405020304" pitchFamily="18" charset="0"/>
+            </a:endParaRPr>
           </a:p>
         </p:txBody>
       </p:sp>
@@ -9267,13 +10257,16 @@
                 <a:solidFill>
                   <a:srgbClr val="4F8EF7"/>
                 </a:solidFill>
-                <a:latin typeface="Trebuchet MS" pitchFamily="34" charset="0"/>
+                <a:latin typeface="Times New Roman" panose="02020603050405020304" pitchFamily="18" charset="0"/>
                 <a:ea typeface="Trebuchet MS" pitchFamily="34" charset="-122"/>
-                <a:cs typeface="Trebuchet MS" pitchFamily="34" charset="-120"/>
-              </a:rPr>
-              <a:t>04 — Resultats &amp; Metriques</a:t>
-            </a:r>
-            <a:endParaRPr lang="en-US" sz="2200" dirty="0"/>
+                <a:cs typeface="Times New Roman" panose="02020603050405020304" pitchFamily="18" charset="0"/>
+              </a:rPr>
+              <a:t>04 — Resultats </a:t>
+            </a:r>
+            <a:endParaRPr lang="en-US" sz="2200" dirty="0">
+              <a:latin typeface="Times New Roman" panose="02020603050405020304" pitchFamily="18" charset="0"/>
+              <a:cs typeface="Times New Roman" panose="02020603050405020304" pitchFamily="18" charset="0"/>
+            </a:endParaRPr>
           </a:p>
         </p:txBody>
       </p:sp>
@@ -9432,17 +10425,23 @@
               <a:buNone/>
             </a:pPr>
             <a:r>
-              <a:rPr lang="en-US" sz="1000" dirty="0">
-                <a:solidFill>
-                  <a:srgbClr val="94A3B8"/>
-                </a:solidFill>
-                <a:latin typeface="Calibri" pitchFamily="34" charset="0"/>
+              <a:rPr lang="en-US" sz="1200" dirty="0">
+                <a:solidFill>
+                  <a:schemeClr val="bg1"/>
+                </a:solidFill>
+                <a:latin typeface="Times New Roman" panose="02020603050405020304" pitchFamily="18" charset="0"/>
                 <a:ea typeface="Calibri" pitchFamily="34" charset="-122"/>
-                <a:cs typeface="Calibri" pitchFamily="34" charset="-120"/>
+                <a:cs typeface="Times New Roman" panose="02020603050405020304" pitchFamily="18" charset="0"/>
               </a:rPr>
               <a:t>85% de la variance expliquee</a:t>
             </a:r>
-            <a:endParaRPr lang="en-US" sz="1000" dirty="0"/>
+            <a:endParaRPr lang="en-US" sz="1200" dirty="0">
+              <a:solidFill>
+                <a:schemeClr val="bg1"/>
+              </a:solidFill>
+              <a:latin typeface="Times New Roman" panose="02020603050405020304" pitchFamily="18" charset="0"/>
+              <a:cs typeface="Times New Roman" panose="02020603050405020304" pitchFamily="18" charset="0"/>
+            </a:endParaRPr>
           </a:p>
         </p:txBody>
       </p:sp>
@@ -9571,17 +10570,23 @@
               <a:buNone/>
             </a:pPr>
             <a:r>
-              <a:rPr lang="en-US" sz="1000" dirty="0">
-                <a:solidFill>
-                  <a:srgbClr val="94A3B8"/>
-                </a:solidFill>
-                <a:latin typeface="Calibri" pitchFamily="34" charset="0"/>
+              <a:rPr lang="en-US" sz="1200" dirty="0">
+                <a:solidFill>
+                  <a:schemeClr val="bg1"/>
+                </a:solidFill>
+                <a:latin typeface="Times New Roman" panose="02020603050405020304" pitchFamily="18" charset="0"/>
                 <a:ea typeface="Calibri" pitchFamily="34" charset="-122"/>
-                <a:cs typeface="Calibri" pitchFamily="34" charset="-120"/>
+                <a:cs typeface="Times New Roman" panose="02020603050405020304" pitchFamily="18" charset="0"/>
               </a:rPr>
               <a:t>Erreur absolue moyenne</a:t>
             </a:r>
-            <a:endParaRPr lang="en-US" sz="1000" dirty="0"/>
+            <a:endParaRPr lang="en-US" sz="1200" dirty="0">
+              <a:solidFill>
+                <a:schemeClr val="bg1"/>
+              </a:solidFill>
+              <a:latin typeface="Times New Roman" panose="02020603050405020304" pitchFamily="18" charset="0"/>
+              <a:cs typeface="Times New Roman" panose="02020603050405020304" pitchFamily="18" charset="0"/>
+            </a:endParaRPr>
           </a:p>
         </p:txBody>
       </p:sp>
@@ -9710,17 +10715,23 @@
               <a:buNone/>
             </a:pPr>
             <a:r>
-              <a:rPr lang="en-US" sz="1000" dirty="0">
-                <a:solidFill>
-                  <a:srgbClr val="94A3B8"/>
-                </a:solidFill>
-                <a:latin typeface="Calibri" pitchFamily="34" charset="0"/>
+              <a:rPr lang="en-US" sz="1200" dirty="0">
+                <a:solidFill>
+                  <a:schemeClr val="bg1"/>
+                </a:solidFill>
+                <a:latin typeface="Times New Roman" panose="02020603050405020304" pitchFamily="18" charset="0"/>
                 <a:ea typeface="Calibri" pitchFamily="34" charset="-122"/>
-                <a:cs typeface="Calibri" pitchFamily="34" charset="-120"/>
+                <a:cs typeface="Times New Roman" panose="02020603050405020304" pitchFamily="18" charset="0"/>
               </a:rPr>
               <a:t>Erreur quadratique</a:t>
             </a:r>
-            <a:endParaRPr lang="en-US" sz="1000" dirty="0"/>
+            <a:endParaRPr lang="en-US" sz="1200" dirty="0">
+              <a:solidFill>
+                <a:schemeClr val="bg1"/>
+              </a:solidFill>
+              <a:latin typeface="Times New Roman" panose="02020603050405020304" pitchFamily="18" charset="0"/>
+              <a:cs typeface="Times New Roman" panose="02020603050405020304" pitchFamily="18" charset="0"/>
+            </a:endParaRPr>
           </a:p>
         </p:txBody>
       </p:sp>
@@ -9849,17 +10860,23 @@
               <a:buNone/>
             </a:pPr>
             <a:r>
-              <a:rPr lang="en-US" sz="1000" dirty="0">
-                <a:solidFill>
-                  <a:srgbClr val="94A3B8"/>
-                </a:solidFill>
-                <a:latin typeface="Calibri" pitchFamily="34" charset="0"/>
+              <a:rPr lang="en-US" sz="1200" dirty="0">
+                <a:solidFill>
+                  <a:schemeClr val="bg1"/>
+                </a:solidFill>
+                <a:latin typeface="Times New Roman" panose="02020603050405020304" pitchFamily="18" charset="0"/>
                 <a:ea typeface="Calibri" pitchFamily="34" charset="-122"/>
-                <a:cs typeface="Calibri" pitchFamily="34" charset="-120"/>
+                <a:cs typeface="Times New Roman" panose="02020603050405020304" pitchFamily="18" charset="0"/>
               </a:rPr>
               <a:t>Validation croisee 5-fold</a:t>
             </a:r>
-            <a:endParaRPr lang="en-US" sz="1000" dirty="0"/>
+            <a:endParaRPr lang="en-US" sz="1200" dirty="0">
+              <a:solidFill>
+                <a:schemeClr val="bg1"/>
+              </a:solidFill>
+              <a:latin typeface="Times New Roman" panose="02020603050405020304" pitchFamily="18" charset="0"/>
+              <a:cs typeface="Times New Roman" panose="02020603050405020304" pitchFamily="18" charset="0"/>
+            </a:endParaRPr>
           </a:p>
         </p:txBody>
       </p:sp>
@@ -9926,13 +10943,16 @@
                 <a:solidFill>
                   <a:srgbClr val="4F8EF7"/>
                 </a:solidFill>
-                <a:latin typeface="Calibri" pitchFamily="34" charset="0"/>
+                <a:latin typeface="Times New Roman" panose="02020603050405020304" pitchFamily="18" charset="0"/>
                 <a:ea typeface="Calibri" pitchFamily="34" charset="-122"/>
-                <a:cs typeface="Calibri" pitchFamily="34" charset="-120"/>
+                <a:cs typeface="Times New Roman" panose="02020603050405020304" pitchFamily="18" charset="0"/>
               </a:rPr>
               <a:t>Comparaison R² par modele</a:t>
             </a:r>
-            <a:endParaRPr lang="en-US" sz="1300" dirty="0"/>
+            <a:endParaRPr lang="en-US" sz="1300" dirty="0">
+              <a:latin typeface="Times New Roman" panose="02020603050405020304" pitchFamily="18" charset="0"/>
+              <a:cs typeface="Times New Roman" panose="02020603050405020304" pitchFamily="18" charset="0"/>
+            </a:endParaRPr>
           </a:p>
         </p:txBody>
       </p:sp>
@@ -9961,17 +10981,23 @@
               <a:buNone/>
             </a:pPr>
             <a:r>
-              <a:rPr lang="en-US" sz="800" dirty="0">
-                <a:solidFill>
-                  <a:srgbClr val="94A3B8"/>
-                </a:solidFill>
-                <a:latin typeface="Calibri" pitchFamily="34" charset="0"/>
+              <a:rPr lang="en-US" sz="1200" dirty="0">
+                <a:solidFill>
+                  <a:schemeClr val="bg1"/>
+                </a:solidFill>
+                <a:latin typeface="Times New Roman" panose="02020603050405020304" pitchFamily="18" charset="0"/>
                 <a:ea typeface="Calibri" pitchFamily="34" charset="-122"/>
-                <a:cs typeface="Calibri" pitchFamily="34" charset="-120"/>
+                <a:cs typeface="Times New Roman" panose="02020603050405020304" pitchFamily="18" charset="0"/>
               </a:rPr>
               <a:t>Reg. Lineaire</a:t>
             </a:r>
-            <a:endParaRPr lang="en-US" sz="800" dirty="0"/>
+            <a:endParaRPr lang="en-US" sz="1200" dirty="0">
+              <a:solidFill>
+                <a:schemeClr val="bg1"/>
+              </a:solidFill>
+              <a:latin typeface="Times New Roman" panose="02020603050405020304" pitchFamily="18" charset="0"/>
+              <a:cs typeface="Times New Roman" panose="02020603050405020304" pitchFamily="18" charset="0"/>
+            </a:endParaRPr>
           </a:p>
         </p:txBody>
       </p:sp>
@@ -10029,9 +11055,9 @@
               <a:buNone/>
             </a:pPr>
             <a:r>
-              <a:rPr lang="en-US" sz="1000" b="1" dirty="0">
-                <a:solidFill>
-                  <a:srgbClr val="94A3B8"/>
+              <a:rPr lang="en-US" sz="1200" b="1" dirty="0">
+                <a:solidFill>
+                  <a:schemeClr val="bg1"/>
                 </a:solidFill>
                 <a:latin typeface="Trebuchet MS" pitchFamily="34" charset="0"/>
                 <a:ea typeface="Trebuchet MS" pitchFamily="34" charset="-122"/>
@@ -10039,7 +11065,11 @@
               </a:rPr>
               <a:t>0.7309</a:t>
             </a:r>
-            <a:endParaRPr lang="en-US" sz="1000" dirty="0"/>
+            <a:endParaRPr lang="en-US" sz="1200" dirty="0">
+              <a:solidFill>
+                <a:schemeClr val="bg1"/>
+              </a:solidFill>
+            </a:endParaRPr>
           </a:p>
         </p:txBody>
       </p:sp>
@@ -10068,17 +11098,23 @@
               <a:buNone/>
             </a:pPr>
             <a:r>
-              <a:rPr lang="en-US" sz="800" dirty="0">
-                <a:solidFill>
-                  <a:srgbClr val="94A3B8"/>
-                </a:solidFill>
-                <a:latin typeface="Calibri" pitchFamily="34" charset="0"/>
+              <a:rPr lang="en-US" sz="1200" dirty="0">
+                <a:solidFill>
+                  <a:schemeClr val="bg1"/>
+                </a:solidFill>
+                <a:latin typeface="Times New Roman" panose="02020603050405020304" pitchFamily="18" charset="0"/>
                 <a:ea typeface="Calibri" pitchFamily="34" charset="-122"/>
-                <a:cs typeface="Calibri" pitchFamily="34" charset="-120"/>
+                <a:cs typeface="Times New Roman" panose="02020603050405020304" pitchFamily="18" charset="0"/>
               </a:rPr>
               <a:t>SVR</a:t>
             </a:r>
-            <a:endParaRPr lang="en-US" sz="800" dirty="0"/>
+            <a:endParaRPr lang="en-US" sz="1200" dirty="0">
+              <a:solidFill>
+                <a:schemeClr val="bg1"/>
+              </a:solidFill>
+              <a:latin typeface="Times New Roman" panose="02020603050405020304" pitchFamily="18" charset="0"/>
+              <a:cs typeface="Times New Roman" panose="02020603050405020304" pitchFamily="18" charset="0"/>
+            </a:endParaRPr>
           </a:p>
         </p:txBody>
       </p:sp>
@@ -10136,7 +11172,7 @@
               <a:buNone/>
             </a:pPr>
             <a:r>
-              <a:rPr lang="en-US" sz="1000" b="1" dirty="0">
+              <a:rPr lang="en-US" sz="1200" b="1" dirty="0">
                 <a:solidFill>
                   <a:srgbClr val="FBBF24"/>
                 </a:solidFill>
@@ -10146,7 +11182,7 @@
               </a:rPr>
               <a:t>0.8067</a:t>
             </a:r>
-            <a:endParaRPr lang="en-US" sz="1000" dirty="0"/>
+            <a:endParaRPr lang="en-US" sz="1200" dirty="0"/>
           </a:p>
         </p:txBody>
       </p:sp>
@@ -10175,17 +11211,23 @@
               <a:buNone/>
             </a:pPr>
             <a:r>
-              <a:rPr lang="en-US" sz="800" dirty="0">
-                <a:solidFill>
-                  <a:srgbClr val="94A3B8"/>
-                </a:solidFill>
-                <a:latin typeface="Calibri" pitchFamily="34" charset="0"/>
+              <a:rPr lang="en-US" sz="1200" dirty="0">
+                <a:solidFill>
+                  <a:schemeClr val="bg1"/>
+                </a:solidFill>
+                <a:latin typeface="Times New Roman" panose="02020603050405020304" pitchFamily="18" charset="0"/>
                 <a:ea typeface="Calibri" pitchFamily="34" charset="-122"/>
-                <a:cs typeface="Calibri" pitchFamily="34" charset="-120"/>
+                <a:cs typeface="Times New Roman" panose="02020603050405020304" pitchFamily="18" charset="0"/>
               </a:rPr>
               <a:t>Random Forest</a:t>
             </a:r>
-            <a:endParaRPr lang="en-US" sz="800" dirty="0"/>
+            <a:endParaRPr lang="en-US" sz="1200" dirty="0">
+              <a:solidFill>
+                <a:schemeClr val="bg1"/>
+              </a:solidFill>
+              <a:latin typeface="Times New Roman" panose="02020603050405020304" pitchFamily="18" charset="0"/>
+              <a:cs typeface="Times New Roman" panose="02020603050405020304" pitchFamily="18" charset="0"/>
+            </a:endParaRPr>
           </a:p>
         </p:txBody>
       </p:sp>
@@ -10243,7 +11285,7 @@
               <a:buNone/>
             </a:pPr>
             <a:r>
-              <a:rPr lang="en-US" sz="1000" b="1" dirty="0">
+              <a:rPr lang="en-US" sz="1200" b="1" dirty="0">
                 <a:solidFill>
                   <a:srgbClr val="4F8EF7"/>
                 </a:solidFill>
@@ -10253,7 +11295,7 @@
               </a:rPr>
               <a:t>0.8219</a:t>
             </a:r>
-            <a:endParaRPr lang="en-US" sz="1000" dirty="0"/>
+            <a:endParaRPr lang="en-US" sz="1200" dirty="0"/>
           </a:p>
         </p:txBody>
       </p:sp>
@@ -10282,17 +11324,23 @@
               <a:buNone/>
             </a:pPr>
             <a:r>
-              <a:rPr lang="en-US" sz="800" dirty="0">
-                <a:solidFill>
-                  <a:srgbClr val="94A3B8"/>
-                </a:solidFill>
-                <a:latin typeface="Calibri" pitchFamily="34" charset="0"/>
+              <a:rPr lang="en-US" sz="1200" dirty="0">
+                <a:solidFill>
+                  <a:schemeClr val="bg1"/>
+                </a:solidFill>
+                <a:latin typeface="Times New Roman" panose="02020603050405020304" pitchFamily="18" charset="0"/>
                 <a:ea typeface="Calibri" pitchFamily="34" charset="-122"/>
-                <a:cs typeface="Calibri" pitchFamily="34" charset="-120"/>
+                <a:cs typeface="Times New Roman" panose="02020603050405020304" pitchFamily="18" charset="0"/>
               </a:rPr>
               <a:t>Gradient Boost</a:t>
             </a:r>
-            <a:endParaRPr lang="en-US" sz="800" dirty="0"/>
+            <a:endParaRPr lang="en-US" sz="1200" dirty="0">
+              <a:solidFill>
+                <a:schemeClr val="bg1"/>
+              </a:solidFill>
+              <a:latin typeface="Times New Roman" panose="02020603050405020304" pitchFamily="18" charset="0"/>
+              <a:cs typeface="Times New Roman" panose="02020603050405020304" pitchFamily="18" charset="0"/>
+            </a:endParaRPr>
           </a:p>
         </p:txBody>
       </p:sp>
@@ -10350,7 +11398,7 @@
               <a:buNone/>
             </a:pPr>
             <a:r>
-              <a:rPr lang="en-US" sz="1000" b="1" dirty="0">
+              <a:rPr lang="en-US" sz="1200" b="1" dirty="0">
                 <a:solidFill>
                   <a:srgbClr val="22D3EE"/>
                 </a:solidFill>
@@ -10360,7 +11408,7 @@
               </a:rPr>
               <a:t>0.8436</a:t>
             </a:r>
-            <a:endParaRPr lang="en-US" sz="1000" dirty="0"/>
+            <a:endParaRPr lang="en-US" sz="1200" dirty="0"/>
           </a:p>
         </p:txBody>
       </p:sp>
@@ -10389,17 +11437,23 @@
               <a:buNone/>
             </a:pPr>
             <a:r>
-              <a:rPr lang="en-US" sz="800" dirty="0">
-                <a:solidFill>
-                  <a:srgbClr val="94A3B8"/>
-                </a:solidFill>
-                <a:latin typeface="Calibri" pitchFamily="34" charset="0"/>
+              <a:rPr lang="en-US" sz="1200" dirty="0">
+                <a:solidFill>
+                  <a:schemeClr val="bg1"/>
+                </a:solidFill>
+                <a:latin typeface="Times New Roman" panose="02020603050405020304" pitchFamily="18" charset="0"/>
                 <a:ea typeface="Calibri" pitchFamily="34" charset="-122"/>
-                <a:cs typeface="Calibri" pitchFamily="34" charset="-120"/>
+                <a:cs typeface="Times New Roman" panose="02020603050405020304" pitchFamily="18" charset="0"/>
               </a:rPr>
               <a:t>XGBoost</a:t>
             </a:r>
-            <a:endParaRPr lang="en-US" sz="800" dirty="0"/>
+            <a:endParaRPr lang="en-US" sz="1200" dirty="0">
+              <a:solidFill>
+                <a:schemeClr val="bg1"/>
+              </a:solidFill>
+              <a:latin typeface="Times New Roman" panose="02020603050405020304" pitchFamily="18" charset="0"/>
+              <a:cs typeface="Times New Roman" panose="02020603050405020304" pitchFamily="18" charset="0"/>
+            </a:endParaRPr>
           </a:p>
         </p:txBody>
       </p:sp>
@@ -10457,7 +11511,7 @@
               <a:buNone/>
             </a:pPr>
             <a:r>
-              <a:rPr lang="en-US" sz="1000" b="1" dirty="0">
+              <a:rPr lang="en-US" sz="1200" b="1" dirty="0">
                 <a:solidFill>
                   <a:srgbClr val="22D3EE"/>
                 </a:solidFill>
@@ -10467,7 +11521,7 @@
               </a:rPr>
               <a:t>0.8362</a:t>
             </a:r>
-            <a:endParaRPr lang="en-US" sz="1000" dirty="0"/>
+            <a:endParaRPr lang="en-US" sz="1200" dirty="0"/>
           </a:p>
         </p:txBody>
       </p:sp>
@@ -10496,17 +11550,23 @@
               <a:buNone/>
             </a:pPr>
             <a:r>
-              <a:rPr lang="en-US" sz="800" dirty="0">
-                <a:solidFill>
-                  <a:srgbClr val="94A3B8"/>
-                </a:solidFill>
-                <a:latin typeface="Calibri" pitchFamily="34" charset="0"/>
+              <a:rPr lang="en-US" sz="1200" dirty="0">
+                <a:solidFill>
+                  <a:schemeClr val="bg1"/>
+                </a:solidFill>
+                <a:latin typeface="Times New Roman" panose="02020603050405020304" pitchFamily="18" charset="0"/>
                 <a:ea typeface="Calibri" pitchFamily="34" charset="-122"/>
-                <a:cs typeface="Calibri" pitchFamily="34" charset="-120"/>
+                <a:cs typeface="Times New Roman" panose="02020603050405020304" pitchFamily="18" charset="0"/>
               </a:rPr>
               <a:t>XGBoost Tune</a:t>
             </a:r>
-            <a:endParaRPr lang="en-US" sz="800" dirty="0"/>
+            <a:endParaRPr lang="en-US" sz="1200" dirty="0">
+              <a:solidFill>
+                <a:schemeClr val="bg1"/>
+              </a:solidFill>
+              <a:latin typeface="Times New Roman" panose="02020603050405020304" pitchFamily="18" charset="0"/>
+              <a:cs typeface="Times New Roman" panose="02020603050405020304" pitchFamily="18" charset="0"/>
+            </a:endParaRPr>
           </a:p>
         </p:txBody>
       </p:sp>
@@ -10564,7 +11624,7 @@
               <a:buNone/>
             </a:pPr>
             <a:r>
-              <a:rPr lang="en-US" sz="1000" b="1" dirty="0">
+              <a:rPr lang="en-US" sz="1200" b="1" dirty="0">
                 <a:solidFill>
                   <a:srgbClr val="34D399"/>
                 </a:solidFill>
@@ -10574,7 +11634,7 @@
               </a:rPr>
               <a:t>0.8502</a:t>
             </a:r>
-            <a:endParaRPr lang="en-US" sz="1000" dirty="0"/>
+            <a:endParaRPr lang="en-US" sz="1200" dirty="0"/>
           </a:p>
         </p:txBody>
       </p:sp>
@@ -10656,7 +11716,7 @@
           <a:bodyPr/>
           <a:lstStyle/>
           <a:p>
-            <a:endParaRPr lang="fr-FR"/>
+            <a:endParaRPr lang="fr-FR" dirty="0"/>
           </a:p>
         </p:txBody>
       </p:sp>
@@ -10689,13 +11749,16 @@
                 <a:solidFill>
                   <a:srgbClr val="4F8EF7"/>
                 </a:solidFill>
-                <a:latin typeface="Trebuchet MS" pitchFamily="34" charset="0"/>
+                <a:latin typeface="Times New Roman" panose="02020603050405020304" pitchFamily="18" charset="0"/>
                 <a:ea typeface="Trebuchet MS" pitchFamily="34" charset="-122"/>
-                <a:cs typeface="Trebuchet MS" pitchFamily="34" charset="-120"/>
+                <a:cs typeface="Times New Roman" panose="02020603050405020304" pitchFamily="18" charset="0"/>
               </a:rPr>
               <a:t>05 — Importance des Variables</a:t>
             </a:r>
-            <a:endParaRPr lang="en-US" sz="2200" dirty="0"/>
+            <a:endParaRPr lang="en-US" sz="2200" dirty="0">
+              <a:latin typeface="Times New Roman" panose="02020603050405020304" pitchFamily="18" charset="0"/>
+              <a:cs typeface="Times New Roman" panose="02020603050405020304" pitchFamily="18" charset="0"/>
+            </a:endParaRPr>
           </a:p>
         </p:txBody>
       </p:sp>
@@ -10756,15 +11819,21 @@
             <a:r>
               <a:rPr lang="en-US" sz="1200" b="1" dirty="0">
                 <a:solidFill>
-                  <a:srgbClr val="F1F5F9"/>
-                </a:solidFill>
-                <a:latin typeface="Calibri" pitchFamily="34" charset="0"/>
+                  <a:schemeClr val="bg1"/>
+                </a:solidFill>
+                <a:latin typeface="Times New Roman" panose="02020603050405020304" pitchFamily="18" charset="0"/>
                 <a:ea typeface="Calibri" pitchFamily="34" charset="-122"/>
-                <a:cs typeface="Calibri" pitchFamily="34" charset="-120"/>
+                <a:cs typeface="Times New Roman" panose="02020603050405020304" pitchFamily="18" charset="0"/>
               </a:rPr>
               <a:t>Point de Contact</a:t>
             </a:r>
-            <a:endParaRPr lang="en-US" sz="1200" dirty="0"/>
+            <a:endParaRPr lang="en-US" sz="1200" dirty="0">
+              <a:solidFill>
+                <a:schemeClr val="bg1"/>
+              </a:solidFill>
+              <a:latin typeface="Times New Roman" panose="02020603050405020304" pitchFamily="18" charset="0"/>
+              <a:cs typeface="Times New Roman" panose="02020603050405020304" pitchFamily="18" charset="0"/>
+            </a:endParaRPr>
           </a:p>
         </p:txBody>
       </p:sp>
@@ -10851,9 +11920,9 @@
               <a:buNone/>
             </a:pPr>
             <a:r>
-              <a:rPr lang="en-US" sz="1100" b="1" dirty="0">
-                <a:solidFill>
-                  <a:srgbClr val="F472B6"/>
+              <a:rPr lang="en-US" sz="1200" b="1" dirty="0">
+                <a:solidFill>
+                  <a:schemeClr val="bg1"/>
                 </a:solidFill>
                 <a:latin typeface="Trebuchet MS" pitchFamily="34" charset="0"/>
                 <a:ea typeface="Trebuchet MS" pitchFamily="34" charset="-122"/>
@@ -10861,7 +11930,11 @@
               </a:rPr>
               <a:t>65.3%</a:t>
             </a:r>
-            <a:endParaRPr lang="en-US" sz="1100" dirty="0"/>
+            <a:endParaRPr lang="en-US" sz="1200" dirty="0">
+              <a:solidFill>
+                <a:schemeClr val="bg1"/>
+              </a:solidFill>
+            </a:endParaRPr>
           </a:p>
         </p:txBody>
       </p:sp>
@@ -10892,15 +11965,21 @@
             <a:r>
               <a:rPr lang="en-US" sz="1200" b="1" dirty="0">
                 <a:solidFill>
-                  <a:srgbClr val="F1F5F9"/>
-                </a:solidFill>
-                <a:latin typeface="Calibri" pitchFamily="34" charset="0"/>
+                  <a:schemeClr val="bg1"/>
+                </a:solidFill>
+                <a:latin typeface="Times New Roman" panose="02020603050405020304" pitchFamily="18" charset="0"/>
                 <a:ea typeface="Calibri" pitchFamily="34" charset="-122"/>
-                <a:cs typeface="Calibri" pitchFamily="34" charset="-120"/>
+                <a:cs typeface="Times New Roman" panose="02020603050405020304" pitchFamily="18" charset="0"/>
               </a:rPr>
               <a:t>Salles de bain</a:t>
             </a:r>
-            <a:endParaRPr lang="en-US" sz="1200" dirty="0"/>
+            <a:endParaRPr lang="en-US" sz="1200" dirty="0">
+              <a:solidFill>
+                <a:schemeClr val="bg1"/>
+              </a:solidFill>
+              <a:latin typeface="Times New Roman" panose="02020603050405020304" pitchFamily="18" charset="0"/>
+              <a:cs typeface="Times New Roman" panose="02020603050405020304" pitchFamily="18" charset="0"/>
+            </a:endParaRPr>
           </a:p>
         </p:txBody>
       </p:sp>
@@ -10987,9 +12066,9 @@
               <a:buNone/>
             </a:pPr>
             <a:r>
-              <a:rPr lang="en-US" sz="1100" b="1" dirty="0">
-                <a:solidFill>
-                  <a:srgbClr val="4F8EF7"/>
+              <a:rPr lang="en-US" sz="1200" b="1" dirty="0">
+                <a:solidFill>
+                  <a:schemeClr val="bg1"/>
                 </a:solidFill>
                 <a:latin typeface="Trebuchet MS" pitchFamily="34" charset="0"/>
                 <a:ea typeface="Trebuchet MS" pitchFamily="34" charset="-122"/>
@@ -10997,7 +12076,11 @@
               </a:rPr>
               <a:t>18.5%</a:t>
             </a:r>
-            <a:endParaRPr lang="en-US" sz="1100" dirty="0"/>
+            <a:endParaRPr lang="en-US" sz="1200" dirty="0">
+              <a:solidFill>
+                <a:schemeClr val="bg1"/>
+              </a:solidFill>
+            </a:endParaRPr>
           </a:p>
         </p:txBody>
       </p:sp>
@@ -11028,15 +12111,21 @@
             <a:r>
               <a:rPr lang="en-US" sz="1200" b="1" dirty="0">
                 <a:solidFill>
-                  <a:srgbClr val="F1F5F9"/>
-                </a:solidFill>
-                <a:latin typeface="Calibri" pitchFamily="34" charset="0"/>
+                  <a:schemeClr val="bg1"/>
+                </a:solidFill>
+                <a:latin typeface="Times New Roman" panose="02020603050405020304" pitchFamily="18" charset="0"/>
                 <a:ea typeface="Calibri" pitchFamily="34" charset="-122"/>
-                <a:cs typeface="Calibri" pitchFamily="34" charset="-120"/>
+                <a:cs typeface="Times New Roman" panose="02020603050405020304" pitchFamily="18" charset="0"/>
               </a:rPr>
               <a:t>Ville</a:t>
             </a:r>
-            <a:endParaRPr lang="en-US" sz="1200" dirty="0"/>
+            <a:endParaRPr lang="en-US" sz="1200" dirty="0">
+              <a:solidFill>
+                <a:schemeClr val="bg1"/>
+              </a:solidFill>
+              <a:latin typeface="Times New Roman" panose="02020603050405020304" pitchFamily="18" charset="0"/>
+              <a:cs typeface="Times New Roman" panose="02020603050405020304" pitchFamily="18" charset="0"/>
+            </a:endParaRPr>
           </a:p>
         </p:txBody>
       </p:sp>
@@ -11123,9 +12212,9 @@
               <a:buNone/>
             </a:pPr>
             <a:r>
-              <a:rPr lang="en-US" sz="1100" b="1" dirty="0">
-                <a:solidFill>
-                  <a:srgbClr val="22D3EE"/>
+              <a:rPr lang="en-US" sz="1200" b="1" dirty="0">
+                <a:solidFill>
+                  <a:schemeClr val="bg1"/>
                 </a:solidFill>
                 <a:latin typeface="Trebuchet MS" pitchFamily="34" charset="0"/>
                 <a:ea typeface="Trebuchet MS" pitchFamily="34" charset="-122"/>
@@ -11133,7 +12222,11 @@
               </a:rPr>
               <a:t>6.2%</a:t>
             </a:r>
-            <a:endParaRPr lang="en-US" sz="1100" dirty="0"/>
+            <a:endParaRPr lang="en-US" sz="1200" dirty="0">
+              <a:solidFill>
+                <a:schemeClr val="bg1"/>
+              </a:solidFill>
+            </a:endParaRPr>
           </a:p>
         </p:txBody>
       </p:sp>
@@ -11164,15 +12257,21 @@
             <a:r>
               <a:rPr lang="en-US" sz="1200" dirty="0">
                 <a:solidFill>
-                  <a:srgbClr val="F1F5F9"/>
-                </a:solidFill>
-                <a:latin typeface="Calibri" pitchFamily="34" charset="0"/>
+                  <a:schemeClr val="bg1"/>
+                </a:solidFill>
+                <a:latin typeface="Times New Roman" panose="02020603050405020304" pitchFamily="18" charset="0"/>
                 <a:ea typeface="Calibri" pitchFamily="34" charset="-122"/>
-                <a:cs typeface="Calibri" pitchFamily="34" charset="-120"/>
+                <a:cs typeface="Times New Roman" panose="02020603050405020304" pitchFamily="18" charset="0"/>
               </a:rPr>
               <a:t>BHK</a:t>
             </a:r>
-            <a:endParaRPr lang="en-US" sz="1200" dirty="0"/>
+            <a:endParaRPr lang="en-US" sz="1200" dirty="0">
+              <a:solidFill>
+                <a:schemeClr val="bg1"/>
+              </a:solidFill>
+              <a:latin typeface="Times New Roman" panose="02020603050405020304" pitchFamily="18" charset="0"/>
+              <a:cs typeface="Times New Roman" panose="02020603050405020304" pitchFamily="18" charset="0"/>
+            </a:endParaRPr>
           </a:p>
         </p:txBody>
       </p:sp>
@@ -11259,9 +12358,9 @@
               <a:buNone/>
             </a:pPr>
             <a:r>
-              <a:rPr lang="en-US" sz="1100" b="1" dirty="0">
-                <a:solidFill>
-                  <a:srgbClr val="34D399"/>
+              <a:rPr lang="en-US" sz="1200" b="1" dirty="0">
+                <a:solidFill>
+                  <a:schemeClr val="bg1"/>
                 </a:solidFill>
                 <a:latin typeface="Trebuchet MS" pitchFamily="34" charset="0"/>
                 <a:ea typeface="Trebuchet MS" pitchFamily="34" charset="-122"/>
@@ -11269,7 +12368,11 @@
               </a:rPr>
               <a:t>3.4%</a:t>
             </a:r>
-            <a:endParaRPr lang="en-US" sz="1100" dirty="0"/>
+            <a:endParaRPr lang="en-US" sz="1200" dirty="0">
+              <a:solidFill>
+                <a:schemeClr val="bg1"/>
+              </a:solidFill>
+            </a:endParaRPr>
           </a:p>
         </p:txBody>
       </p:sp>
@@ -11300,15 +12403,21 @@
             <a:r>
               <a:rPr lang="en-US" sz="1200" dirty="0">
                 <a:solidFill>
-                  <a:srgbClr val="F1F5F9"/>
-                </a:solidFill>
-                <a:latin typeface="Calibri" pitchFamily="34" charset="0"/>
+                  <a:schemeClr val="bg1"/>
+                </a:solidFill>
+                <a:latin typeface="Times New Roman" panose="02020603050405020304" pitchFamily="18" charset="0"/>
                 <a:ea typeface="Calibri" pitchFamily="34" charset="-122"/>
-                <a:cs typeface="Calibri" pitchFamily="34" charset="-120"/>
+                <a:cs typeface="Times New Roman" panose="02020603050405020304" pitchFamily="18" charset="0"/>
               </a:rPr>
               <a:t>Surface (log)</a:t>
             </a:r>
-            <a:endParaRPr lang="en-US" sz="1200" dirty="0"/>
+            <a:endParaRPr lang="en-US" sz="1200" dirty="0">
+              <a:solidFill>
+                <a:schemeClr val="bg1"/>
+              </a:solidFill>
+              <a:latin typeface="Times New Roman" panose="02020603050405020304" pitchFamily="18" charset="0"/>
+              <a:cs typeface="Times New Roman" panose="02020603050405020304" pitchFamily="18" charset="0"/>
+            </a:endParaRPr>
           </a:p>
         </p:txBody>
       </p:sp>
@@ -11395,9 +12504,9 @@
               <a:buNone/>
             </a:pPr>
             <a:r>
-              <a:rPr lang="en-US" sz="1100" b="1" dirty="0">
-                <a:solidFill>
-                  <a:srgbClr val="FBBF24"/>
+              <a:rPr lang="en-US" sz="1200" b="1" dirty="0">
+                <a:solidFill>
+                  <a:schemeClr val="bg1"/>
                 </a:solidFill>
                 <a:latin typeface="Trebuchet MS" pitchFamily="34" charset="0"/>
                 <a:ea typeface="Trebuchet MS" pitchFamily="34" charset="-122"/>
@@ -11405,7 +12514,11 @@
               </a:rPr>
               <a:t>2.9%</a:t>
             </a:r>
-            <a:endParaRPr lang="en-US" sz="1100" dirty="0"/>
+            <a:endParaRPr lang="en-US" sz="1200" dirty="0">
+              <a:solidFill>
+                <a:schemeClr val="bg1"/>
+              </a:solidFill>
+            </a:endParaRPr>
           </a:p>
         </p:txBody>
       </p:sp>
@@ -11436,15 +12549,21 @@
             <a:r>
               <a:rPr lang="en-US" sz="1200" dirty="0">
                 <a:solidFill>
-                  <a:srgbClr val="F1F5F9"/>
-                </a:solidFill>
-                <a:latin typeface="Calibri" pitchFamily="34" charset="0"/>
+                  <a:schemeClr val="bg1"/>
+                </a:solidFill>
+                <a:latin typeface="Times New Roman" panose="02020603050405020304" pitchFamily="18" charset="0"/>
                 <a:ea typeface="Calibri" pitchFamily="34" charset="-122"/>
-                <a:cs typeface="Calibri" pitchFamily="34" charset="-120"/>
+                <a:cs typeface="Times New Roman" panose="02020603050405020304" pitchFamily="18" charset="0"/>
               </a:rPr>
               <a:t>Meublage</a:t>
             </a:r>
-            <a:endParaRPr lang="en-US" sz="1200" dirty="0"/>
+            <a:endParaRPr lang="en-US" sz="1200" dirty="0">
+              <a:solidFill>
+                <a:schemeClr val="bg1"/>
+              </a:solidFill>
+              <a:latin typeface="Times New Roman" panose="02020603050405020304" pitchFamily="18" charset="0"/>
+              <a:cs typeface="Times New Roman" panose="02020603050405020304" pitchFamily="18" charset="0"/>
+            </a:endParaRPr>
           </a:p>
         </p:txBody>
       </p:sp>
@@ -11531,9 +12650,9 @@
               <a:buNone/>
             </a:pPr>
             <a:r>
-              <a:rPr lang="en-US" sz="1100" b="1" dirty="0">
-                <a:solidFill>
-                  <a:srgbClr val="94A3B8"/>
+              <a:rPr lang="en-US" sz="1200" b="1" dirty="0">
+                <a:solidFill>
+                  <a:schemeClr val="bg1"/>
                 </a:solidFill>
                 <a:latin typeface="Trebuchet MS" pitchFamily="34" charset="0"/>
                 <a:ea typeface="Trebuchet MS" pitchFamily="34" charset="-122"/>
@@ -11541,7 +12660,11 @@
               </a:rPr>
               <a:t>2.1%</a:t>
             </a:r>
-            <a:endParaRPr lang="en-US" sz="1100" dirty="0"/>
+            <a:endParaRPr lang="en-US" sz="1200" dirty="0">
+              <a:solidFill>
+                <a:schemeClr val="bg1"/>
+              </a:solidFill>
+            </a:endParaRPr>
           </a:p>
         </p:txBody>
       </p:sp>
@@ -11572,15 +12695,21 @@
             <a:r>
               <a:rPr lang="en-US" sz="1200" dirty="0">
                 <a:solidFill>
-                  <a:srgbClr val="F1F5F9"/>
-                </a:solidFill>
-                <a:latin typeface="Calibri" pitchFamily="34" charset="0"/>
+                  <a:schemeClr val="bg1"/>
+                </a:solidFill>
+                <a:latin typeface="Times New Roman" panose="02020603050405020304" pitchFamily="18" charset="0"/>
                 <a:ea typeface="Calibri" pitchFamily="34" charset="-122"/>
-                <a:cs typeface="Calibri" pitchFamily="34" charset="-120"/>
+                <a:cs typeface="Times New Roman" panose="02020603050405020304" pitchFamily="18" charset="0"/>
               </a:rPr>
               <a:t>Etage, Superficie, Locataire</a:t>
             </a:r>
-            <a:endParaRPr lang="en-US" sz="1200" dirty="0"/>
+            <a:endParaRPr lang="en-US" sz="1200" dirty="0">
+              <a:solidFill>
+                <a:schemeClr val="bg1"/>
+              </a:solidFill>
+              <a:latin typeface="Times New Roman" panose="02020603050405020304" pitchFamily="18" charset="0"/>
+              <a:cs typeface="Times New Roman" panose="02020603050405020304" pitchFamily="18" charset="0"/>
+            </a:endParaRPr>
           </a:p>
         </p:txBody>
       </p:sp>
@@ -11667,9 +12796,9 @@
               <a:buNone/>
             </a:pPr>
             <a:r>
-              <a:rPr lang="en-US" sz="1100" b="1" dirty="0">
-                <a:solidFill>
-                  <a:srgbClr val="1C2639"/>
+              <a:rPr lang="en-US" sz="1200" b="1" dirty="0">
+                <a:solidFill>
+                  <a:schemeClr val="bg1"/>
                 </a:solidFill>
                 <a:latin typeface="Trebuchet MS" pitchFamily="34" charset="0"/>
                 <a:ea typeface="Trebuchet MS" pitchFamily="34" charset="-122"/>
@@ -11677,7 +12806,11 @@
               </a:rPr>
               <a:t>1.7%</a:t>
             </a:r>
-            <a:endParaRPr lang="en-US" sz="1100" dirty="0"/>
+            <a:endParaRPr lang="en-US" sz="1200" dirty="0">
+              <a:solidFill>
+                <a:schemeClr val="bg1"/>
+              </a:solidFill>
+            </a:endParaRPr>
           </a:p>
         </p:txBody>
       </p:sp>
@@ -11690,7 +12823,7 @@
         <p:spPr>
           <a:xfrm>
             <a:off x="457200" y="6172200"/>
-            <a:ext cx="10972800" cy="777240"/>
+            <a:ext cx="11384280" cy="685794"/>
           </a:xfrm>
           <a:prstGeom prst="roundRect">
             <a:avLst>
@@ -11767,17 +12900,23 @@
               <a:buNone/>
             </a:pPr>
             <a:r>
-              <a:rPr lang="en-US" sz="1100" dirty="0">
-                <a:solidFill>
-                  <a:srgbClr val="94A3B8"/>
-                </a:solidFill>
-                <a:latin typeface="Calibri" pitchFamily="34" charset="0"/>
+              <a:rPr lang="en-US" sz="1200" dirty="0">
+                <a:solidFill>
+                  <a:schemeClr val="bg1"/>
+                </a:solidFill>
+                <a:latin typeface="Times New Roman" panose="02020603050405020304" pitchFamily="18" charset="0"/>
                 <a:ea typeface="Calibri" pitchFamily="34" charset="-122"/>
-                <a:cs typeface="Calibri" pitchFamily="34" charset="-120"/>
+                <a:cs typeface="Times New Roman" panose="02020603050405020304" pitchFamily="18" charset="0"/>
               </a:rPr>
               <a:t>Conclusion cle : Point de Contact (65.3%) domine — les biens via agents/builders ciblent le segment premium. Salles de bain (18.5%) et Ville (6.2%) confirment les drivers classiques du marche immobilier.</a:t>
             </a:r>
-            <a:endParaRPr lang="en-US" sz="1100" dirty="0"/>
+            <a:endParaRPr lang="en-US" sz="1200" dirty="0">
+              <a:solidFill>
+                <a:schemeClr val="bg1"/>
+              </a:solidFill>
+              <a:latin typeface="Times New Roman" panose="02020603050405020304" pitchFamily="18" charset="0"/>
+              <a:cs typeface="Times New Roman" panose="02020603050405020304" pitchFamily="18" charset="0"/>
+            </a:endParaRPr>
           </a:p>
         </p:txBody>
       </p:sp>
@@ -11862,13 +13001,16 @@
                 <a:solidFill>
                   <a:srgbClr val="4F8EF7"/>
                 </a:solidFill>
-                <a:latin typeface="Trebuchet MS" pitchFamily="34" charset="0"/>
+                <a:latin typeface="Times New Roman" panose="02020603050405020304" pitchFamily="18" charset="0"/>
                 <a:ea typeface="Trebuchet MS" pitchFamily="34" charset="-122"/>
-                <a:cs typeface="Trebuchet MS" pitchFamily="34" charset="-120"/>
-              </a:rPr>
-              <a:t>06 — Dashboard &amp; Deploiement Web</a:t>
-            </a:r>
-            <a:endParaRPr lang="en-US" sz="2200" dirty="0"/>
+                <a:cs typeface="Times New Roman" panose="02020603050405020304" pitchFamily="18" charset="0"/>
+              </a:rPr>
+              <a:t>05 — Dashboard &amp; Deploiement Web</a:t>
+            </a:r>
+            <a:endParaRPr lang="en-US" sz="2200" dirty="0">
+              <a:latin typeface="Times New Roman" panose="02020603050405020304" pitchFamily="18" charset="0"/>
+              <a:cs typeface="Times New Roman" panose="02020603050405020304" pitchFamily="18" charset="0"/>
+            </a:endParaRPr>
           </a:p>
         </p:txBody>
       </p:sp>
@@ -12057,13 +13199,16 @@
                 <a:solidFill>
                   <a:srgbClr val="FFFFFF"/>
                 </a:solidFill>
-                <a:latin typeface="Trebuchet MS" pitchFamily="34" charset="0"/>
+                <a:latin typeface="Times New Roman" panose="02020603050405020304" pitchFamily="18" charset="0"/>
                 <a:ea typeface="Trebuchet MS" pitchFamily="34" charset="-122"/>
-                <a:cs typeface="Trebuchet MS" pitchFamily="34" charset="-120"/>
+                <a:cs typeface="Times New Roman" panose="02020603050405020304" pitchFamily="18" charset="0"/>
               </a:rPr>
               <a:t>Dashboard EDA</a:t>
             </a:r>
-            <a:endParaRPr lang="en-US" sz="1400" dirty="0"/>
+            <a:endParaRPr lang="en-US" sz="1400" dirty="0">
+              <a:latin typeface="Times New Roman" panose="02020603050405020304" pitchFamily="18" charset="0"/>
+              <a:cs typeface="Times New Roman" panose="02020603050405020304" pitchFamily="18" charset="0"/>
+            </a:endParaRPr>
           </a:p>
         </p:txBody>
       </p:sp>
@@ -12092,17 +13237,23 @@
               <a:buNone/>
             </a:pPr>
             <a:r>
-              <a:rPr lang="en-US" sz="1100" dirty="0">
-                <a:solidFill>
-                  <a:srgbClr val="94A3B8"/>
-                </a:solidFill>
-                <a:latin typeface="Calibri" pitchFamily="34" charset="0"/>
+              <a:rPr lang="en-US" sz="1200" dirty="0">
+                <a:solidFill>
+                  <a:schemeClr val="bg1"/>
+                </a:solidFill>
+                <a:latin typeface="Times New Roman" panose="02020603050405020304" pitchFamily="18" charset="0"/>
                 <a:ea typeface="Calibri" pitchFamily="34" charset="-122"/>
-                <a:cs typeface="Calibri" pitchFamily="34" charset="-120"/>
+                <a:cs typeface="Times New Roman" panose="02020603050405020304" pitchFamily="18" charset="0"/>
               </a:rPr>
               <a:t>Visualisations interactives : loyers par ville, par meublage, BHK, comparaison modeles</a:t>
             </a:r>
-            <a:endParaRPr lang="en-US" sz="1100" dirty="0"/>
+            <a:endParaRPr lang="en-US" sz="1200" dirty="0">
+              <a:solidFill>
+                <a:schemeClr val="bg1"/>
+              </a:solidFill>
+              <a:latin typeface="Times New Roman" panose="02020603050405020304" pitchFamily="18" charset="0"/>
+              <a:cs typeface="Times New Roman" panose="02020603050405020304" pitchFamily="18" charset="0"/>
+            </a:endParaRPr>
           </a:p>
         </p:txBody>
       </p:sp>
@@ -12261,13 +13412,16 @@
                 <a:solidFill>
                   <a:srgbClr val="FFFFFF"/>
                 </a:solidFill>
-                <a:latin typeface="Trebuchet MS" pitchFamily="34" charset="0"/>
+                <a:latin typeface="Times New Roman" panose="02020603050405020304" pitchFamily="18" charset="0"/>
                 <a:ea typeface="Trebuchet MS" pitchFamily="34" charset="-122"/>
-                <a:cs typeface="Trebuchet MS" pitchFamily="34" charset="-120"/>
+                <a:cs typeface="Times New Roman" panose="02020603050405020304" pitchFamily="18" charset="0"/>
               </a:rPr>
               <a:t>Prediction individuelle</a:t>
             </a:r>
-            <a:endParaRPr lang="en-US" sz="1400" dirty="0"/>
+            <a:endParaRPr lang="en-US" sz="1400" dirty="0">
+              <a:latin typeface="Times New Roman" panose="02020603050405020304" pitchFamily="18" charset="0"/>
+              <a:cs typeface="Times New Roman" panose="02020603050405020304" pitchFamily="18" charset="0"/>
+            </a:endParaRPr>
           </a:p>
         </p:txBody>
       </p:sp>
@@ -12296,17 +13450,23 @@
               <a:buNone/>
             </a:pPr>
             <a:r>
-              <a:rPr lang="en-US" sz="1100" dirty="0">
-                <a:solidFill>
-                  <a:srgbClr val="94A3B8"/>
-                </a:solidFill>
-                <a:latin typeface="Calibri" pitchFamily="34" charset="0"/>
+              <a:rPr lang="en-US" sz="1200" dirty="0">
+                <a:solidFill>
+                  <a:schemeClr val="bg1"/>
+                </a:solidFill>
+                <a:latin typeface="Times New Roman" panose="02020603050405020304" pitchFamily="18" charset="0"/>
                 <a:ea typeface="Calibri" pitchFamily="34" charset="-122"/>
-                <a:cs typeface="Calibri" pitchFamily="34" charset="-120"/>
+                <a:cs typeface="Times New Roman" panose="02020603050405020304" pitchFamily="18" charset="0"/>
               </a:rPr>
               <a:t>Formulaire de saisie manuelle → estimation instantanee avec fourchette de confiance</a:t>
             </a:r>
-            <a:endParaRPr lang="en-US" sz="1100" dirty="0"/>
+            <a:endParaRPr lang="en-US" sz="1200" dirty="0">
+              <a:solidFill>
+                <a:schemeClr val="bg1"/>
+              </a:solidFill>
+              <a:latin typeface="Times New Roman" panose="02020603050405020304" pitchFamily="18" charset="0"/>
+              <a:cs typeface="Times New Roman" panose="02020603050405020304" pitchFamily="18" charset="0"/>
+            </a:endParaRPr>
           </a:p>
         </p:txBody>
       </p:sp>
@@ -12463,15 +13623,21 @@
             <a:r>
               <a:rPr lang="en-US" sz="1400" b="1" dirty="0">
                 <a:solidFill>
-                  <a:srgbClr val="FFFFFF"/>
-                </a:solidFill>
-                <a:latin typeface="Trebuchet MS" pitchFamily="34" charset="0"/>
+                  <a:schemeClr val="bg1"/>
+                </a:solidFill>
+                <a:latin typeface="Times New Roman" panose="02020603050405020304" pitchFamily="18" charset="0"/>
                 <a:ea typeface="Trebuchet MS" pitchFamily="34" charset="-122"/>
-                <a:cs typeface="Trebuchet MS" pitchFamily="34" charset="-120"/>
+                <a:cs typeface="Times New Roman" panose="02020603050405020304" pitchFamily="18" charset="0"/>
               </a:rPr>
               <a:t>Prediction par fichier</a:t>
             </a:r>
-            <a:endParaRPr lang="en-US" sz="1400" dirty="0"/>
+            <a:endParaRPr lang="en-US" sz="1400" dirty="0">
+              <a:solidFill>
+                <a:schemeClr val="bg1"/>
+              </a:solidFill>
+              <a:latin typeface="Times New Roman" panose="02020603050405020304" pitchFamily="18" charset="0"/>
+              <a:cs typeface="Times New Roman" panose="02020603050405020304" pitchFamily="18" charset="0"/>
+            </a:endParaRPr>
           </a:p>
         </p:txBody>
       </p:sp>
@@ -12500,17 +13666,23 @@
               <a:buNone/>
             </a:pPr>
             <a:r>
-              <a:rPr lang="en-US" sz="1100" dirty="0">
-                <a:solidFill>
-                  <a:srgbClr val="94A3B8"/>
-                </a:solidFill>
-                <a:latin typeface="Calibri" pitchFamily="34" charset="0"/>
+              <a:rPr lang="en-US" sz="1200" dirty="0">
+                <a:solidFill>
+                  <a:schemeClr val="bg1"/>
+                </a:solidFill>
+                <a:latin typeface="Times New Roman" panose="02020603050405020304" pitchFamily="18" charset="0"/>
                 <a:ea typeface="Calibri" pitchFamily="34" charset="-122"/>
-                <a:cs typeface="Calibri" pitchFamily="34" charset="-120"/>
+                <a:cs typeface="Times New Roman" panose="02020603050405020304" pitchFamily="18" charset="0"/>
               </a:rPr>
               <a:t>Import CSV → predictions batch pour plusieurs logements, export resultats</a:t>
             </a:r>
-            <a:endParaRPr lang="en-US" sz="1100" dirty="0"/>
+            <a:endParaRPr lang="en-US" sz="1200" dirty="0">
+              <a:solidFill>
+                <a:schemeClr val="bg1"/>
+              </a:solidFill>
+              <a:latin typeface="Times New Roman" panose="02020603050405020304" pitchFamily="18" charset="0"/>
+              <a:cs typeface="Times New Roman" panose="02020603050405020304" pitchFamily="18" charset="0"/>
+            </a:endParaRPr>
           </a:p>
         </p:txBody>
       </p:sp>
@@ -12669,13 +13841,16 @@
                 <a:solidFill>
                   <a:srgbClr val="FFFFFF"/>
                 </a:solidFill>
-                <a:latin typeface="Trebuchet MS" pitchFamily="34" charset="0"/>
+                <a:latin typeface="Times New Roman" panose="02020603050405020304" pitchFamily="18" charset="0"/>
                 <a:ea typeface="Trebuchet MS" pitchFamily="34" charset="-122"/>
-                <a:cs typeface="Trebuchet MS" pitchFamily="34" charset="-120"/>
+                <a:cs typeface="Times New Roman" panose="02020603050405020304" pitchFamily="18" charset="0"/>
               </a:rPr>
               <a:t>Analyse des modeles</a:t>
             </a:r>
-            <a:endParaRPr lang="en-US" sz="1400" dirty="0"/>
+            <a:endParaRPr lang="en-US" sz="1400" dirty="0">
+              <a:latin typeface="Times New Roman" panose="02020603050405020304" pitchFamily="18" charset="0"/>
+              <a:cs typeface="Times New Roman" panose="02020603050405020304" pitchFamily="18" charset="0"/>
+            </a:endParaRPr>
           </a:p>
         </p:txBody>
       </p:sp>
@@ -12704,17 +13879,23 @@
               <a:buNone/>
             </a:pPr>
             <a:r>
-              <a:rPr lang="en-US" sz="1100" dirty="0">
-                <a:solidFill>
-                  <a:srgbClr val="94A3B8"/>
-                </a:solidFill>
-                <a:latin typeface="Calibri" pitchFamily="34" charset="0"/>
+              <a:rPr lang="en-US" sz="1200" dirty="0">
+                <a:solidFill>
+                  <a:schemeClr val="bg1"/>
+                </a:solidFill>
+                <a:latin typeface="Times New Roman" panose="02020603050405020304" pitchFamily="18" charset="0"/>
                 <a:ea typeface="Calibri" pitchFamily="34" charset="-122"/>
-                <a:cs typeface="Calibri" pitchFamily="34" charset="-120"/>
+                <a:cs typeface="Times New Roman" panose="02020603050405020304" pitchFamily="18" charset="0"/>
               </a:rPr>
               <a:t>Comparaison R²/MAE/RMSE, CV scores, hyperparametres, feature importance</a:t>
             </a:r>
-            <a:endParaRPr lang="en-US" sz="1100" dirty="0"/>
+            <a:endParaRPr lang="en-US" sz="1200" dirty="0">
+              <a:solidFill>
+                <a:schemeClr val="bg1"/>
+              </a:solidFill>
+              <a:latin typeface="Times New Roman" panose="02020603050405020304" pitchFamily="18" charset="0"/>
+              <a:cs typeface="Times New Roman" panose="02020603050405020304" pitchFamily="18" charset="0"/>
+            </a:endParaRPr>
           </a:p>
         </p:txBody>
       </p:sp>
@@ -12773,21 +13954,29 @@
           <a:bodyPr wrap="square" rtlCol="0" anchor="ctr"/>
           <a:lstStyle/>
           <a:p>
-            <a:pPr marL="0" indent="0">
-              <a:buNone/>
-            </a:pPr>
-            <a:r>
-              <a:rPr lang="en-US" sz="1100" dirty="0">
-                <a:solidFill>
-                  <a:srgbClr val="94A3B8"/>
-                </a:solidFill>
-                <a:latin typeface="Calibri" pitchFamily="34" charset="0"/>
+            <a:r>
+              <a:rPr lang="en-US" sz="1200" dirty="0">
+                <a:solidFill>
+                  <a:schemeClr val="bg1"/>
+                </a:solidFill>
+                <a:latin typeface="Times New Roman" panose="02020603050405020304" pitchFamily="18" charset="0"/>
                 <a:ea typeface="Calibri" pitchFamily="34" charset="-122"/>
-                <a:cs typeface="Calibri" pitchFamily="34" charset="-120"/>
-              </a:rPr>
-              <a:t>Stack technique : Python (scikit-learn, XGBoost, pandas) → Modele entraine → Dashboard HTML/CSS/JS autonome (aucun serveur requis, deploiement instantane)</a:t>
-            </a:r>
-            <a:endParaRPr lang="en-US" sz="1100" dirty="0"/>
+                <a:cs typeface="Times New Roman" panose="02020603050405020304" pitchFamily="18" charset="0"/>
+              </a:rPr>
+              <a:t>Stack technique : Python (scikit-learn, XGBoost, pandas) → Modele entraine → </a:t>
+            </a:r>
+            <a:r>
+              <a:rPr lang="fr-FR" sz="1200" dirty="0">
+                <a:latin typeface="Times New Roman" panose="02020603050405020304" pitchFamily="18" charset="0"/>
+                <a:cs typeface="Times New Roman" panose="02020603050405020304" pitchFamily="18" charset="0"/>
+                <a:hlinkClick r:id="rId3"/>
+              </a:rPr>
+              <a:t>House Rent Prediction — Dashboard</a:t>
+            </a:r>
+            <a:endParaRPr lang="en-US" sz="1100" dirty="0">
+              <a:latin typeface="Times New Roman" panose="02020603050405020304" pitchFamily="18" charset="0"/>
+              <a:cs typeface="Times New Roman" panose="02020603050405020304" pitchFamily="18" charset="0"/>
+            </a:endParaRPr>
           </a:p>
         </p:txBody>
       </p:sp>
@@ -12930,13 +14119,16 @@
                 <a:solidFill>
                   <a:srgbClr val="4F8EF7"/>
                 </a:solidFill>
-                <a:latin typeface="Trebuchet MS" pitchFamily="34" charset="0"/>
+                <a:latin typeface="Times New Roman" panose="02020603050405020304" pitchFamily="18" charset="0"/>
                 <a:ea typeface="Trebuchet MS" pitchFamily="34" charset="-122"/>
-                <a:cs typeface="Trebuchet MS" pitchFamily="34" charset="-120"/>
+                <a:cs typeface="Times New Roman" panose="02020603050405020304" pitchFamily="18" charset="0"/>
               </a:rPr>
               <a:t>07 — Conclusion &amp; Perspectives</a:t>
             </a:r>
-            <a:endParaRPr lang="en-US" sz="2200" dirty="0"/>
+            <a:endParaRPr lang="en-US" sz="2200" dirty="0">
+              <a:latin typeface="Times New Roman" panose="02020603050405020304" pitchFamily="18" charset="0"/>
+              <a:cs typeface="Times New Roman" panose="02020603050405020304" pitchFamily="18" charset="0"/>
+            </a:endParaRPr>
           </a:p>
         </p:txBody>
       </p:sp>
@@ -13000,7 +14192,7 @@
           <a:bodyPr/>
           <a:lstStyle/>
           <a:p>
-            <a:endParaRPr lang="fr-FR"/>
+            <a:endParaRPr lang="fr-FR" dirty="0"/>
           </a:p>
         </p:txBody>
       </p:sp>
@@ -13055,14 +14247,6 @@
             <a:pPr marL="0" indent="0" algn="ctr">
               <a:buNone/>
             </a:pPr>
-            <a:r>
-              <a:rPr lang="en-US" sz="1800" dirty="0">
-                <a:solidFill>
-                  <a:srgbClr val="000000"/>
-                </a:solidFill>
-              </a:rPr>
-              <a:t>✅</a:t>
-            </a:r>
             <a:endParaRPr lang="en-US" sz="1800" dirty="0"/>
           </a:p>
         </p:txBody>
@@ -13092,17 +14276,23 @@
               <a:buNone/>
             </a:pPr>
             <a:r>
-              <a:rPr lang="en-US" sz="1300" dirty="0">
-                <a:solidFill>
-                  <a:srgbClr val="F1F5F9"/>
-                </a:solidFill>
-                <a:latin typeface="Calibri" pitchFamily="34" charset="0"/>
+              <a:rPr lang="en-US" sz="1400" dirty="0">
+                <a:solidFill>
+                  <a:schemeClr val="bg1"/>
+                </a:solidFill>
+                <a:latin typeface="Times New Roman" panose="02020603050405020304" pitchFamily="18" charset="0"/>
                 <a:ea typeface="Calibri" pitchFamily="34" charset="-122"/>
-                <a:cs typeface="Calibri" pitchFamily="34" charset="-120"/>
+                <a:cs typeface="Times New Roman" panose="02020603050405020304" pitchFamily="18" charset="0"/>
               </a:rPr>
               <a:t>R² = 85.02% avec XGBoost tune — objectif depasse (&gt;80%)</a:t>
             </a:r>
-            <a:endParaRPr lang="en-US" sz="1300" dirty="0"/>
+            <a:endParaRPr lang="en-US" sz="1400" dirty="0">
+              <a:solidFill>
+                <a:schemeClr val="bg1"/>
+              </a:solidFill>
+              <a:latin typeface="Times New Roman" panose="02020603050405020304" pitchFamily="18" charset="0"/>
+              <a:cs typeface="Times New Roman" panose="02020603050405020304" pitchFamily="18" charset="0"/>
+            </a:endParaRPr>
           </a:p>
         </p:txBody>
       </p:sp>
@@ -13169,42 +14359,6 @@
       </p:sp>
       <p:sp>
         <p:nvSpPr>
-          <p:cNvPr id="13" name="Text 11"/>
-          <p:cNvSpPr/>
-          <p:nvPr/>
-        </p:nvSpPr>
-        <p:spPr>
-          <a:xfrm>
-            <a:off x="594360" y="1965960"/>
-            <a:ext cx="502920" cy="640080"/>
-          </a:xfrm>
-          <a:prstGeom prst="rect">
-            <a:avLst/>
-          </a:prstGeom>
-          <a:noFill/>
-          <a:ln/>
-        </p:spPr>
-        <p:txBody>
-          <a:bodyPr wrap="square" rtlCol="0" anchor="ctr"/>
-          <a:lstStyle/>
-          <a:p>
-            <a:pPr marL="0" indent="0" algn="ctr">
-              <a:buNone/>
-            </a:pPr>
-            <a:r>
-              <a:rPr lang="en-US" sz="1800" dirty="0">
-                <a:solidFill>
-                  <a:srgbClr val="000000"/>
-                </a:solidFill>
-              </a:rPr>
-              <a:t>✅</a:t>
-            </a:r>
-            <a:endParaRPr lang="en-US" sz="1800" dirty="0"/>
-          </a:p>
-        </p:txBody>
-      </p:sp>
-      <p:sp>
-        <p:nvSpPr>
           <p:cNvPr id="14" name="Text 12"/>
           <p:cNvSpPr/>
           <p:nvPr/>
@@ -13228,17 +14382,23 @@
               <a:buNone/>
             </a:pPr>
             <a:r>
-              <a:rPr lang="en-US" sz="1300" dirty="0">
-                <a:solidFill>
-                  <a:srgbClr val="F1F5F9"/>
-                </a:solidFill>
-                <a:latin typeface="Calibri" pitchFamily="34" charset="0"/>
+              <a:rPr lang="en-US" sz="1400" dirty="0">
+                <a:solidFill>
+                  <a:schemeClr val="bg1"/>
+                </a:solidFill>
+                <a:latin typeface="Times New Roman" panose="02020603050405020304" pitchFamily="18" charset="0"/>
                 <a:ea typeface="Calibri" pitchFamily="34" charset="-122"/>
-                <a:cs typeface="Calibri" pitchFamily="34" charset="-120"/>
+                <a:cs typeface="Times New Roman" panose="02020603050405020304" pitchFamily="18" charset="0"/>
               </a:rPr>
               <a:t>Pipeline complet : EDA → Nettoyage → Encodage → Modeles → Validation croisee</a:t>
             </a:r>
-            <a:endParaRPr lang="en-US" sz="1300" dirty="0"/>
+            <a:endParaRPr lang="en-US" sz="1400" dirty="0">
+              <a:solidFill>
+                <a:schemeClr val="bg1"/>
+              </a:solidFill>
+              <a:latin typeface="Times New Roman" panose="02020603050405020304" pitchFamily="18" charset="0"/>
+              <a:cs typeface="Times New Roman" panose="02020603050405020304" pitchFamily="18" charset="0"/>
+            </a:endParaRPr>
           </a:p>
         </p:txBody>
       </p:sp>
@@ -13305,42 +14465,6 @@
       </p:sp>
       <p:sp>
         <p:nvSpPr>
-          <p:cNvPr id="17" name="Text 15"/>
-          <p:cNvSpPr/>
-          <p:nvPr/>
-        </p:nvSpPr>
-        <p:spPr>
-          <a:xfrm>
-            <a:off x="594360" y="2926080"/>
-            <a:ext cx="502920" cy="640080"/>
-          </a:xfrm>
-          <a:prstGeom prst="rect">
-            <a:avLst/>
-          </a:prstGeom>
-          <a:noFill/>
-          <a:ln/>
-        </p:spPr>
-        <p:txBody>
-          <a:bodyPr wrap="square" rtlCol="0" anchor="ctr"/>
-          <a:lstStyle/>
-          <a:p>
-            <a:pPr marL="0" indent="0" algn="ctr">
-              <a:buNone/>
-            </a:pPr>
-            <a:r>
-              <a:rPr lang="en-US" sz="1800" dirty="0">
-                <a:solidFill>
-                  <a:srgbClr val="000000"/>
-                </a:solidFill>
-              </a:rPr>
-              <a:t>✅</a:t>
-            </a:r>
-            <a:endParaRPr lang="en-US" sz="1800" dirty="0"/>
-          </a:p>
-        </p:txBody>
-      </p:sp>
-      <p:sp>
-        <p:nvSpPr>
           <p:cNvPr id="18" name="Text 16"/>
           <p:cNvSpPr/>
           <p:nvPr/>
@@ -13364,17 +14488,20 @@
               <a:buNone/>
             </a:pPr>
             <a:r>
-              <a:rPr lang="en-US" sz="1300" dirty="0">
+              <a:rPr lang="en-US" sz="1400" dirty="0">
                 <a:solidFill>
                   <a:srgbClr val="F1F5F9"/>
                 </a:solidFill>
-                <a:latin typeface="Calibri" pitchFamily="34" charset="0"/>
+                <a:latin typeface="Times New Roman" panose="02020603050405020304" pitchFamily="18" charset="0"/>
                 <a:ea typeface="Calibri" pitchFamily="34" charset="-122"/>
-                <a:cs typeface="Calibri" pitchFamily="34" charset="-120"/>
+                <a:cs typeface="Times New Roman" panose="02020603050405020304" pitchFamily="18" charset="0"/>
               </a:rPr>
               <a:t>6 algorithmes compares avec GridSearchCV et hyperparametres justifies</a:t>
             </a:r>
-            <a:endParaRPr lang="en-US" sz="1300" dirty="0"/>
+            <a:endParaRPr lang="en-US" sz="1400" dirty="0">
+              <a:latin typeface="Times New Roman" panose="02020603050405020304" pitchFamily="18" charset="0"/>
+              <a:cs typeface="Times New Roman" panose="02020603050405020304" pitchFamily="18" charset="0"/>
+            </a:endParaRPr>
           </a:p>
         </p:txBody>
       </p:sp>
@@ -13441,42 +14568,6 @@
       </p:sp>
       <p:sp>
         <p:nvSpPr>
-          <p:cNvPr id="21" name="Text 19"/>
-          <p:cNvSpPr/>
-          <p:nvPr/>
-        </p:nvSpPr>
-        <p:spPr>
-          <a:xfrm>
-            <a:off x="594360" y="3886200"/>
-            <a:ext cx="502920" cy="640080"/>
-          </a:xfrm>
-          <a:prstGeom prst="rect">
-            <a:avLst/>
-          </a:prstGeom>
-          <a:noFill/>
-          <a:ln/>
-        </p:spPr>
-        <p:txBody>
-          <a:bodyPr wrap="square" rtlCol="0" anchor="ctr"/>
-          <a:lstStyle/>
-          <a:p>
-            <a:pPr marL="0" indent="0" algn="ctr">
-              <a:buNone/>
-            </a:pPr>
-            <a:r>
-              <a:rPr lang="en-US" sz="1800" dirty="0">
-                <a:solidFill>
-                  <a:srgbClr val="000000"/>
-                </a:solidFill>
-              </a:rPr>
-              <a:t>✅</a:t>
-            </a:r>
-            <a:endParaRPr lang="en-US" sz="1800" dirty="0"/>
-          </a:p>
-        </p:txBody>
-      </p:sp>
-      <p:sp>
-        <p:nvSpPr>
           <p:cNvPr id="22" name="Text 20"/>
           <p:cNvSpPr/>
           <p:nvPr/>
@@ -13500,17 +14591,20 @@
               <a:buNone/>
             </a:pPr>
             <a:r>
-              <a:rPr lang="en-US" sz="1300" dirty="0">
+              <a:rPr lang="en-US" sz="1400" dirty="0">
                 <a:solidFill>
                   <a:srgbClr val="F1F5F9"/>
                 </a:solidFill>
-                <a:latin typeface="Calibri" pitchFamily="34" charset="0"/>
+                <a:latin typeface="Times New Roman" panose="02020603050405020304" pitchFamily="18" charset="0"/>
                 <a:ea typeface="Calibri" pitchFamily="34" charset="-122"/>
-                <a:cs typeface="Calibri" pitchFamily="34" charset="-120"/>
+                <a:cs typeface="Times New Roman" panose="02020603050405020304" pitchFamily="18" charset="0"/>
               </a:rPr>
               <a:t>Dashboard deploye : prediction individuelle + batch CSV + visualisations</a:t>
             </a:r>
-            <a:endParaRPr lang="en-US" sz="1300" dirty="0"/>
+            <a:endParaRPr lang="en-US" sz="1400" dirty="0">
+              <a:latin typeface="Times New Roman" panose="02020603050405020304" pitchFamily="18" charset="0"/>
+              <a:cs typeface="Times New Roman" panose="02020603050405020304" pitchFamily="18" charset="0"/>
+            </a:endParaRPr>
           </a:p>
         </p:txBody>
       </p:sp>
@@ -13577,42 +14671,6 @@
       </p:sp>
       <p:sp>
         <p:nvSpPr>
-          <p:cNvPr id="25" name="Text 23"/>
-          <p:cNvSpPr/>
-          <p:nvPr/>
-        </p:nvSpPr>
-        <p:spPr>
-          <a:xfrm>
-            <a:off x="594360" y="4846320"/>
-            <a:ext cx="502920" cy="640080"/>
-          </a:xfrm>
-          <a:prstGeom prst="rect">
-            <a:avLst/>
-          </a:prstGeom>
-          <a:noFill/>
-          <a:ln/>
-        </p:spPr>
-        <p:txBody>
-          <a:bodyPr wrap="square" rtlCol="0" anchor="ctr"/>
-          <a:lstStyle/>
-          <a:p>
-            <a:pPr marL="0" indent="0" algn="ctr">
-              <a:buNone/>
-            </a:pPr>
-            <a:r>
-              <a:rPr lang="en-US" sz="1800" dirty="0">
-                <a:solidFill>
-                  <a:srgbClr val="000000"/>
-                </a:solidFill>
-              </a:rPr>
-              <a:t>✅</a:t>
-            </a:r>
-            <a:endParaRPr lang="en-US" sz="1800" dirty="0"/>
-          </a:p>
-        </p:txBody>
-      </p:sp>
-      <p:sp>
-        <p:nvSpPr>
           <p:cNvPr id="26" name="Text 24"/>
           <p:cNvSpPr/>
           <p:nvPr/>
@@ -13636,56 +14694,23 @@
               <a:buNone/>
             </a:pPr>
             <a:r>
-              <a:rPr lang="en-US" sz="1300" dirty="0">
-                <a:solidFill>
-                  <a:srgbClr val="F1F5F9"/>
-                </a:solidFill>
-                <a:latin typeface="Calibri" pitchFamily="34" charset="0"/>
+              <a:rPr lang="en-US" sz="1400" dirty="0">
+                <a:solidFill>
+                  <a:schemeClr val="bg1"/>
+                </a:solidFill>
+                <a:latin typeface="Times New Roman" panose="02020603050405020304" pitchFamily="18" charset="0"/>
                 <a:ea typeface="Calibri" pitchFamily="34" charset="-122"/>
-                <a:cs typeface="Calibri" pitchFamily="34" charset="-120"/>
+                <a:cs typeface="Times New Roman" panose="02020603050405020304" pitchFamily="18" charset="0"/>
               </a:rPr>
               <a:t>Variables cles identifiees : Point de contact, Salles de bain, Ville</a:t>
             </a:r>
-            <a:endParaRPr lang="en-US" sz="1300" dirty="0"/>
-          </a:p>
-        </p:txBody>
-      </p:sp>
-      <p:sp>
-        <p:nvSpPr>
-          <p:cNvPr id="27" name="Text 25"/>
-          <p:cNvSpPr/>
-          <p:nvPr/>
-        </p:nvSpPr>
-        <p:spPr>
-          <a:xfrm>
-            <a:off x="457200" y="5943600"/>
-            <a:ext cx="10972800" cy="457200"/>
-          </a:xfrm>
-          <a:prstGeom prst="rect">
-            <a:avLst/>
-          </a:prstGeom>
-          <a:noFill/>
-          <a:ln/>
-        </p:spPr>
-        <p:txBody>
-          <a:bodyPr wrap="square" rtlCol="0" anchor="ctr"/>
-          <a:lstStyle/>
-          <a:p>
-            <a:pPr marL="0" indent="0" algn="ctr">
-              <a:buNone/>
-            </a:pPr>
-            <a:r>
-              <a:rPr lang="en-US" sz="1400" i="1" dirty="0">
-                <a:solidFill>
-                  <a:srgbClr val="94A3B8"/>
-                </a:solidFill>
-                <a:latin typeface="Calibri" pitchFamily="34" charset="0"/>
-                <a:ea typeface="Calibri" pitchFamily="34" charset="-122"/>
-                <a:cs typeface="Calibri" pitchFamily="34" charset="-120"/>
-              </a:rPr>
-              <a:t>Merci pour votre attention</a:t>
-            </a:r>
-            <a:endParaRPr lang="en-US" sz="1400" dirty="0"/>
+            <a:endParaRPr lang="en-US" sz="1400" dirty="0">
+              <a:solidFill>
+                <a:schemeClr val="bg1"/>
+              </a:solidFill>
+              <a:latin typeface="Times New Roman" panose="02020603050405020304" pitchFamily="18" charset="0"/>
+              <a:cs typeface="Times New Roman" panose="02020603050405020304" pitchFamily="18" charset="0"/>
+            </a:endParaRPr>
           </a:p>
         </p:txBody>
       </p:sp>
